--- a/reports/hyderabad-old-city-sir-2026-deck.pptx
+++ b/reports/hyderabad-old-city-sir-2026-deck.pptx
@@ -5837,7 +5837,7 @@
                 <a:ea typeface="Calibri" pitchFamily="34" charset="-122"/>
                 <a:cs typeface="Calibri" pitchFamily="34" charset="-120"/>
               </a:rPr>
-              <a:t>The Malakpet list used here is incomplete: 1,42,688 names against the 1,47,799 counted in the published list, with no part numbers and no 2002 link. For the other four constituencies the counts agree exactly with the Sabar Institute's independent count. These are the September lists; restorations after hearings are not in them.</a:t>
+              <a:t>The Malakpet list used here is incomplete: 1,42,688 names against the 1,47,799 counted in the published list, with no part numbers and no 2002 link. For the other four constituencies the counts agree exactly with an independent count of the same lists. These are the September lists; restorations after hearings are not in them.</a:t>
             </a:r>
             <a:endParaRPr lang="en-US" sz="1700" dirty="0"/>
           </a:p>

--- a/reports/hyderabad-old-city-sir-2026-deck.pptx
+++ b/reports/hyderabad-old-city-sir-2026-deck.pptx
@@ -126,7 +126,7 @@
 </p:presentation>
 </file>
 
-<file path=ppt/charts/chart13.xml><?xml version="1.0" encoding="utf-8"?>
+<file path=ppt/charts/chart19.xml><?xml version="1.0" encoding="utf-8"?>
 <c:chartSpace xmlns:c="http://schemas.openxmlformats.org/drawingml/2006/chart" xmlns:a="http://schemas.openxmlformats.org/drawingml/2006/main" xmlns:r="http://schemas.openxmlformats.org/officeDocument/2006/relationships">
   <c:date1904 val="0"/>
   <c:roundedCorners val="1"/>
@@ -590,7 +590,7 @@
 </c:chartSpace>
 </file>
 
-<file path=ppt/charts/chart14.xml><?xml version="1.0" encoding="utf-8"?>
+<file path=ppt/charts/chart20.xml><?xml version="1.0" encoding="utf-8"?>
 <c:chartSpace xmlns:c="http://schemas.openxmlformats.org/drawingml/2006/chart" xmlns:a="http://schemas.openxmlformats.org/drawingml/2006/main" xmlns:r="http://schemas.openxmlformats.org/officeDocument/2006/relationships">
   <c:date1904 val="0"/>
   <c:roundedCorners val="1"/>
@@ -1144,7 +1144,7 @@
 </c:chartSpace>
 </file>
 
-<file path=ppt/charts/chart15.xml><?xml version="1.0" encoding="utf-8"?>
+<file path=ppt/charts/chart21.xml><?xml version="1.0" encoding="utf-8"?>
 <c:chartSpace xmlns:c="http://schemas.openxmlformats.org/drawingml/2006/chart" xmlns:a="http://schemas.openxmlformats.org/drawingml/2006/main" xmlns:r="http://schemas.openxmlformats.org/officeDocument/2006/relationships">
   <c:date1904 val="0"/>
   <c:roundedCorners val="1"/>
@@ -1414,7 +1414,7 @@
 </c:chartSpace>
 </file>
 
-<file path=ppt/charts/chart16.xml><?xml version="1.0" encoding="utf-8"?>
+<file path=ppt/charts/chart22.xml><?xml version="1.0" encoding="utf-8"?>
 <c:chartSpace xmlns:c="http://schemas.openxmlformats.org/drawingml/2006/chart" xmlns:a="http://schemas.openxmlformats.org/drawingml/2006/main" xmlns:r="http://schemas.openxmlformats.org/officeDocument/2006/relationships">
   <c:date1904 val="0"/>
   <c:roundedCorners val="1"/>
@@ -1766,7 +1766,7 @@
 </c:chartSpace>
 </file>
 
-<file path=ppt/charts/chart17.xml><?xml version="1.0" encoding="utf-8"?>
+<file path=ppt/charts/chart23.xml><?xml version="1.0" encoding="utf-8"?>
 <c:chartSpace xmlns:c="http://schemas.openxmlformats.org/drawingml/2006/chart" xmlns:a="http://schemas.openxmlformats.org/drawingml/2006/main" xmlns:r="http://schemas.openxmlformats.org/officeDocument/2006/relationships">
   <c:date1904 val="0"/>
   <c:roundedCorners val="1"/>
@@ -2130,7 +2130,7 @@
 </c:chartSpace>
 </file>
 
-<file path=ppt/charts/chart18.xml><?xml version="1.0" encoding="utf-8"?>
+<file path=ppt/charts/chart24.xml><?xml version="1.0" encoding="utf-8"?>
 <c:chartSpace xmlns:c="http://schemas.openxmlformats.org/drawingml/2006/chart" xmlns:a="http://schemas.openxmlformats.org/drawingml/2006/main" xmlns:r="http://schemas.openxmlformats.org/officeDocument/2006/relationships">
   <c:date1904 val="0"/>
   <c:roundedCorners val="1"/>
@@ -2494,7 +2494,7 @@
 </c:chartSpace>
 </file>
 
-<file path=ppt/charts/chart19.xml><?xml version="1.0" encoding="utf-8"?>
+<file path=ppt/charts/chart25.xml><?xml version="1.0" encoding="utf-8"?>
 <c:chartSpace xmlns:c="http://schemas.openxmlformats.org/drawingml/2006/chart" xmlns:a="http://schemas.openxmlformats.org/drawingml/2006/main" xmlns:r="http://schemas.openxmlformats.org/officeDocument/2006/relationships">
   <c:date1904 val="0"/>
   <c:roundedCorners val="1"/>
@@ -2835,7 +2835,7 @@
 </c:chartSpace>
 </file>
 
-<file path=ppt/charts/chart20.xml><?xml version="1.0" encoding="utf-8"?>
+<file path=ppt/charts/chart26.xml><?xml version="1.0" encoding="utf-8"?>
 <c:chartSpace xmlns:c="http://schemas.openxmlformats.org/drawingml/2006/chart" xmlns:a="http://schemas.openxmlformats.org/drawingml/2006/main" xmlns:r="http://schemas.openxmlformats.org/officeDocument/2006/relationships">
   <c:date1904 val="0"/>
   <c:roundedCorners val="1"/>
@@ -3099,7 +3099,7 @@
 </c:chartSpace>
 </file>
 
-<file path=ppt/charts/chart21.xml><?xml version="1.0" encoding="utf-8"?>
+<file path=ppt/charts/chart27.xml><?xml version="1.0" encoding="utf-8"?>
 <c:chartSpace xmlns:c="http://schemas.openxmlformats.org/drawingml/2006/chart" xmlns:a="http://schemas.openxmlformats.org/drawingml/2006/main" xmlns:r="http://schemas.openxmlformats.org/officeDocument/2006/relationships">
   <c:date1904 val="0"/>
   <c:roundedCorners val="1"/>
@@ -3463,7 +3463,7 @@
 </c:chartSpace>
 </file>
 
-<file path=ppt/charts/chart22.xml><?xml version="1.0" encoding="utf-8"?>
+<file path=ppt/charts/chart28.xml><?xml version="1.0" encoding="utf-8"?>
 <c:chartSpace xmlns:c="http://schemas.openxmlformats.org/drawingml/2006/chart" xmlns:a="http://schemas.openxmlformats.org/drawingml/2006/main" xmlns:r="http://schemas.openxmlformats.org/officeDocument/2006/relationships">
   <c:date1904 val="0"/>
   <c:roundedCorners val="1"/>
@@ -10128,50 +10128,6 @@
           </a:graphicData>
         </a:graphic>
       </p:graphicFrame>
-      <p:sp>
-        <p:nvSpPr>
-          <p:cNvPr id="49" name="Text 45"/>
-          <p:cNvSpPr txBox="1"/>
-          <p:nvPr/>
-        </p:nvSpPr>
-        <p:spPr>
-          <a:xfrm>
-            <a:off x="6675120" y="3749040"/>
-            <a:ext cx="4967935" cy="1097280"/>
-          </a:xfrm>
-          <a:prstGeom prst="rect">
-            <a:avLst/>
-          </a:prstGeom>
-          <a:noFill/>
-          <a:ln/>
-        </p:spPr>
-        <p:txBody>
-          <a:bodyPr wrap="square" lIns="0" tIns="0" rIns="0" bIns="0" rtlCol="0" anchor="t">
-            <a:normAutofit/>
-          </a:bodyPr>
-          <a:lstStyle/>
-          <a:p>
-            <a:pPr indent="0" marL="0">
-              <a:spcAft>
-                <a:spcPts val="800"/>
-              </a:spcAft>
-              <a:buNone/>
-            </a:pPr>
-            <a:r>
-              <a:rPr lang="en-US" sz="1400" dirty="0">
-                <a:solidFill>
-                  <a:srgbClr val="4D5B69"/>
-                </a:solidFill>
-                <a:latin typeface="Calibri" pitchFamily="34" charset="0"/>
-                <a:ea typeface="Calibri" pitchFamily="34" charset="-122"/>
-                <a:cs typeface="Calibri" pitchFamily="34" charset="-120"/>
-              </a:rPr>
-              <a:t>A part far above the rest of its constituency is where checking on the ground should start.</a:t>
-            </a:r>
-            <a:endParaRPr lang="en-US" sz="1400" dirty="0"/>
-          </a:p>
-        </p:txBody>
-      </p:sp>
     </p:spTree>
   </p:cSld>
   <p:clrMapOvr>
@@ -25190,7 +25146,7 @@
                 <a:ea typeface="Calibri" pitchFamily="34" charset="-122"/>
                 <a:cs typeface="Calibri" pitchFamily="34" charset="-120"/>
               </a:rPr>
-              <a:t>LIMITS AND NEXT STEPS</a:t>
+              <a:t>LIMITS</a:t>
             </a:r>
             <a:endParaRPr lang="en-US" sz="1100" dirty="0"/>
           </a:p>
@@ -26343,7 +26299,7 @@
                 <a:ea typeface="Calibri" pitchFamily="34" charset="-122"/>
                 <a:cs typeface="Calibri" pitchFamily="34" charset="-120"/>
               </a:rPr>
-              <a:t>LIMITS AND NEXT STEPS</a:t>
+              <a:t>WHAT THE ELECTION COMMISSION SHOULD DO</a:t>
             </a:r>
             <a:endParaRPr lang="en-US" sz="1100" dirty="0"/>
           </a:p>
@@ -26384,7 +26340,7 @@
                 <a:ea typeface="Cambria" pitchFamily="34" charset="-122"/>
                 <a:cs typeface="Cambria" pitchFamily="34" charset="-120"/>
               </a:rPr>
-              <a:t>What checking needs before the final roll</a:t>
+              <a:t>Before the final roll</a:t>
             </a:r>
             <a:endParaRPr lang="en-US" sz="2700" dirty="0"/>
           </a:p>
@@ -27308,7 +27264,7 @@
                 <a:ea typeface="Calibri" pitchFamily="34" charset="-122"/>
                 <a:cs typeface="Calibri" pitchFamily="34" charset="-120"/>
               </a:rPr>
-              <a:t>Verify every removal entered as "untraceable or absent", 1,37,825 names, by a visit with notice and a record of the attempt.</a:t>
+              <a:t>Record and publish the basis for every removal entered as "untraceable or absent", 1,37,825 names: the visits made and the notice given.</a:t>
             </a:r>
             <a:endParaRPr lang="en-US" sz="1700" dirty="0"/>
           </a:p>
@@ -27330,7 +27286,7 @@
                 <a:ea typeface="Calibri" pitchFamily="34" charset="-122"/>
                 <a:cs typeface="Calibri" pitchFamily="34" charset="-120"/>
               </a:rPr>
-              <a:t>Review every removal of an elector with no link to the 2002 roll.</a:t>
+              <a:t>Publish how removals of electors with no link to the 2002 roll were decided.</a:t>
             </a:r>
             <a:endParaRPr lang="en-US" sz="1700" dirty="0"/>
           </a:p>
@@ -27352,7 +27308,7 @@
                 <a:ea typeface="Calibri" pitchFamily="34" charset="-122"/>
                 <a:cs typeface="Calibri" pitchFamily="34" charset="-120"/>
               </a:rPr>
-              <a:t>Hearing schedules that give each elector time to be heard, instead of slots listing hundreds of cases.</a:t>
+              <a:t>Schedule hearings so that each case can be heard, rather than listing hundreds of cases in one slot.</a:t>
             </a:r>
             <a:endParaRPr lang="en-US" sz="1700" dirty="0"/>
           </a:p>
@@ -27374,7 +27330,7 @@
                 <a:ea typeface="Calibri" pitchFamily="34" charset="-122"/>
                 <a:cs typeface="Calibri" pitchFamily="34" charset="-120"/>
               </a:rPr>
-              <a:t>Ground checks in the 30 parts that lost more than 60% of their roll, and in parts far above their constituency's median.</a:t>
+              <a:t>Explain the removals in the 30 parts that lost more than 60% of their roll.</a:t>
             </a:r>
             <a:endParaRPr lang="en-US" sz="1700" dirty="0"/>
           </a:p>
@@ -29536,7 +29492,27 @@
                 <a:ea typeface="Calibri" pitchFamily="34" charset="-122"/>
                 <a:cs typeface="Calibri" pitchFamily="34" charset="-120"/>
               </a:rPr>
-              <a:t>Limits and next steps   17–18</a:t>
+              <a:t>Limits   17–17</a:t>
+            </a:r>
+            <a:endParaRPr lang="en-US" sz="1700" dirty="0"/>
+          </a:p>
+          <a:p>
+            <a:pPr indent="0" marL="0">
+              <a:spcAft>
+                <a:spcPts val="1200"/>
+              </a:spcAft>
+              <a:buNone/>
+            </a:pPr>
+            <a:r>
+              <a:rPr lang="en-US" sz="1700" dirty="0">
+                <a:solidFill>
+                  <a:srgbClr val="1C2833"/>
+                </a:solidFill>
+                <a:latin typeface="Calibri" pitchFamily="34" charset="0"/>
+                <a:ea typeface="Calibri" pitchFamily="34" charset="-122"/>
+                <a:cs typeface="Calibri" pitchFamily="34" charset="-120"/>
+              </a:rPr>
+              <a:t>What the Election Commission should do   18–18</a:t>
             </a:r>
             <a:endParaRPr lang="en-US" sz="1700" dirty="0"/>
           </a:p>
@@ -36952,7 +36928,7 @@
                 <a:ea typeface="Calibri" pitchFamily="34" charset="-122"/>
                 <a:cs typeface="Calibri" pitchFamily="34" charset="-120"/>
               </a:rPr>
-              <a:t>Each reason is an officer's entry, not a finding. Untraceable entries rest on someone not being found, and are where checking should start.</a:t>
+              <a:t>Each reason is an officer's entry, not a finding. An untraceable entry records only that someone was not found.</a:t>
             </a:r>
             <a:endParaRPr lang="en-US" sz="1350" dirty="0"/>
           </a:p>

--- a/reports/hyderabad-old-city-sir-2026-deck.pptx
+++ b/reports/hyderabad-old-city-sir-2026-deck.pptx
@@ -25,9 +25,10 @@
     <p:sldId id="273" r:id="rId19"/>
     <p:sldId id="274" r:id="rId20"/>
     <p:sldId id="275" r:id="rId21"/>
+    <p:sldId id="276" r:id="rId22"/>
   </p:sldIdLst>
   <p:notesMasterIdLst>
-    <p:notesMasterId r:id="rId22"/>
+    <p:notesMasterId r:id="rId23"/>
   </p:notesMasterIdLst>
   <p:sldSz cx="12192000" cy="6858000"/>
   <p:notesSz cx="6858000" cy="12192000"/>
@@ -126,7 +127,7 @@
 </p:presentation>
 </file>
 
-<file path=ppt/charts/chart19.xml><?xml version="1.0" encoding="utf-8"?>
+<file path=ppt/charts/chart21.xml><?xml version="1.0" encoding="utf-8"?>
 <c:chartSpace xmlns:c="http://schemas.openxmlformats.org/drawingml/2006/chart" xmlns:a="http://schemas.openxmlformats.org/drawingml/2006/main" xmlns:r="http://schemas.openxmlformats.org/officeDocument/2006/relationships">
   <c:date1904 val="0"/>
   <c:roundedCorners val="1"/>
@@ -590,7 +591,7 @@
 </c:chartSpace>
 </file>
 
-<file path=ppt/charts/chart20.xml><?xml version="1.0" encoding="utf-8"?>
+<file path=ppt/charts/chart22.xml><?xml version="1.0" encoding="utf-8"?>
 <c:chartSpace xmlns:c="http://schemas.openxmlformats.org/drawingml/2006/chart" xmlns:a="http://schemas.openxmlformats.org/drawingml/2006/main" xmlns:r="http://schemas.openxmlformats.org/officeDocument/2006/relationships">
   <c:date1904 val="0"/>
   <c:roundedCorners val="1"/>
@@ -1144,7 +1145,484 @@
 </c:chartSpace>
 </file>
 
-<file path=ppt/charts/chart21.xml><?xml version="1.0" encoding="utf-8"?>
+<file path=ppt/charts/chart23.xml><?xml version="1.0" encoding="utf-8"?>
+<c:chartSpace xmlns:c="http://schemas.openxmlformats.org/drawingml/2006/chart" xmlns:a="http://schemas.openxmlformats.org/drawingml/2006/main" xmlns:r="http://schemas.openxmlformats.org/officeDocument/2006/relationships">
+  <c:date1904 val="0"/>
+  <c:roundedCorners val="1"/>
+  <c:chart>
+    <c:autoTitleDeleted val="1"/>
+    <c:plotArea>
+      <c:layout/>
+      <c:barChart>
+        <c:barDir val="bar"/>
+        <c:grouping val="clustered"/>
+        <c:varyColors val="0"/>
+        <c:ser>
+          <c:idx val="0"/>
+          <c:order val="0"/>
+          <c:tx>
+            <c:strRef>
+              <c:f>Sheet1!$B$1</c:f>
+              <c:strCache>
+                <c:ptCount val="1"/>
+                <c:pt idx="0">
+                  <c:v>% left off</c:v>
+                </c:pt>
+              </c:strCache>
+            </c:strRef>
+          </c:tx>
+          <c:spPr>
+            <a:solidFill>
+              <a:srgbClr val="8B1E3F"/>
+            </a:solidFill>
+            <a:effectLst/>
+          </c:spPr>
+          <c:invertIfNegative val="0"/>
+          <c:dLbls>
+            <c:numFmt formatCode="0.0" sourceLinked="0"/>
+            <c:txPr>
+              <a:bodyPr/>
+              <a:lstStyle/>
+              <a:p>
+                <a:pPr>
+                  <a:defRPr b="0" i="0" strike="noStrike" sz="1000" u="none">
+                    <a:solidFill>
+                      <a:srgbClr val="1C2833"/>
+                    </a:solidFill>
+                    <a:latin typeface="Calibri"/>
+                  </a:defRPr>
+                </a:pPr>
+              </a:p>
+            </c:txPr>
+            <c:showLegendKey val="0"/>
+            <c:showVal val="1"/>
+            <c:showCatName val="0"/>
+            <c:showSerName val="0"/>
+            <c:showPercent val="0"/>
+            <c:showBubbleSize val="0"/>
+            <c:showLeaderLines val="0"/>
+          </c:dLbls>
+          <c:dPt>
+            <c:idx val="0"/>
+            <c:invertIfNegative val="0"/>
+            <c:bubble3D val="0"/>
+            <c:spPr>
+              <a:solidFill>
+                <a:srgbClr val="8B1E3F"/>
+              </a:solidFill>
+              <a:effectLst/>
+            </c:spPr>
+          </c:dPt>
+          <c:dPt>
+            <c:idx val="1"/>
+            <c:invertIfNegative val="0"/>
+            <c:bubble3D val="0"/>
+            <c:spPr>
+              <a:solidFill>
+                <a:srgbClr val="1F618D"/>
+              </a:solidFill>
+              <a:effectLst/>
+            </c:spPr>
+          </c:dPt>
+          <c:dPt>
+            <c:idx val="2"/>
+            <c:invertIfNegative val="0"/>
+            <c:bubble3D val="0"/>
+            <c:spPr>
+              <a:solidFill>
+                <a:srgbClr val="1F618D"/>
+              </a:solidFill>
+              <a:effectLst/>
+            </c:spPr>
+          </c:dPt>
+          <c:dPt>
+            <c:idx val="3"/>
+            <c:invertIfNegative val="0"/>
+            <c:bubble3D val="0"/>
+            <c:spPr>
+              <a:solidFill>
+                <a:srgbClr val="8B1E3F"/>
+              </a:solidFill>
+              <a:effectLst/>
+            </c:spPr>
+          </c:dPt>
+          <c:dPt>
+            <c:idx val="4"/>
+            <c:invertIfNegative val="0"/>
+            <c:bubble3D val="0"/>
+            <c:spPr>
+              <a:solidFill>
+                <a:srgbClr val="1F618D"/>
+              </a:solidFill>
+              <a:effectLst/>
+            </c:spPr>
+          </c:dPt>
+          <c:dPt>
+            <c:idx val="5"/>
+            <c:invertIfNegative val="0"/>
+            <c:bubble3D val="0"/>
+            <c:spPr>
+              <a:solidFill>
+                <a:srgbClr val="8B1E3F"/>
+              </a:solidFill>
+              <a:effectLst/>
+            </c:spPr>
+          </c:dPt>
+          <c:dPt>
+            <c:idx val="6"/>
+            <c:invertIfNegative val="0"/>
+            <c:bubble3D val="0"/>
+            <c:spPr>
+              <a:solidFill>
+                <a:srgbClr val="1F618D"/>
+              </a:solidFill>
+              <a:effectLst/>
+            </c:spPr>
+          </c:dPt>
+          <c:dPt>
+            <c:idx val="7"/>
+            <c:invertIfNegative val="0"/>
+            <c:bubble3D val="0"/>
+            <c:spPr>
+              <a:solidFill>
+                <a:srgbClr val="8B1E3F"/>
+              </a:solidFill>
+              <a:effectLst/>
+            </c:spPr>
+          </c:dPt>
+          <c:dPt>
+            <c:idx val="8"/>
+            <c:invertIfNegative val="0"/>
+            <c:bubble3D val="0"/>
+            <c:spPr>
+              <a:solidFill>
+                <a:srgbClr val="1F618D"/>
+              </a:solidFill>
+              <a:effectLst/>
+            </c:spPr>
+          </c:dPt>
+          <c:dPt>
+            <c:idx val="9"/>
+            <c:invertIfNegative val="0"/>
+            <c:bubble3D val="0"/>
+            <c:spPr>
+              <a:solidFill>
+                <a:srgbClr val="1F618D"/>
+              </a:solidFill>
+              <a:effectLst/>
+            </c:spPr>
+          </c:dPt>
+          <c:dPt>
+            <c:idx val="10"/>
+            <c:invertIfNegative val="0"/>
+            <c:bubble3D val="0"/>
+            <c:spPr>
+              <a:solidFill>
+                <a:srgbClr val="1F618D"/>
+              </a:solidFill>
+              <a:effectLst/>
+            </c:spPr>
+          </c:dPt>
+          <c:dPt>
+            <c:idx val="11"/>
+            <c:invertIfNegative val="0"/>
+            <c:bubble3D val="0"/>
+            <c:spPr>
+              <a:solidFill>
+                <a:srgbClr val="1F618D"/>
+              </a:solidFill>
+              <a:effectLst/>
+            </c:spPr>
+          </c:dPt>
+          <c:dPt>
+            <c:idx val="12"/>
+            <c:invertIfNegative val="0"/>
+            <c:bubble3D val="0"/>
+            <c:spPr>
+              <a:solidFill>
+                <a:srgbClr val="8B1E3F"/>
+              </a:solidFill>
+              <a:effectLst/>
+            </c:spPr>
+          </c:dPt>
+          <c:dPt>
+            <c:idx val="13"/>
+            <c:invertIfNegative val="0"/>
+            <c:bubble3D val="0"/>
+            <c:spPr>
+              <a:solidFill>
+                <a:srgbClr val="1F618D"/>
+              </a:solidFill>
+              <a:effectLst/>
+            </c:spPr>
+          </c:dPt>
+          <c:dPt>
+            <c:idx val="14"/>
+            <c:invertIfNegative val="0"/>
+            <c:bubble3D val="0"/>
+            <c:spPr>
+              <a:solidFill>
+                <a:srgbClr val="1F618D"/>
+              </a:solidFill>
+              <a:effectLst/>
+            </c:spPr>
+          </c:dPt>
+          <c:cat>
+            <c:multiLvlStrRef>
+              <c:f>Sheet1!$A$2:$A$16</c:f>
+              <c:multiLvlStrCache>
+                <c:ptCount val="15"/>
+                <c:lvl>
+                  <c:pt idx="0">
+                    <c:v>Bahadurpura</c:v>
+                  </c:pt>
+                  <c:pt idx="1">
+                    <c:v>Karwan</c:v>
+                  </c:pt>
+                  <c:pt idx="2">
+                    <c:v>Secunderabad</c:v>
+                  </c:pt>
+                  <c:pt idx="3">
+                    <c:v>Chandrayangutta</c:v>
+                  </c:pt>
+                  <c:pt idx="4">
+                    <c:v>Nampally</c:v>
+                  </c:pt>
+                  <c:pt idx="5">
+                    <c:v>Charminar</c:v>
+                  </c:pt>
+                  <c:pt idx="6">
+                    <c:v>Goshamahal</c:v>
+                  </c:pt>
+                  <c:pt idx="7">
+                    <c:v>Yakutpura</c:v>
+                  </c:pt>
+                  <c:pt idx="8">
+                    <c:v>Khairatabad</c:v>
+                  </c:pt>
+                  <c:pt idx="9">
+                    <c:v>Amberpet</c:v>
+                  </c:pt>
+                  <c:pt idx="10">
+                    <c:v>Secunderabad Cantonment</c:v>
+                  </c:pt>
+                  <c:pt idx="11">
+                    <c:v>Jubilee Hills</c:v>
+                  </c:pt>
+                  <c:pt idx="12">
+                    <c:v>Malakpet</c:v>
+                  </c:pt>
+                  <c:pt idx="13">
+                    <c:v>Sanathnagar</c:v>
+                  </c:pt>
+                  <c:pt idx="14">
+                    <c:v>Musheerabad</c:v>
+                  </c:pt>
+                </c:lvl>
+              </c:multiLvlStrCache>
+            </c:multiLvlStrRef>
+          </c:cat>
+          <c:val>
+            <c:numRef>
+              <c:f>Sheet1!$B$2:$B$16</c:f>
+              <c:numCache>
+                <c:formatCode>General</c:formatCode>
+                <c:ptCount val="15"/>
+                <c:pt idx="0">
+                  <c:v>34.57</c:v>
+                </c:pt>
+                <c:pt idx="1">
+                  <c:v>37</c:v>
+                </c:pt>
+                <c:pt idx="2">
+                  <c:v>38.19</c:v>
+                </c:pt>
+                <c:pt idx="3">
+                  <c:v>39.46</c:v>
+                </c:pt>
+                <c:pt idx="4">
+                  <c:v>39.64</c:v>
+                </c:pt>
+                <c:pt idx="5">
+                  <c:v>39.66</c:v>
+                </c:pt>
+                <c:pt idx="6">
+                  <c:v>40.02</c:v>
+                </c:pt>
+                <c:pt idx="7">
+                  <c:v>41.33</c:v>
+                </c:pt>
+                <c:pt idx="8">
+                  <c:v>42.04</c:v>
+                </c:pt>
+                <c:pt idx="9">
+                  <c:v>42.61</c:v>
+                </c:pt>
+                <c:pt idx="10">
+                  <c:v>42.77</c:v>
+                </c:pt>
+                <c:pt idx="11">
+                  <c:v>44.14</c:v>
+                </c:pt>
+                <c:pt idx="12">
+                  <c:v>44.76</c:v>
+                </c:pt>
+                <c:pt idx="13">
+                  <c:v>44.93</c:v>
+                </c:pt>
+                <c:pt idx="14">
+                  <c:v>45.17</c:v>
+                </c:pt>
+              </c:numCache>
+            </c:numRef>
+          </c:val>
+        </c:ser>
+        <c:dLbls>
+          <c:numFmt formatCode="0.0" sourceLinked="0"/>
+          <c:txPr>
+            <a:bodyPr/>
+            <a:lstStyle/>
+            <a:p>
+              <a:pPr>
+                <a:defRPr b="0" i="0" strike="noStrike" sz="1000" u="none">
+                  <a:solidFill>
+                    <a:srgbClr val="1C2833"/>
+                  </a:solidFill>
+                  <a:latin typeface="Calibri"/>
+                </a:defRPr>
+              </a:pPr>
+            </a:p>
+          </c:txPr>
+          <c:showLegendKey val="0"/>
+          <c:showVal val="1"/>
+          <c:showCatName val="0"/>
+          <c:showSerName val="0"/>
+          <c:showPercent val="0"/>
+          <c:showBubbleSize val="0"/>
+          <c:showLeaderLines val="0"/>
+        </c:dLbls>
+        <c:gapWidth val="150"/>
+        <c:overlap val="0"/>
+        <c:axId val="2094734554"/>
+        <c:axId val="2094734552"/>
+        <c:axId val="2094734556"/>
+      </c:barChart>
+      <c:catAx>
+        <c:axId val="2094734554"/>
+        <c:scaling>
+          <c:orientation val="minMax"/>
+        </c:scaling>
+        <c:delete val="0"/>
+        <c:axPos val="l"/>
+        <c:numFmt formatCode="General" sourceLinked="1"/>
+        <c:majorTickMark val="out"/>
+        <c:minorTickMark val="none"/>
+        <c:tickLblPos val="nextTo"/>
+        <c:spPr>
+          <a:ln w="12700" cap="flat">
+            <a:solidFill>
+              <a:srgbClr val="888888"/>
+            </a:solidFill>
+            <a:prstDash val="solid"/>
+            <a:round/>
+          </a:ln>
+        </c:spPr>
+        <c:txPr>
+          <a:bodyPr/>
+          <a:lstStyle/>
+          <a:p>
+            <a:pPr>
+              <a:defRPr sz="1000" b="0" i="0" u="none" strike="noStrike">
+                <a:solidFill>
+                  <a:srgbClr val="4D5B69"/>
+                </a:solidFill>
+                <a:latin typeface="Calibri"/>
+              </a:defRPr>
+            </a:pPr>
+            <a:endParaRPr lang="en-US"/>
+          </a:p>
+        </c:txPr>
+        <c:crossAx val="2094734552"/>
+        <c:crosses val="autoZero"/>
+        <c:auto val="1"/>
+        <c:lblAlgn val="ctr"/>
+        <c:noMultiLvlLbl val="1"/>
+      </c:catAx>
+      <c:valAx>
+        <c:axId val="2094734552"/>
+        <c:scaling>
+          <c:orientation val="minMax"/>
+        </c:scaling>
+        <c:delete val="1"/>
+        <c:axPos val="b"/>
+        <c:majorGridlines>
+          <c:spPr>
+            <a:ln w="6350" cap="flat">
+              <a:solidFill>
+                <a:srgbClr val="E1E5E8"/>
+              </a:solidFill>
+              <a:prstDash val="solid"/>
+              <a:round/>
+            </a:ln>
+          </c:spPr>
+        </c:majorGridlines>
+        <c:numFmt formatCode="General" sourceLinked="0"/>
+        <c:majorTickMark val="out"/>
+        <c:minorTickMark val="none"/>
+        <c:tickLblPos val="low"/>
+        <c:spPr>
+          <a:ln w="12700" cap="flat">
+            <a:solidFill>
+              <a:srgbClr val="888888"/>
+            </a:solidFill>
+            <a:prstDash val="solid"/>
+            <a:round/>
+          </a:ln>
+        </c:spPr>
+        <c:txPr>
+          <a:bodyPr/>
+          <a:lstStyle/>
+          <a:p>
+            <a:pPr>
+              <a:defRPr sz="1000" b="0" i="0" u="none" strike="noStrike">
+                <a:solidFill>
+                  <a:srgbClr val="4D5B69"/>
+                </a:solidFill>
+                <a:latin typeface="Calibri"/>
+              </a:defRPr>
+            </a:pPr>
+            <a:endParaRPr lang="en-US"/>
+          </a:p>
+        </c:txPr>
+        <c:crossAx val="2094734554"/>
+        <c:crosses val="autoZero"/>
+        <c:crossBetween val="between"/>
+      </c:valAx>
+      <c:spPr>
+        <a:noFill/>
+        <a:ln>
+          <a:noFill/>
+        </a:ln>
+        <a:effectLst/>
+      </c:spPr>
+    </c:plotArea>
+    <c:plotVisOnly val="1"/>
+    <c:dispBlanksAs val="span"/>
+  </c:chart>
+  <c:spPr>
+    <a:noFill/>
+    <a:ln>
+      <a:noFill/>
+    </a:ln>
+    <a:effectLst/>
+  </c:spPr>
+  <c:externalData r:id="rId1">
+    <c:autoUpdate val="0"/>
+  </c:externalData>
+</c:chartSpace>
+</file>
+
+<file path=ppt/charts/chart24.xml><?xml version="1.0" encoding="utf-8"?>
 <c:chartSpace xmlns:c="http://schemas.openxmlformats.org/drawingml/2006/chart" xmlns:a="http://schemas.openxmlformats.org/drawingml/2006/main" xmlns:r="http://schemas.openxmlformats.org/officeDocument/2006/relationships">
   <c:date1904 val="0"/>
   <c:roundedCorners val="1"/>
@@ -1414,7 +1892,7 @@
 </c:chartSpace>
 </file>
 
-<file path=ppt/charts/chart22.xml><?xml version="1.0" encoding="utf-8"?>
+<file path=ppt/charts/chart25.xml><?xml version="1.0" encoding="utf-8"?>
 <c:chartSpace xmlns:c="http://schemas.openxmlformats.org/drawingml/2006/chart" xmlns:a="http://schemas.openxmlformats.org/drawingml/2006/main" xmlns:r="http://schemas.openxmlformats.org/officeDocument/2006/relationships">
   <c:date1904 val="0"/>
   <c:roundedCorners val="1"/>
@@ -1766,7 +2244,7 @@
 </c:chartSpace>
 </file>
 
-<file path=ppt/charts/chart23.xml><?xml version="1.0" encoding="utf-8"?>
+<file path=ppt/charts/chart26.xml><?xml version="1.0" encoding="utf-8"?>
 <c:chartSpace xmlns:c="http://schemas.openxmlformats.org/drawingml/2006/chart" xmlns:a="http://schemas.openxmlformats.org/drawingml/2006/main" xmlns:r="http://schemas.openxmlformats.org/officeDocument/2006/relationships">
   <c:date1904 val="0"/>
   <c:roundedCorners val="1"/>
@@ -2130,7 +2608,7 @@
 </c:chartSpace>
 </file>
 
-<file path=ppt/charts/chart24.xml><?xml version="1.0" encoding="utf-8"?>
+<file path=ppt/charts/chart27.xml><?xml version="1.0" encoding="utf-8"?>
 <c:chartSpace xmlns:c="http://schemas.openxmlformats.org/drawingml/2006/chart" xmlns:a="http://schemas.openxmlformats.org/drawingml/2006/main" xmlns:r="http://schemas.openxmlformats.org/officeDocument/2006/relationships">
   <c:date1904 val="0"/>
   <c:roundedCorners val="1"/>
@@ -2494,7 +2972,7 @@
 </c:chartSpace>
 </file>
 
-<file path=ppt/charts/chart25.xml><?xml version="1.0" encoding="utf-8"?>
+<file path=ppt/charts/chart28.xml><?xml version="1.0" encoding="utf-8"?>
 <c:chartSpace xmlns:c="http://schemas.openxmlformats.org/drawingml/2006/chart" xmlns:a="http://schemas.openxmlformats.org/drawingml/2006/main" xmlns:r="http://schemas.openxmlformats.org/officeDocument/2006/relationships">
   <c:date1904 val="0"/>
   <c:roundedCorners val="1"/>
@@ -2835,7 +3313,7 @@
 </c:chartSpace>
 </file>
 
-<file path=ppt/charts/chart26.xml><?xml version="1.0" encoding="utf-8"?>
+<file path=ppt/charts/chart29.xml><?xml version="1.0" encoding="utf-8"?>
 <c:chartSpace xmlns:c="http://schemas.openxmlformats.org/drawingml/2006/chart" xmlns:a="http://schemas.openxmlformats.org/drawingml/2006/main" xmlns:r="http://schemas.openxmlformats.org/officeDocument/2006/relationships">
   <c:date1904 val="0"/>
   <c:roundedCorners val="1"/>
@@ -3099,7 +3577,7 @@
 </c:chartSpace>
 </file>
 
-<file path=ppt/charts/chart27.xml><?xml version="1.0" encoding="utf-8"?>
+<file path=ppt/charts/chart30.xml><?xml version="1.0" encoding="utf-8"?>
 <c:chartSpace xmlns:c="http://schemas.openxmlformats.org/drawingml/2006/chart" xmlns:a="http://schemas.openxmlformats.org/drawingml/2006/main" xmlns:r="http://schemas.openxmlformats.org/officeDocument/2006/relationships">
   <c:date1904 val="0"/>
   <c:roundedCorners val="1"/>
@@ -3463,7 +3941,7 @@
 </c:chartSpace>
 </file>
 
-<file path=ppt/charts/chart28.xml><?xml version="1.0" encoding="utf-8"?>
+<file path=ppt/charts/chart31.xml><?xml version="1.0" encoding="utf-8"?>
 <c:chartSpace xmlns:c="http://schemas.openxmlformats.org/drawingml/2006/chart" xmlns:a="http://schemas.openxmlformats.org/drawingml/2006/main" xmlns:r="http://schemas.openxmlformats.org/officeDocument/2006/relationships">
   <c:date1904 val="0"/>
   <c:roundedCorners val="1"/>
@@ -4709,7 +5187,7 @@
           <a:p>
             <a:r>
               <a:rPr lang="en-US" dirty="0"/>
-              <a:t>The Commission extended the calendar on 7 September: claims to 7 October, hearings to 5 November, final roll 9 November. The schedules here are those in the September lists. The length of a slot is not recorded.</a:t>
+              <a:t/>
             </a:r>
             <a:endParaRPr lang="en-US" dirty="0"/>
           </a:p>
@@ -4797,7 +5275,7 @@
           <a:p>
             <a:r>
               <a:rPr lang="en-US" dirty="0"/>
-              <a:t/>
+              <a:t>The Commission extended the calendar on 7 September: claims to 7 October, hearings to 5 November, final roll 9 November. The schedules here are those in the September lists. The length of a slot is not recorded.</a:t>
             </a:r>
             <a:endParaRPr lang="en-US" dirty="0"/>
           </a:p>
@@ -5349,6 +5827,94 @@
             <a:fld id="{F7021451-1387-4CA6-816F-3879F97B5CBC}" type="slidenum">
               <a:rPr lang="en-US"/>
               <a:t>20</a:t>
+            </a:fld>
+            <a:endParaRPr lang="en-US"/>
+          </a:p>
+        </p:txBody>
+      </p:sp>
+    </p:spTree>
+    <p:extLst>
+      <p:ext uri="{BB962C8B-B14F-4D97-AF65-F5344CB8AC3E}">
+        <p14:creationId xmlns:p14="http://schemas.microsoft.com/office/powerpoint/2010/main" val="1024086991"/>
+      </p:ext>
+    </p:extLst>
+  </p:cSld>
+  <p:clrMapOvr>
+    <a:masterClrMapping/>
+  </p:clrMapOvr>
+</p:notes>
+</file>
+
+<file path=ppt/notesSlides/notesSlide21.xml><?xml version="1.0" encoding="utf-8"?>
+<p:notes xmlns:a="http://schemas.openxmlformats.org/drawingml/2006/main" xmlns:r="http://schemas.openxmlformats.org/officeDocument/2006/relationships" xmlns:p="http://schemas.openxmlformats.org/presentationml/2006/main">
+  <p:cSld>
+    <p:spTree>
+      <p:nvGrpSpPr>
+        <p:cNvPr id="1" name=""/>
+        <p:cNvGrpSpPr/>
+        <p:nvPr/>
+      </p:nvGrpSpPr>
+      <p:grpSpPr>
+        <a:xfrm>
+          <a:off x="0" y="0"/>
+          <a:ext cx="0" cy="0"/>
+          <a:chOff x="0" y="0"/>
+          <a:chExt cx="0" cy="0"/>
+        </a:xfrm>
+      </p:grpSpPr>
+      <p:sp>
+        <p:nvSpPr>
+          <p:cNvPr id="2" name="Slide Image Placeholder 1"/>
+          <p:cNvSpPr>
+            <a:spLocks noGrp="1" noRot="1" noChangeAspect="1"/>
+          </p:cNvSpPr>
+          <p:nvPr>
+            <p:ph type="sldImg"/>
+          </p:nvPr>
+        </p:nvSpPr>
+        <p:spPr/>
+      </p:sp>
+      <p:sp>
+        <p:nvSpPr>
+          <p:cNvPr id="3" name="Notes Placeholder 2"/>
+          <p:cNvSpPr>
+            <a:spLocks noGrp="1"/>
+          </p:cNvSpPr>
+          <p:nvPr>
+            <p:ph type="body" idx="1"/>
+          </p:nvPr>
+        </p:nvSpPr>
+        <p:spPr/>
+        <p:txBody>
+          <a:bodyPr/>
+          <a:lstStyle/>
+          <a:p>
+            <a:r>
+              <a:rPr lang="en-US" dirty="0"/>
+              <a:t/>
+            </a:r>
+            <a:endParaRPr lang="en-US" dirty="0"/>
+          </a:p>
+        </p:txBody>
+      </p:sp>
+      <p:sp>
+        <p:nvSpPr>
+          <p:cNvPr id="4" name="Slide Number Placeholder 3"/>
+          <p:cNvSpPr>
+            <a:spLocks noGrp="1"/>
+          </p:cNvSpPr>
+          <p:nvPr>
+            <p:ph type="sldNum" sz="quarter" idx="10"/>
+          </p:nvPr>
+        </p:nvSpPr>
+        <p:spPr/>
+        <p:txBody>
+          <a:bodyPr/>
+          <a:lstStyle/>
+          <a:p>
+            <a:fld id="{F7021451-1387-4CA6-816F-3879F97B5CBC}" type="slidenum">
+              <a:rPr lang="en-US"/>
+              <a:t>21</a:t>
             </a:fld>
             <a:endParaRPr lang="en-US"/>
           </a:p>
@@ -7746,6 +8312,1110 @@
                 <a:ea typeface="Calibri" pitchFamily="34" charset="-122"/>
                 <a:cs typeface="Calibri" pitchFamily="34" charset="-120"/>
               </a:rPr>
+              <a:t>AGE, SEX, RELIGION, 2002</a:t>
+            </a:r>
+            <a:endParaRPr lang="en-US" sz="1100" dirty="0"/>
+          </a:p>
+        </p:txBody>
+      </p:sp>
+      <p:sp>
+        <p:nvSpPr>
+          <p:cNvPr id="3" name="Text 1"/>
+          <p:cNvSpPr txBox="1"/>
+          <p:nvPr/>
+        </p:nvSpPr>
+        <p:spPr>
+          <a:xfrm>
+            <a:off x="548640" y="530352"/>
+            <a:ext cx="11094415" cy="914400"/>
+          </a:xfrm>
+          <a:prstGeom prst="rect">
+            <a:avLst/>
+          </a:prstGeom>
+          <a:noFill/>
+          <a:ln/>
+        </p:spPr>
+        <p:txBody>
+          <a:bodyPr wrap="square" lIns="0" tIns="0" rIns="0" bIns="0" rtlCol="0" anchor="t">
+            <a:normAutofit/>
+          </a:bodyPr>
+          <a:lstStyle/>
+          <a:p>
+            <a:pPr indent="0" marL="0">
+              <a:buNone/>
+            </a:pPr>
+            <a:r>
+              <a:rPr lang="en-US" sz="2700" b="1" dirty="0">
+                <a:solidFill>
+                  <a:srgbClr val="6E1832"/>
+                </a:solidFill>
+                <a:latin typeface="Cambria" pitchFamily="34" charset="0"/>
+                <a:ea typeface="Cambria" pitchFamily="34" charset="-122"/>
+                <a:cs typeface="Cambria" pitchFamily="34" charset="-120"/>
+              </a:rPr>
+              <a:t>Women and men were struck off at similar rates, 39.9% and 40.5%</a:t>
+            </a:r>
+            <a:endParaRPr lang="en-US" sz="2700" dirty="0"/>
+          </a:p>
+        </p:txBody>
+      </p:sp>
+      <p:sp>
+        <p:nvSpPr>
+          <p:cNvPr id="4" name="Text 2"/>
+          <p:cNvSpPr txBox="1"/>
+          <p:nvPr/>
+        </p:nvSpPr>
+        <p:spPr>
+          <a:xfrm>
+            <a:off x="548640" y="1463040"/>
+            <a:ext cx="11094415" cy="365760"/>
+          </a:xfrm>
+          <a:prstGeom prst="rect">
+            <a:avLst/>
+          </a:prstGeom>
+          <a:noFill/>
+          <a:ln/>
+        </p:spPr>
+        <p:txBody>
+          <a:bodyPr wrap="square" lIns="0" tIns="0" rIns="0" bIns="0" rtlCol="0" anchor="t"/>
+          <a:lstStyle/>
+          <a:p>
+            <a:pPr indent="0" marL="0">
+              <a:buNone/>
+            </a:pPr>
+            <a:r>
+              <a:rPr lang="en-US" sz="1400" dirty="0">
+                <a:solidFill>
+                  <a:srgbClr val="4D5B69"/>
+                </a:solidFill>
+                <a:latin typeface="Calibri" pitchFamily="34" charset="0"/>
+                <a:ea typeface="Calibri" pitchFamily="34" charset="-122"/>
+                <a:cs typeface="Calibri" pitchFamily="34" charset="-120"/>
+              </a:rPr>
+              <a:t>Share struck off by sex, constituency by constituency</a:t>
+            </a:r>
+            <a:endParaRPr lang="en-US" sz="1400" dirty="0"/>
+          </a:p>
+        </p:txBody>
+      </p:sp>
+      <p:sp>
+        <p:nvSpPr>
+          <p:cNvPr id="5" name="Text 3"/>
+          <p:cNvSpPr txBox="1"/>
+          <p:nvPr/>
+        </p:nvSpPr>
+        <p:spPr>
+          <a:xfrm>
+            <a:off x="548640" y="6400800"/>
+            <a:ext cx="10180015" cy="274320"/>
+          </a:xfrm>
+          <a:prstGeom prst="rect">
+            <a:avLst/>
+          </a:prstGeom>
+          <a:noFill/>
+          <a:ln/>
+        </p:spPr>
+        <p:txBody>
+          <a:bodyPr wrap="square" lIns="0" tIns="0" rIns="0" bIns="0" rtlCol="0" anchor="ctr"/>
+          <a:lstStyle/>
+          <a:p>
+            <a:pPr indent="0" marL="0">
+              <a:buNone/>
+            </a:pPr>
+            <a:r>
+              <a:rPr lang="en-US" sz="900" dirty="0">
+                <a:solidFill>
+                  <a:srgbClr val="4D5B69"/>
+                </a:solidFill>
+                <a:latin typeface="Calibri" pitchFamily="34" charset="0"/>
+                <a:ea typeface="Calibri" pitchFamily="34" charset="-122"/>
+                <a:cs typeface="Calibri" pitchFamily="34" charset="-120"/>
+              </a:rPr>
+              <a:t>Hyderabad Old City SIR 2026 · Varna Sri Raman · aggregates only; no names or EPIC numbers</a:t>
+            </a:r>
+            <a:endParaRPr lang="en-US" sz="900" dirty="0"/>
+          </a:p>
+        </p:txBody>
+      </p:sp>
+      <p:sp>
+        <p:nvSpPr>
+          <p:cNvPr id="6" name="Text 4"/>
+          <p:cNvSpPr txBox="1"/>
+          <p:nvPr/>
+        </p:nvSpPr>
+        <p:spPr>
+          <a:xfrm>
+            <a:off x="10911535" y="6400800"/>
+            <a:ext cx="731520" cy="274320"/>
+          </a:xfrm>
+          <a:prstGeom prst="rect">
+            <a:avLst/>
+          </a:prstGeom>
+          <a:noFill/>
+          <a:ln/>
+        </p:spPr>
+        <p:txBody>
+          <a:bodyPr wrap="square" lIns="0" tIns="0" rIns="0" bIns="0" rtlCol="0" anchor="ctr"/>
+          <a:lstStyle/>
+          <a:p>
+            <a:pPr algn="r" indent="0" marL="0">
+              <a:buNone/>
+            </a:pPr>
+            <a:r>
+              <a:rPr lang="en-US" sz="900" dirty="0">
+                <a:solidFill>
+                  <a:srgbClr val="4D5B69"/>
+                </a:solidFill>
+                <a:latin typeface="Calibri" pitchFamily="34" charset="0"/>
+                <a:ea typeface="Calibri" pitchFamily="34" charset="-122"/>
+                <a:cs typeface="Calibri" pitchFamily="34" charset="-120"/>
+              </a:rPr>
+              <a:t>10</a:t>
+            </a:r>
+            <a:endParaRPr lang="en-US" sz="900" dirty="0"/>
+          </a:p>
+        </p:txBody>
+      </p:sp>
+      <p:sp>
+        <p:nvSpPr>
+          <p:cNvPr id="7" name="Shape 5"/>
+          <p:cNvSpPr/>
+          <p:nvPr/>
+        </p:nvSpPr>
+        <p:spPr>
+          <a:xfrm>
+            <a:off x="0" y="6748272"/>
+            <a:ext cx="304792" cy="109728"/>
+          </a:xfrm>
+          <a:prstGeom prst="rect">
+            <a:avLst/>
+          </a:prstGeom>
+          <a:solidFill>
+            <a:srgbClr val="8B1E3F"/>
+          </a:solidFill>
+          <a:ln/>
+        </p:spPr>
+      </p:sp>
+      <p:sp>
+        <p:nvSpPr>
+          <p:cNvPr id="8" name="Shape 6"/>
+          <p:cNvSpPr/>
+          <p:nvPr/>
+        </p:nvSpPr>
+        <p:spPr>
+          <a:xfrm>
+            <a:off x="304792" y="6748272"/>
+            <a:ext cx="304792" cy="109728"/>
+          </a:xfrm>
+          <a:prstGeom prst="rect">
+            <a:avLst/>
+          </a:prstGeom>
+          <a:solidFill>
+            <a:srgbClr val="0E5E6F"/>
+          </a:solidFill>
+          <a:ln/>
+        </p:spPr>
+      </p:sp>
+      <p:sp>
+        <p:nvSpPr>
+          <p:cNvPr id="9" name="Shape 7"/>
+          <p:cNvSpPr/>
+          <p:nvPr/>
+        </p:nvSpPr>
+        <p:spPr>
+          <a:xfrm>
+            <a:off x="609585" y="6748272"/>
+            <a:ext cx="304792" cy="109728"/>
+          </a:xfrm>
+          <a:prstGeom prst="rect">
+            <a:avLst/>
+          </a:prstGeom>
+          <a:solidFill>
+            <a:srgbClr val="E0A526"/>
+          </a:solidFill>
+          <a:ln/>
+        </p:spPr>
+      </p:sp>
+      <p:sp>
+        <p:nvSpPr>
+          <p:cNvPr id="10" name="Shape 8"/>
+          <p:cNvSpPr/>
+          <p:nvPr/>
+        </p:nvSpPr>
+        <p:spPr>
+          <a:xfrm>
+            <a:off x="914377" y="6748272"/>
+            <a:ext cx="304792" cy="109728"/>
+          </a:xfrm>
+          <a:prstGeom prst="rect">
+            <a:avLst/>
+          </a:prstGeom>
+          <a:solidFill>
+            <a:srgbClr val="0E5E6F"/>
+          </a:solidFill>
+          <a:ln/>
+        </p:spPr>
+      </p:sp>
+      <p:sp>
+        <p:nvSpPr>
+          <p:cNvPr id="11" name="Shape 9"/>
+          <p:cNvSpPr/>
+          <p:nvPr/>
+        </p:nvSpPr>
+        <p:spPr>
+          <a:xfrm>
+            <a:off x="1219170" y="6748272"/>
+            <a:ext cx="304792" cy="109728"/>
+          </a:xfrm>
+          <a:prstGeom prst="rect">
+            <a:avLst/>
+          </a:prstGeom>
+          <a:solidFill>
+            <a:srgbClr val="8B1E3F"/>
+          </a:solidFill>
+          <a:ln/>
+        </p:spPr>
+      </p:sp>
+      <p:sp>
+        <p:nvSpPr>
+          <p:cNvPr id="12" name="Shape 10"/>
+          <p:cNvSpPr/>
+          <p:nvPr/>
+        </p:nvSpPr>
+        <p:spPr>
+          <a:xfrm>
+            <a:off x="1523962" y="6748272"/>
+            <a:ext cx="304792" cy="109728"/>
+          </a:xfrm>
+          <a:prstGeom prst="rect">
+            <a:avLst/>
+          </a:prstGeom>
+          <a:solidFill>
+            <a:srgbClr val="0E5E6F"/>
+          </a:solidFill>
+          <a:ln/>
+        </p:spPr>
+      </p:sp>
+      <p:sp>
+        <p:nvSpPr>
+          <p:cNvPr id="13" name="Shape 11"/>
+          <p:cNvSpPr/>
+          <p:nvPr/>
+        </p:nvSpPr>
+        <p:spPr>
+          <a:xfrm>
+            <a:off x="1828754" y="6748272"/>
+            <a:ext cx="304792" cy="109728"/>
+          </a:xfrm>
+          <a:prstGeom prst="rect">
+            <a:avLst/>
+          </a:prstGeom>
+          <a:solidFill>
+            <a:srgbClr val="E0A526"/>
+          </a:solidFill>
+          <a:ln/>
+        </p:spPr>
+      </p:sp>
+      <p:sp>
+        <p:nvSpPr>
+          <p:cNvPr id="14" name="Shape 12"/>
+          <p:cNvSpPr/>
+          <p:nvPr/>
+        </p:nvSpPr>
+        <p:spPr>
+          <a:xfrm>
+            <a:off x="2133547" y="6748272"/>
+            <a:ext cx="304792" cy="109728"/>
+          </a:xfrm>
+          <a:prstGeom prst="rect">
+            <a:avLst/>
+          </a:prstGeom>
+          <a:solidFill>
+            <a:srgbClr val="0E5E6F"/>
+          </a:solidFill>
+          <a:ln/>
+        </p:spPr>
+      </p:sp>
+      <p:sp>
+        <p:nvSpPr>
+          <p:cNvPr id="15" name="Shape 13"/>
+          <p:cNvSpPr/>
+          <p:nvPr/>
+        </p:nvSpPr>
+        <p:spPr>
+          <a:xfrm>
+            <a:off x="2438339" y="6748272"/>
+            <a:ext cx="304792" cy="109728"/>
+          </a:xfrm>
+          <a:prstGeom prst="rect">
+            <a:avLst/>
+          </a:prstGeom>
+          <a:solidFill>
+            <a:srgbClr val="8B1E3F"/>
+          </a:solidFill>
+          <a:ln/>
+        </p:spPr>
+      </p:sp>
+      <p:sp>
+        <p:nvSpPr>
+          <p:cNvPr id="16" name="Shape 14"/>
+          <p:cNvSpPr/>
+          <p:nvPr/>
+        </p:nvSpPr>
+        <p:spPr>
+          <a:xfrm>
+            <a:off x="2743131" y="6748272"/>
+            <a:ext cx="304792" cy="109728"/>
+          </a:xfrm>
+          <a:prstGeom prst="rect">
+            <a:avLst/>
+          </a:prstGeom>
+          <a:solidFill>
+            <a:srgbClr val="0E5E6F"/>
+          </a:solidFill>
+          <a:ln/>
+        </p:spPr>
+      </p:sp>
+      <p:sp>
+        <p:nvSpPr>
+          <p:cNvPr id="17" name="Shape 15"/>
+          <p:cNvSpPr/>
+          <p:nvPr/>
+        </p:nvSpPr>
+        <p:spPr>
+          <a:xfrm>
+            <a:off x="3047924" y="6748272"/>
+            <a:ext cx="304792" cy="109728"/>
+          </a:xfrm>
+          <a:prstGeom prst="rect">
+            <a:avLst/>
+          </a:prstGeom>
+          <a:solidFill>
+            <a:srgbClr val="E0A526"/>
+          </a:solidFill>
+          <a:ln/>
+        </p:spPr>
+      </p:sp>
+      <p:sp>
+        <p:nvSpPr>
+          <p:cNvPr id="18" name="Shape 16"/>
+          <p:cNvSpPr/>
+          <p:nvPr/>
+        </p:nvSpPr>
+        <p:spPr>
+          <a:xfrm>
+            <a:off x="3352716" y="6748272"/>
+            <a:ext cx="304792" cy="109728"/>
+          </a:xfrm>
+          <a:prstGeom prst="rect">
+            <a:avLst/>
+          </a:prstGeom>
+          <a:solidFill>
+            <a:srgbClr val="0E5E6F"/>
+          </a:solidFill>
+          <a:ln/>
+        </p:spPr>
+      </p:sp>
+      <p:sp>
+        <p:nvSpPr>
+          <p:cNvPr id="19" name="Shape 17"/>
+          <p:cNvSpPr/>
+          <p:nvPr/>
+        </p:nvSpPr>
+        <p:spPr>
+          <a:xfrm>
+            <a:off x="3657509" y="6748272"/>
+            <a:ext cx="304792" cy="109728"/>
+          </a:xfrm>
+          <a:prstGeom prst="rect">
+            <a:avLst/>
+          </a:prstGeom>
+          <a:solidFill>
+            <a:srgbClr val="8B1E3F"/>
+          </a:solidFill>
+          <a:ln/>
+        </p:spPr>
+      </p:sp>
+      <p:sp>
+        <p:nvSpPr>
+          <p:cNvPr id="20" name="Shape 18"/>
+          <p:cNvSpPr/>
+          <p:nvPr/>
+        </p:nvSpPr>
+        <p:spPr>
+          <a:xfrm>
+            <a:off x="3962301" y="6748272"/>
+            <a:ext cx="304792" cy="109728"/>
+          </a:xfrm>
+          <a:prstGeom prst="rect">
+            <a:avLst/>
+          </a:prstGeom>
+          <a:solidFill>
+            <a:srgbClr val="0E5E6F"/>
+          </a:solidFill>
+          <a:ln/>
+        </p:spPr>
+      </p:sp>
+      <p:sp>
+        <p:nvSpPr>
+          <p:cNvPr id="21" name="Shape 19"/>
+          <p:cNvSpPr/>
+          <p:nvPr/>
+        </p:nvSpPr>
+        <p:spPr>
+          <a:xfrm>
+            <a:off x="4267093" y="6748272"/>
+            <a:ext cx="304792" cy="109728"/>
+          </a:xfrm>
+          <a:prstGeom prst="rect">
+            <a:avLst/>
+          </a:prstGeom>
+          <a:solidFill>
+            <a:srgbClr val="E0A526"/>
+          </a:solidFill>
+          <a:ln/>
+        </p:spPr>
+      </p:sp>
+      <p:sp>
+        <p:nvSpPr>
+          <p:cNvPr id="22" name="Shape 20"/>
+          <p:cNvSpPr/>
+          <p:nvPr/>
+        </p:nvSpPr>
+        <p:spPr>
+          <a:xfrm>
+            <a:off x="4571886" y="6748272"/>
+            <a:ext cx="304792" cy="109728"/>
+          </a:xfrm>
+          <a:prstGeom prst="rect">
+            <a:avLst/>
+          </a:prstGeom>
+          <a:solidFill>
+            <a:srgbClr val="0E5E6F"/>
+          </a:solidFill>
+          <a:ln/>
+        </p:spPr>
+      </p:sp>
+      <p:sp>
+        <p:nvSpPr>
+          <p:cNvPr id="23" name="Shape 21"/>
+          <p:cNvSpPr/>
+          <p:nvPr/>
+        </p:nvSpPr>
+        <p:spPr>
+          <a:xfrm>
+            <a:off x="4876678" y="6748272"/>
+            <a:ext cx="304792" cy="109728"/>
+          </a:xfrm>
+          <a:prstGeom prst="rect">
+            <a:avLst/>
+          </a:prstGeom>
+          <a:solidFill>
+            <a:srgbClr val="8B1E3F"/>
+          </a:solidFill>
+          <a:ln/>
+        </p:spPr>
+      </p:sp>
+      <p:sp>
+        <p:nvSpPr>
+          <p:cNvPr id="24" name="Shape 22"/>
+          <p:cNvSpPr/>
+          <p:nvPr/>
+        </p:nvSpPr>
+        <p:spPr>
+          <a:xfrm>
+            <a:off x="5181470" y="6748272"/>
+            <a:ext cx="304792" cy="109728"/>
+          </a:xfrm>
+          <a:prstGeom prst="rect">
+            <a:avLst/>
+          </a:prstGeom>
+          <a:solidFill>
+            <a:srgbClr val="0E5E6F"/>
+          </a:solidFill>
+          <a:ln/>
+        </p:spPr>
+      </p:sp>
+      <p:sp>
+        <p:nvSpPr>
+          <p:cNvPr id="25" name="Shape 23"/>
+          <p:cNvSpPr/>
+          <p:nvPr/>
+        </p:nvSpPr>
+        <p:spPr>
+          <a:xfrm>
+            <a:off x="5486263" y="6748272"/>
+            <a:ext cx="304792" cy="109728"/>
+          </a:xfrm>
+          <a:prstGeom prst="rect">
+            <a:avLst/>
+          </a:prstGeom>
+          <a:solidFill>
+            <a:srgbClr val="E0A526"/>
+          </a:solidFill>
+          <a:ln/>
+        </p:spPr>
+      </p:sp>
+      <p:sp>
+        <p:nvSpPr>
+          <p:cNvPr id="26" name="Shape 24"/>
+          <p:cNvSpPr/>
+          <p:nvPr/>
+        </p:nvSpPr>
+        <p:spPr>
+          <a:xfrm>
+            <a:off x="5791055" y="6748272"/>
+            <a:ext cx="304792" cy="109728"/>
+          </a:xfrm>
+          <a:prstGeom prst="rect">
+            <a:avLst/>
+          </a:prstGeom>
+          <a:solidFill>
+            <a:srgbClr val="0E5E6F"/>
+          </a:solidFill>
+          <a:ln/>
+        </p:spPr>
+      </p:sp>
+      <p:sp>
+        <p:nvSpPr>
+          <p:cNvPr id="27" name="Shape 25"/>
+          <p:cNvSpPr/>
+          <p:nvPr/>
+        </p:nvSpPr>
+        <p:spPr>
+          <a:xfrm>
+            <a:off x="6095848" y="6748272"/>
+            <a:ext cx="304792" cy="109728"/>
+          </a:xfrm>
+          <a:prstGeom prst="rect">
+            <a:avLst/>
+          </a:prstGeom>
+          <a:solidFill>
+            <a:srgbClr val="8B1E3F"/>
+          </a:solidFill>
+          <a:ln/>
+        </p:spPr>
+      </p:sp>
+      <p:sp>
+        <p:nvSpPr>
+          <p:cNvPr id="28" name="Shape 26"/>
+          <p:cNvSpPr/>
+          <p:nvPr/>
+        </p:nvSpPr>
+        <p:spPr>
+          <a:xfrm>
+            <a:off x="6400640" y="6748272"/>
+            <a:ext cx="304792" cy="109728"/>
+          </a:xfrm>
+          <a:prstGeom prst="rect">
+            <a:avLst/>
+          </a:prstGeom>
+          <a:solidFill>
+            <a:srgbClr val="0E5E6F"/>
+          </a:solidFill>
+          <a:ln/>
+        </p:spPr>
+      </p:sp>
+      <p:sp>
+        <p:nvSpPr>
+          <p:cNvPr id="29" name="Shape 27"/>
+          <p:cNvSpPr/>
+          <p:nvPr/>
+        </p:nvSpPr>
+        <p:spPr>
+          <a:xfrm>
+            <a:off x="6705432" y="6748272"/>
+            <a:ext cx="304792" cy="109728"/>
+          </a:xfrm>
+          <a:prstGeom prst="rect">
+            <a:avLst/>
+          </a:prstGeom>
+          <a:solidFill>
+            <a:srgbClr val="E0A526"/>
+          </a:solidFill>
+          <a:ln/>
+        </p:spPr>
+      </p:sp>
+      <p:sp>
+        <p:nvSpPr>
+          <p:cNvPr id="30" name="Shape 28"/>
+          <p:cNvSpPr/>
+          <p:nvPr/>
+        </p:nvSpPr>
+        <p:spPr>
+          <a:xfrm>
+            <a:off x="7010225" y="6748272"/>
+            <a:ext cx="304792" cy="109728"/>
+          </a:xfrm>
+          <a:prstGeom prst="rect">
+            <a:avLst/>
+          </a:prstGeom>
+          <a:solidFill>
+            <a:srgbClr val="0E5E6F"/>
+          </a:solidFill>
+          <a:ln/>
+        </p:spPr>
+      </p:sp>
+      <p:sp>
+        <p:nvSpPr>
+          <p:cNvPr id="31" name="Shape 29"/>
+          <p:cNvSpPr/>
+          <p:nvPr/>
+        </p:nvSpPr>
+        <p:spPr>
+          <a:xfrm>
+            <a:off x="7315017" y="6748272"/>
+            <a:ext cx="304792" cy="109728"/>
+          </a:xfrm>
+          <a:prstGeom prst="rect">
+            <a:avLst/>
+          </a:prstGeom>
+          <a:solidFill>
+            <a:srgbClr val="8B1E3F"/>
+          </a:solidFill>
+          <a:ln/>
+        </p:spPr>
+      </p:sp>
+      <p:sp>
+        <p:nvSpPr>
+          <p:cNvPr id="32" name="Shape 30"/>
+          <p:cNvSpPr/>
+          <p:nvPr/>
+        </p:nvSpPr>
+        <p:spPr>
+          <a:xfrm>
+            <a:off x="7619809" y="6748272"/>
+            <a:ext cx="304792" cy="109728"/>
+          </a:xfrm>
+          <a:prstGeom prst="rect">
+            <a:avLst/>
+          </a:prstGeom>
+          <a:solidFill>
+            <a:srgbClr val="0E5E6F"/>
+          </a:solidFill>
+          <a:ln/>
+        </p:spPr>
+      </p:sp>
+      <p:sp>
+        <p:nvSpPr>
+          <p:cNvPr id="33" name="Shape 31"/>
+          <p:cNvSpPr/>
+          <p:nvPr/>
+        </p:nvSpPr>
+        <p:spPr>
+          <a:xfrm>
+            <a:off x="7924602" y="6748272"/>
+            <a:ext cx="304792" cy="109728"/>
+          </a:xfrm>
+          <a:prstGeom prst="rect">
+            <a:avLst/>
+          </a:prstGeom>
+          <a:solidFill>
+            <a:srgbClr val="E0A526"/>
+          </a:solidFill>
+          <a:ln/>
+        </p:spPr>
+      </p:sp>
+      <p:sp>
+        <p:nvSpPr>
+          <p:cNvPr id="34" name="Shape 32"/>
+          <p:cNvSpPr/>
+          <p:nvPr/>
+        </p:nvSpPr>
+        <p:spPr>
+          <a:xfrm>
+            <a:off x="8229394" y="6748272"/>
+            <a:ext cx="304792" cy="109728"/>
+          </a:xfrm>
+          <a:prstGeom prst="rect">
+            <a:avLst/>
+          </a:prstGeom>
+          <a:solidFill>
+            <a:srgbClr val="0E5E6F"/>
+          </a:solidFill>
+          <a:ln/>
+        </p:spPr>
+      </p:sp>
+      <p:sp>
+        <p:nvSpPr>
+          <p:cNvPr id="35" name="Shape 33"/>
+          <p:cNvSpPr/>
+          <p:nvPr/>
+        </p:nvSpPr>
+        <p:spPr>
+          <a:xfrm>
+            <a:off x="8534187" y="6748272"/>
+            <a:ext cx="304792" cy="109728"/>
+          </a:xfrm>
+          <a:prstGeom prst="rect">
+            <a:avLst/>
+          </a:prstGeom>
+          <a:solidFill>
+            <a:srgbClr val="8B1E3F"/>
+          </a:solidFill>
+          <a:ln/>
+        </p:spPr>
+      </p:sp>
+      <p:sp>
+        <p:nvSpPr>
+          <p:cNvPr id="36" name="Shape 34"/>
+          <p:cNvSpPr/>
+          <p:nvPr/>
+        </p:nvSpPr>
+        <p:spPr>
+          <a:xfrm>
+            <a:off x="8838979" y="6748272"/>
+            <a:ext cx="304792" cy="109728"/>
+          </a:xfrm>
+          <a:prstGeom prst="rect">
+            <a:avLst/>
+          </a:prstGeom>
+          <a:solidFill>
+            <a:srgbClr val="0E5E6F"/>
+          </a:solidFill>
+          <a:ln/>
+        </p:spPr>
+      </p:sp>
+      <p:sp>
+        <p:nvSpPr>
+          <p:cNvPr id="37" name="Shape 35"/>
+          <p:cNvSpPr/>
+          <p:nvPr/>
+        </p:nvSpPr>
+        <p:spPr>
+          <a:xfrm>
+            <a:off x="9143771" y="6748272"/>
+            <a:ext cx="304792" cy="109728"/>
+          </a:xfrm>
+          <a:prstGeom prst="rect">
+            <a:avLst/>
+          </a:prstGeom>
+          <a:solidFill>
+            <a:srgbClr val="E0A526"/>
+          </a:solidFill>
+          <a:ln/>
+        </p:spPr>
+      </p:sp>
+      <p:sp>
+        <p:nvSpPr>
+          <p:cNvPr id="38" name="Shape 36"/>
+          <p:cNvSpPr/>
+          <p:nvPr/>
+        </p:nvSpPr>
+        <p:spPr>
+          <a:xfrm>
+            <a:off x="9448564" y="6748272"/>
+            <a:ext cx="304792" cy="109728"/>
+          </a:xfrm>
+          <a:prstGeom prst="rect">
+            <a:avLst/>
+          </a:prstGeom>
+          <a:solidFill>
+            <a:srgbClr val="0E5E6F"/>
+          </a:solidFill>
+          <a:ln/>
+        </p:spPr>
+      </p:sp>
+      <p:sp>
+        <p:nvSpPr>
+          <p:cNvPr id="39" name="Shape 37"/>
+          <p:cNvSpPr/>
+          <p:nvPr/>
+        </p:nvSpPr>
+        <p:spPr>
+          <a:xfrm>
+            <a:off x="9753356" y="6748272"/>
+            <a:ext cx="304792" cy="109728"/>
+          </a:xfrm>
+          <a:prstGeom prst="rect">
+            <a:avLst/>
+          </a:prstGeom>
+          <a:solidFill>
+            <a:srgbClr val="8B1E3F"/>
+          </a:solidFill>
+          <a:ln/>
+        </p:spPr>
+      </p:sp>
+      <p:sp>
+        <p:nvSpPr>
+          <p:cNvPr id="40" name="Shape 38"/>
+          <p:cNvSpPr/>
+          <p:nvPr/>
+        </p:nvSpPr>
+        <p:spPr>
+          <a:xfrm>
+            <a:off x="10058149" y="6748272"/>
+            <a:ext cx="304792" cy="109728"/>
+          </a:xfrm>
+          <a:prstGeom prst="rect">
+            <a:avLst/>
+          </a:prstGeom>
+          <a:solidFill>
+            <a:srgbClr val="0E5E6F"/>
+          </a:solidFill>
+          <a:ln/>
+        </p:spPr>
+      </p:sp>
+      <p:sp>
+        <p:nvSpPr>
+          <p:cNvPr id="41" name="Shape 39"/>
+          <p:cNvSpPr/>
+          <p:nvPr/>
+        </p:nvSpPr>
+        <p:spPr>
+          <a:xfrm>
+            <a:off x="10362941" y="6748272"/>
+            <a:ext cx="304792" cy="109728"/>
+          </a:xfrm>
+          <a:prstGeom prst="rect">
+            <a:avLst/>
+          </a:prstGeom>
+          <a:solidFill>
+            <a:srgbClr val="E0A526"/>
+          </a:solidFill>
+          <a:ln/>
+        </p:spPr>
+      </p:sp>
+      <p:sp>
+        <p:nvSpPr>
+          <p:cNvPr id="42" name="Shape 40"/>
+          <p:cNvSpPr/>
+          <p:nvPr/>
+        </p:nvSpPr>
+        <p:spPr>
+          <a:xfrm>
+            <a:off x="10667733" y="6748272"/>
+            <a:ext cx="304792" cy="109728"/>
+          </a:xfrm>
+          <a:prstGeom prst="rect">
+            <a:avLst/>
+          </a:prstGeom>
+          <a:solidFill>
+            <a:srgbClr val="0E5E6F"/>
+          </a:solidFill>
+          <a:ln/>
+        </p:spPr>
+      </p:sp>
+      <p:sp>
+        <p:nvSpPr>
+          <p:cNvPr id="43" name="Shape 41"/>
+          <p:cNvSpPr/>
+          <p:nvPr/>
+        </p:nvSpPr>
+        <p:spPr>
+          <a:xfrm>
+            <a:off x="10972526" y="6748272"/>
+            <a:ext cx="304792" cy="109728"/>
+          </a:xfrm>
+          <a:prstGeom prst="rect">
+            <a:avLst/>
+          </a:prstGeom>
+          <a:solidFill>
+            <a:srgbClr val="8B1E3F"/>
+          </a:solidFill>
+          <a:ln/>
+        </p:spPr>
+      </p:sp>
+      <p:sp>
+        <p:nvSpPr>
+          <p:cNvPr id="44" name="Shape 42"/>
+          <p:cNvSpPr/>
+          <p:nvPr/>
+        </p:nvSpPr>
+        <p:spPr>
+          <a:xfrm>
+            <a:off x="11277318" y="6748272"/>
+            <a:ext cx="304792" cy="109728"/>
+          </a:xfrm>
+          <a:prstGeom prst="rect">
+            <a:avLst/>
+          </a:prstGeom>
+          <a:solidFill>
+            <a:srgbClr val="0E5E6F"/>
+          </a:solidFill>
+          <a:ln/>
+        </p:spPr>
+      </p:sp>
+      <p:sp>
+        <p:nvSpPr>
+          <p:cNvPr id="45" name="Shape 43"/>
+          <p:cNvSpPr/>
+          <p:nvPr/>
+        </p:nvSpPr>
+        <p:spPr>
+          <a:xfrm>
+            <a:off x="11582110" y="6748272"/>
+            <a:ext cx="304792" cy="109728"/>
+          </a:xfrm>
+          <a:prstGeom prst="rect">
+            <a:avLst/>
+          </a:prstGeom>
+          <a:solidFill>
+            <a:srgbClr val="E0A526"/>
+          </a:solidFill>
+          <a:ln/>
+        </p:spPr>
+      </p:sp>
+      <p:sp>
+        <p:nvSpPr>
+          <p:cNvPr id="46" name="Shape 44"/>
+          <p:cNvSpPr/>
+          <p:nvPr/>
+        </p:nvSpPr>
+        <p:spPr>
+          <a:xfrm>
+            <a:off x="11886903" y="6748272"/>
+            <a:ext cx="304792" cy="109728"/>
+          </a:xfrm>
+          <a:prstGeom prst="rect">
+            <a:avLst/>
+          </a:prstGeom>
+          <a:solidFill>
+            <a:srgbClr val="0E5E6F"/>
+          </a:solidFill>
+          <a:ln/>
+        </p:spPr>
+      </p:sp>
+      <p:graphicFrame>
+        <p:nvGraphicFramePr>
+          <p:cNvPr id="47" name="Chart 0" descr=""/>
+          <p:cNvGraphicFramePr/>
+          <p:nvPr/>
+        </p:nvGraphicFramePr>
+        <p:xfrm>
+          <a:off x="548640" y="1920240"/>
+          <a:ext cx="7040880" cy="4343400"/>
+        </p:xfrm>
+        <a:graphic xmlns:a="http://schemas.openxmlformats.org/drawingml/2006/main">
+          <a:graphicData uri="http://schemas.openxmlformats.org/drawingml/2006/chart">
+            <c:chart xmlns:c="http://schemas.openxmlformats.org/drawingml/2006/chart" r:id="rId1"/>
+          </a:graphicData>
+        </a:graphic>
+      </p:graphicFrame>
+      <p:sp>
+        <p:nvSpPr>
+          <p:cNvPr id="48" name="Text 45"/>
+          <p:cNvSpPr txBox="1"/>
+          <p:nvPr/>
+        </p:nvSpPr>
+        <p:spPr>
+          <a:xfrm>
+            <a:off x="7909560" y="2011680"/>
+            <a:ext cx="3733495" cy="4251960"/>
+          </a:xfrm>
+          <a:prstGeom prst="rect">
+            <a:avLst/>
+          </a:prstGeom>
+          <a:noFill/>
+          <a:ln/>
+        </p:spPr>
+        <p:txBody>
+          <a:bodyPr wrap="square" lIns="0" tIns="0" rIns="0" bIns="0" rtlCol="0" anchor="t">
+            <a:normAutofit/>
+          </a:bodyPr>
+          <a:lstStyle/>
+          <a:p>
+            <a:pPr marL="342900" indent="-342900">
+              <a:spcAft>
+                <a:spcPts val="800"/>
+              </a:spcAft>
+              <a:buSzPct val="100000"/>
+              <a:buChar char="•"/>
+            </a:pPr>
+            <a:r>
+              <a:rPr lang="en-US" sz="1400" dirty="0">
+                <a:solidFill>
+                  <a:srgbClr val="1C2833"/>
+                </a:solidFill>
+                <a:latin typeface="Calibri" pitchFamily="34" charset="0"/>
+                <a:ea typeface="Calibri" pitchFamily="34" charset="-122"/>
+                <a:cs typeface="Calibri" pitchFamily="34" charset="-120"/>
+              </a:rPr>
+              <a:t>Inside the same part the gaps are under 2.5 points either way.</a:t>
+            </a:r>
+            <a:endParaRPr lang="en-US" sz="1400" dirty="0"/>
+          </a:p>
+          <a:p>
+            <a:pPr marL="342900" indent="-342900">
+              <a:spcAft>
+                <a:spcPts val="800"/>
+              </a:spcAft>
+              <a:buSzPct val="100000"/>
+              <a:buChar char="•"/>
+            </a:pPr>
+            <a:r>
+              <a:rPr lang="en-US" sz="1400" dirty="0">
+                <a:solidFill>
+                  <a:srgbClr val="1C2833"/>
+                </a:solidFill>
+                <a:latin typeface="Calibri" pitchFamily="34" charset="0"/>
+                <a:ea typeface="Calibri" pitchFamily="34" charset="-122"/>
+                <a:cs typeface="Calibri" pitchFamily="34" charset="-120"/>
+              </a:rPr>
+              <a:t>In Bihar, women were 55.5% of the removed. The Old City shows no such gap.</a:t>
+            </a:r>
+            <a:endParaRPr lang="en-US" sz="1400" dirty="0"/>
+          </a:p>
+        </p:txBody>
+      </p:sp>
+    </p:spTree>
+  </p:cSld>
+  <p:clrMapOvr>
+    <a:masterClrMapping/>
+  </p:clrMapOvr>
+</p:sld>
+</file>
+
+<file path=ppt/slides/slide11.xml><?xml version="1.0" encoding="utf-8"?>
+<p:sld xmlns:a="http://schemas.openxmlformats.org/drawingml/2006/main" xmlns:r="http://schemas.openxmlformats.org/officeDocument/2006/relationships" xmlns:p="http://schemas.openxmlformats.org/presentationml/2006/main">
+  <p:cSld name="Slide 11">
+    <p:spTree>
+      <p:nvGrpSpPr>
+        <p:cNvPr id="1" name=""/>
+        <p:cNvGrpSpPr/>
+        <p:nvPr/>
+      </p:nvGrpSpPr>
+      <p:grpSpPr>
+        <a:xfrm>
+          <a:off x="0" y="0"/>
+          <a:ext cx="0" cy="0"/>
+          <a:chOff x="0" y="0"/>
+          <a:chExt cx="0" cy="0"/>
+        </a:xfrm>
+      </p:grpSpPr>
+      <p:sp>
+        <p:nvSpPr>
+          <p:cNvPr id="2" name="Text 0"/>
+          <p:cNvSpPr txBox="1"/>
+          <p:nvPr/>
+        </p:nvSpPr>
+        <p:spPr>
+          <a:xfrm>
+            <a:off x="548640" y="256032"/>
+            <a:ext cx="11094415" cy="274320"/>
+          </a:xfrm>
+          <a:prstGeom prst="rect">
+            <a:avLst/>
+          </a:prstGeom>
+          <a:noFill/>
+          <a:ln/>
+        </p:spPr>
+        <p:txBody>
+          <a:bodyPr wrap="square" lIns="0" tIns="0" rIns="0" bIns="0" rtlCol="0" anchor="ctr"/>
+          <a:lstStyle/>
+          <a:p>
+            <a:pPr indent="0" marL="0">
+              <a:buNone/>
+            </a:pPr>
+            <a:r>
+              <a:rPr lang="en-US" sz="1100" b="1" spc="200" kern="0" dirty="0">
+                <a:solidFill>
+                  <a:srgbClr val="8B1E3F"/>
+                </a:solidFill>
+                <a:latin typeface="Calibri" pitchFamily="34" charset="0"/>
+                <a:ea typeface="Calibri" pitchFamily="34" charset="-122"/>
+                <a:cs typeface="Calibri" pitchFamily="34" charset="-120"/>
+              </a:rPr>
               <a:t>POLLING PARTS</a:t>
             </a:r>
             <a:endParaRPr lang="en-US" sz="1100" dirty="0"/>
@@ -7904,7 +9574,7 @@
                 <a:ea typeface="Calibri" pitchFamily="34" charset="-122"/>
                 <a:cs typeface="Calibri" pitchFamily="34" charset="-120"/>
               </a:rPr>
-              <a:t>10</a:t>
+              <a:t>11</a:t>
             </a:r>
             <a:endParaRPr lang="en-US" sz="900" dirty="0"/>
           </a:p>
@@ -8728,7 +10398,7 @@
       </p:graphicFrame>
       <p:graphicFrame>
         <p:nvGraphicFramePr>
-          <p:cNvPr id="11" name="Table 0"/>
+          <p:cNvPr id="12" name="Table 0"/>
           <p:cNvGraphicFramePr>
             <a:graphicFrameLocks noGrp="1"/>
           </p:cNvGraphicFramePr>
@@ -10136,9 +11806,9 @@
 </p:sld>
 </file>
 
-<file path=ppt/slides/slide11.xml><?xml version="1.0" encoding="utf-8"?>
+<file path=ppt/slides/slide12.xml><?xml version="1.0" encoding="utf-8"?>
 <p:sld xmlns:a="http://schemas.openxmlformats.org/drawingml/2006/main" xmlns:r="http://schemas.openxmlformats.org/officeDocument/2006/relationships" xmlns:p="http://schemas.openxmlformats.org/presentationml/2006/main">
-  <p:cSld name="Slide 11">
+  <p:cSld name="Slide 12">
     <p:spTree>
       <p:nvGrpSpPr>
         <p:cNvPr id="1" name=""/>
@@ -10344,7 +12014,7 @@
                 <a:ea typeface="Calibri" pitchFamily="34" charset="-122"/>
                 <a:cs typeface="Calibri" pitchFamily="34" charset="-120"/>
               </a:rPr>
-              <a:t>11</a:t>
+              <a:t>12</a:t>
             </a:r>
             <a:endParaRPr lang="en-US" sz="900" dirty="0"/>
           </a:p>
@@ -11152,7 +12822,7 @@
       </p:sp>
       <p:graphicFrame>
         <p:nvGraphicFramePr>
-          <p:cNvPr id="12" name="Table 0"/>
+          <p:cNvPr id="13" name="Table 0"/>
           <p:cNvGraphicFramePr>
             <a:graphicFrameLocks noGrp="1"/>
           </p:cNvGraphicFramePr>
@@ -12647,9 +14317,9 @@
 </p:sld>
 </file>
 
-<file path=ppt/slides/slide12.xml><?xml version="1.0" encoding="utf-8"?>
+<file path=ppt/slides/slide13.xml><?xml version="1.0" encoding="utf-8"?>
 <p:sld xmlns:a="http://schemas.openxmlformats.org/drawingml/2006/main" xmlns:r="http://schemas.openxmlformats.org/officeDocument/2006/relationships" xmlns:p="http://schemas.openxmlformats.org/presentationml/2006/main">
-  <p:cSld name="Slide 12">
+  <p:cSld name="Slide 13">
     <p:spTree>
       <p:nvGrpSpPr>
         <p:cNvPr id="1" name=""/>
@@ -12855,7 +14525,7 @@
                 <a:ea typeface="Calibri" pitchFamily="34" charset="-122"/>
                 <a:cs typeface="Calibri" pitchFamily="34" charset="-120"/>
               </a:rPr>
-              <a:t>12</a:t>
+              <a:t>13</a:t>
             </a:r>
             <a:endParaRPr lang="en-US" sz="900" dirty="0"/>
           </a:p>
@@ -13663,7 +15333,7 @@
       </p:sp>
       <p:graphicFrame>
         <p:nvGraphicFramePr>
-          <p:cNvPr id="13" name="Table 0"/>
+          <p:cNvPr id="14" name="Table 0"/>
           <p:cNvGraphicFramePr>
             <a:graphicFrameLocks noGrp="1"/>
           </p:cNvGraphicFramePr>
@@ -20263,9 +21933,9 @@
 </p:sld>
 </file>
 
-<file path=ppt/slides/slide13.xml><?xml version="1.0" encoding="utf-8"?>
+<file path=ppt/slides/slide14.xml><?xml version="1.0" encoding="utf-8"?>
 <p:sld xmlns:a="http://schemas.openxmlformats.org/drawingml/2006/main" xmlns:r="http://schemas.openxmlformats.org/officeDocument/2006/relationships" xmlns:p="http://schemas.openxmlformats.org/presentationml/2006/main">
-  <p:cSld name="Slide 13">
+  <p:cSld name="Slide 14">
     <p:spTree>
       <p:nvGrpSpPr>
         <p:cNvPr id="1" name=""/>
@@ -20471,7 +22141,7 @@
                 <a:ea typeface="Calibri" pitchFamily="34" charset="-122"/>
                 <a:cs typeface="Calibri" pitchFamily="34" charset="-120"/>
               </a:rPr>
-              <a:t>13</a:t>
+              <a:t>14</a:t>
             </a:r>
             <a:endParaRPr lang="en-US" sz="900" dirty="0"/>
           </a:p>
@@ -21388,9 +23058,9 @@
 </p:sld>
 </file>
 
-<file path=ppt/slides/slide14.xml><?xml version="1.0" encoding="utf-8"?>
+<file path=ppt/slides/slide15.xml><?xml version="1.0" encoding="utf-8"?>
 <p:sld xmlns:a="http://schemas.openxmlformats.org/drawingml/2006/main" xmlns:r="http://schemas.openxmlformats.org/officeDocument/2006/relationships" xmlns:p="http://schemas.openxmlformats.org/presentationml/2006/main">
-  <p:cSld name="Slide 14">
+  <p:cSld name="Slide 15">
     <p:spTree>
       <p:nvGrpSpPr>
         <p:cNvPr id="1" name=""/>
@@ -21596,7 +23266,7 @@
                 <a:ea typeface="Calibri" pitchFamily="34" charset="-122"/>
                 <a:cs typeface="Calibri" pitchFamily="34" charset="-120"/>
               </a:rPr>
-              <a:t>14</a:t>
+              <a:t>15</a:t>
             </a:r>
             <a:endParaRPr lang="en-US" sz="900" dirty="0"/>
           </a:p>
@@ -22442,9 +24112,9 @@
 </p:sld>
 </file>
 
-<file path=ppt/slides/slide15.xml><?xml version="1.0" encoding="utf-8"?>
+<file path=ppt/slides/slide16.xml><?xml version="1.0" encoding="utf-8"?>
 <p:sld xmlns:a="http://schemas.openxmlformats.org/drawingml/2006/main" xmlns:r="http://schemas.openxmlformats.org/officeDocument/2006/relationships" xmlns:p="http://schemas.openxmlformats.org/presentationml/2006/main">
-  <p:cSld name="Slide 15">
+  <p:cSld name="Slide 16">
     <p:spTree>
       <p:nvGrpSpPr>
         <p:cNvPr id="1" name=""/>
@@ -22611,7 +24281,7 @@
                 <a:ea typeface="Calibri" pitchFamily="34" charset="-122"/>
                 <a:cs typeface="Calibri" pitchFamily="34" charset="-120"/>
               </a:rPr>
-              <a:t>15</a:t>
+              <a:t>16</a:t>
             </a:r>
             <a:endParaRPr lang="en-US" sz="900" dirty="0"/>
           </a:p>
@@ -23769,9 +25439,9 @@
 </p:sld>
 </file>
 
-<file path=ppt/slides/slide16.xml><?xml version="1.0" encoding="utf-8"?>
+<file path=ppt/slides/slide17.xml><?xml version="1.0" encoding="utf-8"?>
 <p:sld xmlns:a="http://schemas.openxmlformats.org/drawingml/2006/main" xmlns:r="http://schemas.openxmlformats.org/officeDocument/2006/relationships" xmlns:p="http://schemas.openxmlformats.org/presentationml/2006/main">
-  <p:cSld name="Slide 16">
+  <p:cSld name="Slide 17">
     <p:spTree>
       <p:nvGrpSpPr>
         <p:cNvPr id="1" name=""/>
@@ -23938,7 +25608,7 @@
                 <a:ea typeface="Calibri" pitchFamily="34" charset="-122"/>
                 <a:cs typeface="Calibri" pitchFamily="34" charset="-120"/>
               </a:rPr>
-              <a:t>16</a:t>
+              <a:t>17</a:t>
             </a:r>
             <a:endParaRPr lang="en-US" sz="900" dirty="0"/>
           </a:p>
@@ -25096,9 +26766,9 @@
 </p:sld>
 </file>
 
-<file path=ppt/slides/slide17.xml><?xml version="1.0" encoding="utf-8"?>
+<file path=ppt/slides/slide18.xml><?xml version="1.0" encoding="utf-8"?>
 <p:sld xmlns:a="http://schemas.openxmlformats.org/drawingml/2006/main" xmlns:r="http://schemas.openxmlformats.org/officeDocument/2006/relationships" xmlns:p="http://schemas.openxmlformats.org/presentationml/2006/main">
-  <p:cSld name="Slide 17">
+  <p:cSld name="Slide 18">
     <p:spTree>
       <p:nvGrpSpPr>
         <p:cNvPr id="1" name=""/>
@@ -25265,7 +26935,7 @@
                 <a:ea typeface="Calibri" pitchFamily="34" charset="-122"/>
                 <a:cs typeface="Calibri" pitchFamily="34" charset="-120"/>
               </a:rPr>
-              <a:t>17</a:t>
+              <a:t>18</a:t>
             </a:r>
             <a:endParaRPr lang="en-US" sz="900" dirty="0"/>
           </a:p>
@@ -26249,9 +27919,9 @@
 </p:sld>
 </file>
 
-<file path=ppt/slides/slide18.xml><?xml version="1.0" encoding="utf-8"?>
+<file path=ppt/slides/slide19.xml><?xml version="1.0" encoding="utf-8"?>
 <p:sld xmlns:a="http://schemas.openxmlformats.org/drawingml/2006/main" xmlns:r="http://schemas.openxmlformats.org/officeDocument/2006/relationships" xmlns:p="http://schemas.openxmlformats.org/presentationml/2006/main">
-  <p:cSld name="Slide 18">
+  <p:cSld name="Slide 19">
     <p:spTree>
       <p:nvGrpSpPr>
         <p:cNvPr id="1" name=""/>
@@ -26418,7 +28088,7 @@
                 <a:ea typeface="Calibri" pitchFamily="34" charset="-122"/>
                 <a:cs typeface="Calibri" pitchFamily="34" charset="-120"/>
               </a:rPr>
-              <a:t>18</a:t>
+              <a:t>19</a:t>
             </a:r>
             <a:endParaRPr lang="en-US" sz="900" dirty="0"/>
           </a:p>
@@ -27366,9 +29036,1097 @@
 </p:sld>
 </file>
 
-<file path=ppt/slides/slide19.xml><?xml version="1.0" encoding="utf-8"?>
+<file path=ppt/slides/slide2.xml><?xml version="1.0" encoding="utf-8"?>
 <p:sld xmlns:a="http://schemas.openxmlformats.org/drawingml/2006/main" xmlns:r="http://schemas.openxmlformats.org/officeDocument/2006/relationships" xmlns:p="http://schemas.openxmlformats.org/presentationml/2006/main">
-  <p:cSld name="Slide 19">
+  <p:cSld name="Slide 2">
+    <p:spTree>
+      <p:nvGrpSpPr>
+        <p:cNvPr id="1" name=""/>
+        <p:cNvGrpSpPr/>
+        <p:nvPr/>
+      </p:nvGrpSpPr>
+      <p:grpSpPr>
+        <a:xfrm>
+          <a:off x="0" y="0"/>
+          <a:ext cx="0" cy="0"/>
+          <a:chOff x="0" y="0"/>
+          <a:chExt cx="0" cy="0"/>
+        </a:xfrm>
+      </p:grpSpPr>
+      <p:sp>
+        <p:nvSpPr>
+          <p:cNvPr id="2" name="Text 0"/>
+          <p:cNvSpPr txBox="1"/>
+          <p:nvPr/>
+        </p:nvSpPr>
+        <p:spPr>
+          <a:xfrm>
+            <a:off x="548640" y="457200"/>
+            <a:ext cx="11094415" cy="731520"/>
+          </a:xfrm>
+          <a:prstGeom prst="rect">
+            <a:avLst/>
+          </a:prstGeom>
+          <a:noFill/>
+          <a:ln/>
+        </p:spPr>
+        <p:txBody>
+          <a:bodyPr wrap="square" lIns="0" tIns="0" rIns="0" bIns="0" rtlCol="0" anchor="ctr"/>
+          <a:lstStyle/>
+          <a:p>
+            <a:pPr indent="0" marL="0">
+              <a:buNone/>
+            </a:pPr>
+            <a:r>
+              <a:rPr lang="en-US" sz="3000" b="1" dirty="0">
+                <a:solidFill>
+                  <a:srgbClr val="6E1832"/>
+                </a:solidFill>
+                <a:latin typeface="Cambria" pitchFamily="34" charset="0"/>
+                <a:ea typeface="Cambria" pitchFamily="34" charset="-122"/>
+                <a:cs typeface="Cambria" pitchFamily="34" charset="-120"/>
+              </a:rPr>
+              <a:t>Contents</a:t>
+            </a:r>
+            <a:endParaRPr lang="en-US" sz="3000" dirty="0"/>
+          </a:p>
+        </p:txBody>
+      </p:sp>
+      <p:sp>
+        <p:nvSpPr>
+          <p:cNvPr id="3" name="Shape 1"/>
+          <p:cNvSpPr/>
+          <p:nvPr/>
+        </p:nvSpPr>
+        <p:spPr>
+          <a:xfrm>
+            <a:off x="0" y="6748272"/>
+            <a:ext cx="304792" cy="109728"/>
+          </a:xfrm>
+          <a:prstGeom prst="rect">
+            <a:avLst/>
+          </a:prstGeom>
+          <a:solidFill>
+            <a:srgbClr val="8B1E3F"/>
+          </a:solidFill>
+          <a:ln/>
+        </p:spPr>
+      </p:sp>
+      <p:sp>
+        <p:nvSpPr>
+          <p:cNvPr id="4" name="Shape 2"/>
+          <p:cNvSpPr/>
+          <p:nvPr/>
+        </p:nvSpPr>
+        <p:spPr>
+          <a:xfrm>
+            <a:off x="304792" y="6748272"/>
+            <a:ext cx="304792" cy="109728"/>
+          </a:xfrm>
+          <a:prstGeom prst="rect">
+            <a:avLst/>
+          </a:prstGeom>
+          <a:solidFill>
+            <a:srgbClr val="0E5E6F"/>
+          </a:solidFill>
+          <a:ln/>
+        </p:spPr>
+      </p:sp>
+      <p:sp>
+        <p:nvSpPr>
+          <p:cNvPr id="5" name="Shape 3"/>
+          <p:cNvSpPr/>
+          <p:nvPr/>
+        </p:nvSpPr>
+        <p:spPr>
+          <a:xfrm>
+            <a:off x="609585" y="6748272"/>
+            <a:ext cx="304792" cy="109728"/>
+          </a:xfrm>
+          <a:prstGeom prst="rect">
+            <a:avLst/>
+          </a:prstGeom>
+          <a:solidFill>
+            <a:srgbClr val="E0A526"/>
+          </a:solidFill>
+          <a:ln/>
+        </p:spPr>
+      </p:sp>
+      <p:sp>
+        <p:nvSpPr>
+          <p:cNvPr id="6" name="Shape 4"/>
+          <p:cNvSpPr/>
+          <p:nvPr/>
+        </p:nvSpPr>
+        <p:spPr>
+          <a:xfrm>
+            <a:off x="914377" y="6748272"/>
+            <a:ext cx="304792" cy="109728"/>
+          </a:xfrm>
+          <a:prstGeom prst="rect">
+            <a:avLst/>
+          </a:prstGeom>
+          <a:solidFill>
+            <a:srgbClr val="0E5E6F"/>
+          </a:solidFill>
+          <a:ln/>
+        </p:spPr>
+      </p:sp>
+      <p:sp>
+        <p:nvSpPr>
+          <p:cNvPr id="7" name="Shape 5"/>
+          <p:cNvSpPr/>
+          <p:nvPr/>
+        </p:nvSpPr>
+        <p:spPr>
+          <a:xfrm>
+            <a:off x="1219170" y="6748272"/>
+            <a:ext cx="304792" cy="109728"/>
+          </a:xfrm>
+          <a:prstGeom prst="rect">
+            <a:avLst/>
+          </a:prstGeom>
+          <a:solidFill>
+            <a:srgbClr val="8B1E3F"/>
+          </a:solidFill>
+          <a:ln/>
+        </p:spPr>
+      </p:sp>
+      <p:sp>
+        <p:nvSpPr>
+          <p:cNvPr id="8" name="Shape 6"/>
+          <p:cNvSpPr/>
+          <p:nvPr/>
+        </p:nvSpPr>
+        <p:spPr>
+          <a:xfrm>
+            <a:off x="1523962" y="6748272"/>
+            <a:ext cx="304792" cy="109728"/>
+          </a:xfrm>
+          <a:prstGeom prst="rect">
+            <a:avLst/>
+          </a:prstGeom>
+          <a:solidFill>
+            <a:srgbClr val="0E5E6F"/>
+          </a:solidFill>
+          <a:ln/>
+        </p:spPr>
+      </p:sp>
+      <p:sp>
+        <p:nvSpPr>
+          <p:cNvPr id="9" name="Shape 7"/>
+          <p:cNvSpPr/>
+          <p:nvPr/>
+        </p:nvSpPr>
+        <p:spPr>
+          <a:xfrm>
+            <a:off x="1828754" y="6748272"/>
+            <a:ext cx="304792" cy="109728"/>
+          </a:xfrm>
+          <a:prstGeom prst="rect">
+            <a:avLst/>
+          </a:prstGeom>
+          <a:solidFill>
+            <a:srgbClr val="E0A526"/>
+          </a:solidFill>
+          <a:ln/>
+        </p:spPr>
+      </p:sp>
+      <p:sp>
+        <p:nvSpPr>
+          <p:cNvPr id="10" name="Shape 8"/>
+          <p:cNvSpPr/>
+          <p:nvPr/>
+        </p:nvSpPr>
+        <p:spPr>
+          <a:xfrm>
+            <a:off x="2133547" y="6748272"/>
+            <a:ext cx="304792" cy="109728"/>
+          </a:xfrm>
+          <a:prstGeom prst="rect">
+            <a:avLst/>
+          </a:prstGeom>
+          <a:solidFill>
+            <a:srgbClr val="0E5E6F"/>
+          </a:solidFill>
+          <a:ln/>
+        </p:spPr>
+      </p:sp>
+      <p:sp>
+        <p:nvSpPr>
+          <p:cNvPr id="11" name="Shape 9"/>
+          <p:cNvSpPr/>
+          <p:nvPr/>
+        </p:nvSpPr>
+        <p:spPr>
+          <a:xfrm>
+            <a:off x="2438339" y="6748272"/>
+            <a:ext cx="304792" cy="109728"/>
+          </a:xfrm>
+          <a:prstGeom prst="rect">
+            <a:avLst/>
+          </a:prstGeom>
+          <a:solidFill>
+            <a:srgbClr val="8B1E3F"/>
+          </a:solidFill>
+          <a:ln/>
+        </p:spPr>
+      </p:sp>
+      <p:sp>
+        <p:nvSpPr>
+          <p:cNvPr id="12" name="Shape 10"/>
+          <p:cNvSpPr/>
+          <p:nvPr/>
+        </p:nvSpPr>
+        <p:spPr>
+          <a:xfrm>
+            <a:off x="2743131" y="6748272"/>
+            <a:ext cx="304792" cy="109728"/>
+          </a:xfrm>
+          <a:prstGeom prst="rect">
+            <a:avLst/>
+          </a:prstGeom>
+          <a:solidFill>
+            <a:srgbClr val="0E5E6F"/>
+          </a:solidFill>
+          <a:ln/>
+        </p:spPr>
+      </p:sp>
+      <p:sp>
+        <p:nvSpPr>
+          <p:cNvPr id="13" name="Shape 11"/>
+          <p:cNvSpPr/>
+          <p:nvPr/>
+        </p:nvSpPr>
+        <p:spPr>
+          <a:xfrm>
+            <a:off x="3047924" y="6748272"/>
+            <a:ext cx="304792" cy="109728"/>
+          </a:xfrm>
+          <a:prstGeom prst="rect">
+            <a:avLst/>
+          </a:prstGeom>
+          <a:solidFill>
+            <a:srgbClr val="E0A526"/>
+          </a:solidFill>
+          <a:ln/>
+        </p:spPr>
+      </p:sp>
+      <p:sp>
+        <p:nvSpPr>
+          <p:cNvPr id="14" name="Shape 12"/>
+          <p:cNvSpPr/>
+          <p:nvPr/>
+        </p:nvSpPr>
+        <p:spPr>
+          <a:xfrm>
+            <a:off x="3352716" y="6748272"/>
+            <a:ext cx="304792" cy="109728"/>
+          </a:xfrm>
+          <a:prstGeom prst="rect">
+            <a:avLst/>
+          </a:prstGeom>
+          <a:solidFill>
+            <a:srgbClr val="0E5E6F"/>
+          </a:solidFill>
+          <a:ln/>
+        </p:spPr>
+      </p:sp>
+      <p:sp>
+        <p:nvSpPr>
+          <p:cNvPr id="15" name="Shape 13"/>
+          <p:cNvSpPr/>
+          <p:nvPr/>
+        </p:nvSpPr>
+        <p:spPr>
+          <a:xfrm>
+            <a:off x="3657509" y="6748272"/>
+            <a:ext cx="304792" cy="109728"/>
+          </a:xfrm>
+          <a:prstGeom prst="rect">
+            <a:avLst/>
+          </a:prstGeom>
+          <a:solidFill>
+            <a:srgbClr val="8B1E3F"/>
+          </a:solidFill>
+          <a:ln/>
+        </p:spPr>
+      </p:sp>
+      <p:sp>
+        <p:nvSpPr>
+          <p:cNvPr id="16" name="Shape 14"/>
+          <p:cNvSpPr/>
+          <p:nvPr/>
+        </p:nvSpPr>
+        <p:spPr>
+          <a:xfrm>
+            <a:off x="3962301" y="6748272"/>
+            <a:ext cx="304792" cy="109728"/>
+          </a:xfrm>
+          <a:prstGeom prst="rect">
+            <a:avLst/>
+          </a:prstGeom>
+          <a:solidFill>
+            <a:srgbClr val="0E5E6F"/>
+          </a:solidFill>
+          <a:ln/>
+        </p:spPr>
+      </p:sp>
+      <p:sp>
+        <p:nvSpPr>
+          <p:cNvPr id="17" name="Shape 15"/>
+          <p:cNvSpPr/>
+          <p:nvPr/>
+        </p:nvSpPr>
+        <p:spPr>
+          <a:xfrm>
+            <a:off x="4267093" y="6748272"/>
+            <a:ext cx="304792" cy="109728"/>
+          </a:xfrm>
+          <a:prstGeom prst="rect">
+            <a:avLst/>
+          </a:prstGeom>
+          <a:solidFill>
+            <a:srgbClr val="E0A526"/>
+          </a:solidFill>
+          <a:ln/>
+        </p:spPr>
+      </p:sp>
+      <p:sp>
+        <p:nvSpPr>
+          <p:cNvPr id="18" name="Shape 16"/>
+          <p:cNvSpPr/>
+          <p:nvPr/>
+        </p:nvSpPr>
+        <p:spPr>
+          <a:xfrm>
+            <a:off x="4571886" y="6748272"/>
+            <a:ext cx="304792" cy="109728"/>
+          </a:xfrm>
+          <a:prstGeom prst="rect">
+            <a:avLst/>
+          </a:prstGeom>
+          <a:solidFill>
+            <a:srgbClr val="0E5E6F"/>
+          </a:solidFill>
+          <a:ln/>
+        </p:spPr>
+      </p:sp>
+      <p:sp>
+        <p:nvSpPr>
+          <p:cNvPr id="19" name="Shape 17"/>
+          <p:cNvSpPr/>
+          <p:nvPr/>
+        </p:nvSpPr>
+        <p:spPr>
+          <a:xfrm>
+            <a:off x="4876678" y="6748272"/>
+            <a:ext cx="304792" cy="109728"/>
+          </a:xfrm>
+          <a:prstGeom prst="rect">
+            <a:avLst/>
+          </a:prstGeom>
+          <a:solidFill>
+            <a:srgbClr val="8B1E3F"/>
+          </a:solidFill>
+          <a:ln/>
+        </p:spPr>
+      </p:sp>
+      <p:sp>
+        <p:nvSpPr>
+          <p:cNvPr id="20" name="Shape 18"/>
+          <p:cNvSpPr/>
+          <p:nvPr/>
+        </p:nvSpPr>
+        <p:spPr>
+          <a:xfrm>
+            <a:off x="5181470" y="6748272"/>
+            <a:ext cx="304792" cy="109728"/>
+          </a:xfrm>
+          <a:prstGeom prst="rect">
+            <a:avLst/>
+          </a:prstGeom>
+          <a:solidFill>
+            <a:srgbClr val="0E5E6F"/>
+          </a:solidFill>
+          <a:ln/>
+        </p:spPr>
+      </p:sp>
+      <p:sp>
+        <p:nvSpPr>
+          <p:cNvPr id="21" name="Shape 19"/>
+          <p:cNvSpPr/>
+          <p:nvPr/>
+        </p:nvSpPr>
+        <p:spPr>
+          <a:xfrm>
+            <a:off x="5486263" y="6748272"/>
+            <a:ext cx="304792" cy="109728"/>
+          </a:xfrm>
+          <a:prstGeom prst="rect">
+            <a:avLst/>
+          </a:prstGeom>
+          <a:solidFill>
+            <a:srgbClr val="E0A526"/>
+          </a:solidFill>
+          <a:ln/>
+        </p:spPr>
+      </p:sp>
+      <p:sp>
+        <p:nvSpPr>
+          <p:cNvPr id="22" name="Shape 20"/>
+          <p:cNvSpPr/>
+          <p:nvPr/>
+        </p:nvSpPr>
+        <p:spPr>
+          <a:xfrm>
+            <a:off x="5791055" y="6748272"/>
+            <a:ext cx="304792" cy="109728"/>
+          </a:xfrm>
+          <a:prstGeom prst="rect">
+            <a:avLst/>
+          </a:prstGeom>
+          <a:solidFill>
+            <a:srgbClr val="0E5E6F"/>
+          </a:solidFill>
+          <a:ln/>
+        </p:spPr>
+      </p:sp>
+      <p:sp>
+        <p:nvSpPr>
+          <p:cNvPr id="23" name="Shape 21"/>
+          <p:cNvSpPr/>
+          <p:nvPr/>
+        </p:nvSpPr>
+        <p:spPr>
+          <a:xfrm>
+            <a:off x="6095848" y="6748272"/>
+            <a:ext cx="304792" cy="109728"/>
+          </a:xfrm>
+          <a:prstGeom prst="rect">
+            <a:avLst/>
+          </a:prstGeom>
+          <a:solidFill>
+            <a:srgbClr val="8B1E3F"/>
+          </a:solidFill>
+          <a:ln/>
+        </p:spPr>
+      </p:sp>
+      <p:sp>
+        <p:nvSpPr>
+          <p:cNvPr id="24" name="Shape 22"/>
+          <p:cNvSpPr/>
+          <p:nvPr/>
+        </p:nvSpPr>
+        <p:spPr>
+          <a:xfrm>
+            <a:off x="6400640" y="6748272"/>
+            <a:ext cx="304792" cy="109728"/>
+          </a:xfrm>
+          <a:prstGeom prst="rect">
+            <a:avLst/>
+          </a:prstGeom>
+          <a:solidFill>
+            <a:srgbClr val="0E5E6F"/>
+          </a:solidFill>
+          <a:ln/>
+        </p:spPr>
+      </p:sp>
+      <p:sp>
+        <p:nvSpPr>
+          <p:cNvPr id="25" name="Shape 23"/>
+          <p:cNvSpPr/>
+          <p:nvPr/>
+        </p:nvSpPr>
+        <p:spPr>
+          <a:xfrm>
+            <a:off x="6705432" y="6748272"/>
+            <a:ext cx="304792" cy="109728"/>
+          </a:xfrm>
+          <a:prstGeom prst="rect">
+            <a:avLst/>
+          </a:prstGeom>
+          <a:solidFill>
+            <a:srgbClr val="E0A526"/>
+          </a:solidFill>
+          <a:ln/>
+        </p:spPr>
+      </p:sp>
+      <p:sp>
+        <p:nvSpPr>
+          <p:cNvPr id="26" name="Shape 24"/>
+          <p:cNvSpPr/>
+          <p:nvPr/>
+        </p:nvSpPr>
+        <p:spPr>
+          <a:xfrm>
+            <a:off x="7010225" y="6748272"/>
+            <a:ext cx="304792" cy="109728"/>
+          </a:xfrm>
+          <a:prstGeom prst="rect">
+            <a:avLst/>
+          </a:prstGeom>
+          <a:solidFill>
+            <a:srgbClr val="0E5E6F"/>
+          </a:solidFill>
+          <a:ln/>
+        </p:spPr>
+      </p:sp>
+      <p:sp>
+        <p:nvSpPr>
+          <p:cNvPr id="27" name="Shape 25"/>
+          <p:cNvSpPr/>
+          <p:nvPr/>
+        </p:nvSpPr>
+        <p:spPr>
+          <a:xfrm>
+            <a:off x="7315017" y="6748272"/>
+            <a:ext cx="304792" cy="109728"/>
+          </a:xfrm>
+          <a:prstGeom prst="rect">
+            <a:avLst/>
+          </a:prstGeom>
+          <a:solidFill>
+            <a:srgbClr val="8B1E3F"/>
+          </a:solidFill>
+          <a:ln/>
+        </p:spPr>
+      </p:sp>
+      <p:sp>
+        <p:nvSpPr>
+          <p:cNvPr id="28" name="Shape 26"/>
+          <p:cNvSpPr/>
+          <p:nvPr/>
+        </p:nvSpPr>
+        <p:spPr>
+          <a:xfrm>
+            <a:off x="7619809" y="6748272"/>
+            <a:ext cx="304792" cy="109728"/>
+          </a:xfrm>
+          <a:prstGeom prst="rect">
+            <a:avLst/>
+          </a:prstGeom>
+          <a:solidFill>
+            <a:srgbClr val="0E5E6F"/>
+          </a:solidFill>
+          <a:ln/>
+        </p:spPr>
+      </p:sp>
+      <p:sp>
+        <p:nvSpPr>
+          <p:cNvPr id="29" name="Shape 27"/>
+          <p:cNvSpPr/>
+          <p:nvPr/>
+        </p:nvSpPr>
+        <p:spPr>
+          <a:xfrm>
+            <a:off x="7924602" y="6748272"/>
+            <a:ext cx="304792" cy="109728"/>
+          </a:xfrm>
+          <a:prstGeom prst="rect">
+            <a:avLst/>
+          </a:prstGeom>
+          <a:solidFill>
+            <a:srgbClr val="E0A526"/>
+          </a:solidFill>
+          <a:ln/>
+        </p:spPr>
+      </p:sp>
+      <p:sp>
+        <p:nvSpPr>
+          <p:cNvPr id="30" name="Shape 28"/>
+          <p:cNvSpPr/>
+          <p:nvPr/>
+        </p:nvSpPr>
+        <p:spPr>
+          <a:xfrm>
+            <a:off x="8229394" y="6748272"/>
+            <a:ext cx="304792" cy="109728"/>
+          </a:xfrm>
+          <a:prstGeom prst="rect">
+            <a:avLst/>
+          </a:prstGeom>
+          <a:solidFill>
+            <a:srgbClr val="0E5E6F"/>
+          </a:solidFill>
+          <a:ln/>
+        </p:spPr>
+      </p:sp>
+      <p:sp>
+        <p:nvSpPr>
+          <p:cNvPr id="31" name="Shape 29"/>
+          <p:cNvSpPr/>
+          <p:nvPr/>
+        </p:nvSpPr>
+        <p:spPr>
+          <a:xfrm>
+            <a:off x="8534187" y="6748272"/>
+            <a:ext cx="304792" cy="109728"/>
+          </a:xfrm>
+          <a:prstGeom prst="rect">
+            <a:avLst/>
+          </a:prstGeom>
+          <a:solidFill>
+            <a:srgbClr val="8B1E3F"/>
+          </a:solidFill>
+          <a:ln/>
+        </p:spPr>
+      </p:sp>
+      <p:sp>
+        <p:nvSpPr>
+          <p:cNvPr id="32" name="Shape 30"/>
+          <p:cNvSpPr/>
+          <p:nvPr/>
+        </p:nvSpPr>
+        <p:spPr>
+          <a:xfrm>
+            <a:off x="8838979" y="6748272"/>
+            <a:ext cx="304792" cy="109728"/>
+          </a:xfrm>
+          <a:prstGeom prst="rect">
+            <a:avLst/>
+          </a:prstGeom>
+          <a:solidFill>
+            <a:srgbClr val="0E5E6F"/>
+          </a:solidFill>
+          <a:ln/>
+        </p:spPr>
+      </p:sp>
+      <p:sp>
+        <p:nvSpPr>
+          <p:cNvPr id="33" name="Shape 31"/>
+          <p:cNvSpPr/>
+          <p:nvPr/>
+        </p:nvSpPr>
+        <p:spPr>
+          <a:xfrm>
+            <a:off x="9143771" y="6748272"/>
+            <a:ext cx="304792" cy="109728"/>
+          </a:xfrm>
+          <a:prstGeom prst="rect">
+            <a:avLst/>
+          </a:prstGeom>
+          <a:solidFill>
+            <a:srgbClr val="E0A526"/>
+          </a:solidFill>
+          <a:ln/>
+        </p:spPr>
+      </p:sp>
+      <p:sp>
+        <p:nvSpPr>
+          <p:cNvPr id="34" name="Shape 32"/>
+          <p:cNvSpPr/>
+          <p:nvPr/>
+        </p:nvSpPr>
+        <p:spPr>
+          <a:xfrm>
+            <a:off x="9448564" y="6748272"/>
+            <a:ext cx="304792" cy="109728"/>
+          </a:xfrm>
+          <a:prstGeom prst="rect">
+            <a:avLst/>
+          </a:prstGeom>
+          <a:solidFill>
+            <a:srgbClr val="0E5E6F"/>
+          </a:solidFill>
+          <a:ln/>
+        </p:spPr>
+      </p:sp>
+      <p:sp>
+        <p:nvSpPr>
+          <p:cNvPr id="35" name="Shape 33"/>
+          <p:cNvSpPr/>
+          <p:nvPr/>
+        </p:nvSpPr>
+        <p:spPr>
+          <a:xfrm>
+            <a:off x="9753356" y="6748272"/>
+            <a:ext cx="304792" cy="109728"/>
+          </a:xfrm>
+          <a:prstGeom prst="rect">
+            <a:avLst/>
+          </a:prstGeom>
+          <a:solidFill>
+            <a:srgbClr val="8B1E3F"/>
+          </a:solidFill>
+          <a:ln/>
+        </p:spPr>
+      </p:sp>
+      <p:sp>
+        <p:nvSpPr>
+          <p:cNvPr id="36" name="Shape 34"/>
+          <p:cNvSpPr/>
+          <p:nvPr/>
+        </p:nvSpPr>
+        <p:spPr>
+          <a:xfrm>
+            <a:off x="10058149" y="6748272"/>
+            <a:ext cx="304792" cy="109728"/>
+          </a:xfrm>
+          <a:prstGeom prst="rect">
+            <a:avLst/>
+          </a:prstGeom>
+          <a:solidFill>
+            <a:srgbClr val="0E5E6F"/>
+          </a:solidFill>
+          <a:ln/>
+        </p:spPr>
+      </p:sp>
+      <p:sp>
+        <p:nvSpPr>
+          <p:cNvPr id="37" name="Shape 35"/>
+          <p:cNvSpPr/>
+          <p:nvPr/>
+        </p:nvSpPr>
+        <p:spPr>
+          <a:xfrm>
+            <a:off x="10362941" y="6748272"/>
+            <a:ext cx="304792" cy="109728"/>
+          </a:xfrm>
+          <a:prstGeom prst="rect">
+            <a:avLst/>
+          </a:prstGeom>
+          <a:solidFill>
+            <a:srgbClr val="E0A526"/>
+          </a:solidFill>
+          <a:ln/>
+        </p:spPr>
+      </p:sp>
+      <p:sp>
+        <p:nvSpPr>
+          <p:cNvPr id="38" name="Shape 36"/>
+          <p:cNvSpPr/>
+          <p:nvPr/>
+        </p:nvSpPr>
+        <p:spPr>
+          <a:xfrm>
+            <a:off x="10667733" y="6748272"/>
+            <a:ext cx="304792" cy="109728"/>
+          </a:xfrm>
+          <a:prstGeom prst="rect">
+            <a:avLst/>
+          </a:prstGeom>
+          <a:solidFill>
+            <a:srgbClr val="0E5E6F"/>
+          </a:solidFill>
+          <a:ln/>
+        </p:spPr>
+      </p:sp>
+      <p:sp>
+        <p:nvSpPr>
+          <p:cNvPr id="39" name="Shape 37"/>
+          <p:cNvSpPr/>
+          <p:nvPr/>
+        </p:nvSpPr>
+        <p:spPr>
+          <a:xfrm>
+            <a:off x="10972526" y="6748272"/>
+            <a:ext cx="304792" cy="109728"/>
+          </a:xfrm>
+          <a:prstGeom prst="rect">
+            <a:avLst/>
+          </a:prstGeom>
+          <a:solidFill>
+            <a:srgbClr val="8B1E3F"/>
+          </a:solidFill>
+          <a:ln/>
+        </p:spPr>
+      </p:sp>
+      <p:sp>
+        <p:nvSpPr>
+          <p:cNvPr id="40" name="Shape 38"/>
+          <p:cNvSpPr/>
+          <p:nvPr/>
+        </p:nvSpPr>
+        <p:spPr>
+          <a:xfrm>
+            <a:off x="11277318" y="6748272"/>
+            <a:ext cx="304792" cy="109728"/>
+          </a:xfrm>
+          <a:prstGeom prst="rect">
+            <a:avLst/>
+          </a:prstGeom>
+          <a:solidFill>
+            <a:srgbClr val="0E5E6F"/>
+          </a:solidFill>
+          <a:ln/>
+        </p:spPr>
+      </p:sp>
+      <p:sp>
+        <p:nvSpPr>
+          <p:cNvPr id="41" name="Shape 39"/>
+          <p:cNvSpPr/>
+          <p:nvPr/>
+        </p:nvSpPr>
+        <p:spPr>
+          <a:xfrm>
+            <a:off x="11582110" y="6748272"/>
+            <a:ext cx="304792" cy="109728"/>
+          </a:xfrm>
+          <a:prstGeom prst="rect">
+            <a:avLst/>
+          </a:prstGeom>
+          <a:solidFill>
+            <a:srgbClr val="E0A526"/>
+          </a:solidFill>
+          <a:ln/>
+        </p:spPr>
+      </p:sp>
+      <p:sp>
+        <p:nvSpPr>
+          <p:cNvPr id="42" name="Shape 40"/>
+          <p:cNvSpPr/>
+          <p:nvPr/>
+        </p:nvSpPr>
+        <p:spPr>
+          <a:xfrm>
+            <a:off x="11886903" y="6748272"/>
+            <a:ext cx="304792" cy="109728"/>
+          </a:xfrm>
+          <a:prstGeom prst="rect">
+            <a:avLst/>
+          </a:prstGeom>
+          <a:solidFill>
+            <a:srgbClr val="0E5E6F"/>
+          </a:solidFill>
+          <a:ln/>
+        </p:spPr>
+      </p:sp>
+      <p:sp>
+        <p:nvSpPr>
+          <p:cNvPr id="43" name="Text 41"/>
+          <p:cNvSpPr txBox="1"/>
+          <p:nvPr/>
+        </p:nvSpPr>
+        <p:spPr>
+          <a:xfrm>
+            <a:off x="548640" y="1463040"/>
+            <a:ext cx="5394960" cy="4480560"/>
+          </a:xfrm>
+          <a:prstGeom prst="rect">
+            <a:avLst/>
+          </a:prstGeom>
+          <a:noFill/>
+          <a:ln/>
+        </p:spPr>
+        <p:txBody>
+          <a:bodyPr wrap="square" lIns="0" tIns="0" rIns="0" bIns="0" rtlCol="0" anchor="t"/>
+          <a:lstStyle/>
+          <a:p>
+            <a:pPr indent="0" marL="0">
+              <a:spcAft>
+                <a:spcPts val="1200"/>
+              </a:spcAft>
+              <a:buNone/>
+            </a:pPr>
+            <a:r>
+              <a:rPr lang="en-US" sz="1700" dirty="0">
+                <a:solidFill>
+                  <a:srgbClr val="1C2833"/>
+                </a:solidFill>
+                <a:latin typeface="Calibri" pitchFamily="34" charset="0"/>
+                <a:ea typeface="Calibri" pitchFamily="34" charset="-122"/>
+                <a:cs typeface="Calibri" pitchFamily="34" charset="-120"/>
+              </a:rPr>
+              <a:t>Overview   3–5</a:t>
+            </a:r>
+            <a:endParaRPr lang="en-US" sz="1700" dirty="0"/>
+          </a:p>
+          <a:p>
+            <a:pPr indent="0" marL="0">
+              <a:spcAft>
+                <a:spcPts val="1200"/>
+              </a:spcAft>
+              <a:buNone/>
+            </a:pPr>
+            <a:r>
+              <a:rPr lang="en-US" sz="1700" dirty="0">
+                <a:solidFill>
+                  <a:srgbClr val="1C2833"/>
+                </a:solidFill>
+                <a:latin typeface="Calibri" pitchFamily="34" charset="0"/>
+                <a:ea typeface="Calibri" pitchFamily="34" charset="-122"/>
+                <a:cs typeface="Calibri" pitchFamily="34" charset="-120"/>
+              </a:rPr>
+              <a:t>Hyderabad and Telangana   6–6</a:t>
+            </a:r>
+            <a:endParaRPr lang="en-US" sz="1700" dirty="0"/>
+          </a:p>
+          <a:p>
+            <a:pPr indent="0" marL="0">
+              <a:spcAft>
+                <a:spcPts val="1200"/>
+              </a:spcAft>
+              <a:buNone/>
+            </a:pPr>
+            <a:r>
+              <a:rPr lang="en-US" sz="1700" dirty="0">
+                <a:solidFill>
+                  <a:srgbClr val="1C2833"/>
+                </a:solidFill>
+                <a:latin typeface="Calibri" pitchFamily="34" charset="0"/>
+                <a:ea typeface="Calibri" pitchFamily="34" charset="-122"/>
+                <a:cs typeface="Calibri" pitchFamily="34" charset="-120"/>
+              </a:rPr>
+              <a:t>Age, sex, religion, 2002   7–10</a:t>
+            </a:r>
+            <a:endParaRPr lang="en-US" sz="1700" dirty="0"/>
+          </a:p>
+          <a:p>
+            <a:pPr indent="0" marL="0">
+              <a:spcAft>
+                <a:spcPts val="1200"/>
+              </a:spcAft>
+              <a:buNone/>
+            </a:pPr>
+            <a:r>
+              <a:rPr lang="en-US" sz="1700" dirty="0">
+                <a:solidFill>
+                  <a:srgbClr val="1C2833"/>
+                </a:solidFill>
+                <a:latin typeface="Calibri" pitchFamily="34" charset="0"/>
+                <a:ea typeface="Calibri" pitchFamily="34" charset="-122"/>
+                <a:cs typeface="Calibri" pitchFamily="34" charset="-120"/>
+              </a:rPr>
+              <a:t>Polling parts   11–13</a:t>
+            </a:r>
+            <a:endParaRPr lang="en-US" sz="1700" dirty="0"/>
+          </a:p>
+          <a:p>
+            <a:pPr indent="0" marL="0">
+              <a:spcAft>
+                <a:spcPts val="1200"/>
+              </a:spcAft>
+              <a:buNone/>
+            </a:pPr>
+            <a:r>
+              <a:rPr lang="en-US" sz="1700" dirty="0">
+                <a:solidFill>
+                  <a:srgbClr val="1C2833"/>
+                </a:solidFill>
+                <a:latin typeface="Calibri" pitchFamily="34" charset="0"/>
+                <a:ea typeface="Calibri" pitchFamily="34" charset="-122"/>
+                <a:cs typeface="Calibri" pitchFamily="34" charset="-120"/>
+              </a:rPr>
+              <a:t>Hearings   14–15</a:t>
+            </a:r>
+            <a:endParaRPr lang="en-US" sz="1700" dirty="0"/>
+          </a:p>
+        </p:txBody>
+      </p:sp>
+      <p:sp>
+        <p:nvSpPr>
+          <p:cNvPr id="44" name="Text 42"/>
+          <p:cNvSpPr txBox="1"/>
+          <p:nvPr/>
+        </p:nvSpPr>
+        <p:spPr>
+          <a:xfrm>
+            <a:off x="6217920" y="1463040"/>
+            <a:ext cx="5394960" cy="4480560"/>
+          </a:xfrm>
+          <a:prstGeom prst="rect">
+            <a:avLst/>
+          </a:prstGeom>
+          <a:noFill/>
+          <a:ln/>
+        </p:spPr>
+        <p:txBody>
+          <a:bodyPr wrap="square" lIns="0" tIns="0" rIns="0" bIns="0" rtlCol="0" anchor="t"/>
+          <a:lstStyle/>
+          <a:p>
+            <a:pPr indent="0" marL="0">
+              <a:spcAft>
+                <a:spcPts val="1200"/>
+              </a:spcAft>
+              <a:buNone/>
+            </a:pPr>
+            <a:r>
+              <a:rPr lang="en-US" sz="1700" dirty="0">
+                <a:solidFill>
+                  <a:srgbClr val="1C2833"/>
+                </a:solidFill>
+                <a:latin typeface="Calibri" pitchFamily="34" charset="0"/>
+                <a:ea typeface="Calibri" pitchFamily="34" charset="-122"/>
+                <a:cs typeface="Calibri" pitchFamily="34" charset="-120"/>
+              </a:rPr>
+              <a:t>Questions put to this analysis   16–17</a:t>
+            </a:r>
+            <a:endParaRPr lang="en-US" sz="1700" dirty="0"/>
+          </a:p>
+          <a:p>
+            <a:pPr indent="0" marL="0">
+              <a:spcAft>
+                <a:spcPts val="1200"/>
+              </a:spcAft>
+              <a:buNone/>
+            </a:pPr>
+            <a:r>
+              <a:rPr lang="en-US" sz="1700" dirty="0">
+                <a:solidFill>
+                  <a:srgbClr val="1C2833"/>
+                </a:solidFill>
+                <a:latin typeface="Calibri" pitchFamily="34" charset="0"/>
+                <a:ea typeface="Calibri" pitchFamily="34" charset="-122"/>
+                <a:cs typeface="Calibri" pitchFamily="34" charset="-120"/>
+              </a:rPr>
+              <a:t>Limits   18–18</a:t>
+            </a:r>
+            <a:endParaRPr lang="en-US" sz="1700" dirty="0"/>
+          </a:p>
+          <a:p>
+            <a:pPr indent="0" marL="0">
+              <a:spcAft>
+                <a:spcPts val="1200"/>
+              </a:spcAft>
+              <a:buNone/>
+            </a:pPr>
+            <a:r>
+              <a:rPr lang="en-US" sz="1700" dirty="0">
+                <a:solidFill>
+                  <a:srgbClr val="1C2833"/>
+                </a:solidFill>
+                <a:latin typeface="Calibri" pitchFamily="34" charset="0"/>
+                <a:ea typeface="Calibri" pitchFamily="34" charset="-122"/>
+                <a:cs typeface="Calibri" pitchFamily="34" charset="-120"/>
+              </a:rPr>
+              <a:t>What the Election Commission should do   19–19</a:t>
+            </a:r>
+            <a:endParaRPr lang="en-US" sz="1700" dirty="0"/>
+          </a:p>
+          <a:p>
+            <a:pPr indent="0" marL="0">
+              <a:spcAft>
+                <a:spcPts val="1200"/>
+              </a:spcAft>
+              <a:buNone/>
+            </a:pPr>
+            <a:r>
+              <a:rPr lang="en-US" sz="1700" dirty="0">
+                <a:solidFill>
+                  <a:srgbClr val="1C2833"/>
+                </a:solidFill>
+                <a:latin typeface="Calibri" pitchFamily="34" charset="0"/>
+                <a:ea typeface="Calibri" pitchFamily="34" charset="-122"/>
+                <a:cs typeface="Calibri" pitchFamily="34" charset="-120"/>
+              </a:rPr>
+              <a:t>Method   20–21</a:t>
+            </a:r>
+            <a:endParaRPr lang="en-US" sz="1700" dirty="0"/>
+          </a:p>
+        </p:txBody>
+      </p:sp>
+    </p:spTree>
+  </p:cSld>
+  <p:clrMapOvr>
+    <a:masterClrMapping/>
+  </p:clrMapOvr>
+</p:sld>
+</file>
+
+<file path=ppt/slides/slide20.xml><?xml version="1.0" encoding="utf-8"?>
+<p:sld xmlns:a="http://schemas.openxmlformats.org/drawingml/2006/main" xmlns:r="http://schemas.openxmlformats.org/officeDocument/2006/relationships" xmlns:p="http://schemas.openxmlformats.org/presentationml/2006/main">
+  <p:cSld name="Slide 20">
     <p:spTree>
       <p:nvGrpSpPr>
         <p:cNvPr id="1" name=""/>
@@ -27535,7 +30293,7 @@
                 <a:ea typeface="Calibri" pitchFamily="34" charset="-122"/>
                 <a:cs typeface="Calibri" pitchFamily="34" charset="-120"/>
               </a:rPr>
-              <a:t>19</a:t>
+              <a:t>20</a:t>
             </a:r>
             <a:endParaRPr lang="en-US" sz="900" dirty="0"/>
           </a:p>
@@ -28478,1077 +31236,9 @@
 </p:sld>
 </file>
 
-<file path=ppt/slides/slide2.xml><?xml version="1.0" encoding="utf-8"?>
+<file path=ppt/slides/slide21.xml><?xml version="1.0" encoding="utf-8"?>
 <p:sld xmlns:a="http://schemas.openxmlformats.org/drawingml/2006/main" xmlns:r="http://schemas.openxmlformats.org/officeDocument/2006/relationships" xmlns:p="http://schemas.openxmlformats.org/presentationml/2006/main">
-  <p:cSld name="Slide 2">
-    <p:spTree>
-      <p:nvGrpSpPr>
-        <p:cNvPr id="1" name=""/>
-        <p:cNvGrpSpPr/>
-        <p:nvPr/>
-      </p:nvGrpSpPr>
-      <p:grpSpPr>
-        <a:xfrm>
-          <a:off x="0" y="0"/>
-          <a:ext cx="0" cy="0"/>
-          <a:chOff x="0" y="0"/>
-          <a:chExt cx="0" cy="0"/>
-        </a:xfrm>
-      </p:grpSpPr>
-      <p:sp>
-        <p:nvSpPr>
-          <p:cNvPr id="2" name="Text 0"/>
-          <p:cNvSpPr txBox="1"/>
-          <p:nvPr/>
-        </p:nvSpPr>
-        <p:spPr>
-          <a:xfrm>
-            <a:off x="548640" y="457200"/>
-            <a:ext cx="11094415" cy="731520"/>
-          </a:xfrm>
-          <a:prstGeom prst="rect">
-            <a:avLst/>
-          </a:prstGeom>
-          <a:noFill/>
-          <a:ln/>
-        </p:spPr>
-        <p:txBody>
-          <a:bodyPr wrap="square" lIns="0" tIns="0" rIns="0" bIns="0" rtlCol="0" anchor="ctr"/>
-          <a:lstStyle/>
-          <a:p>
-            <a:pPr indent="0" marL="0">
-              <a:buNone/>
-            </a:pPr>
-            <a:r>
-              <a:rPr lang="en-US" sz="3000" b="1" dirty="0">
-                <a:solidFill>
-                  <a:srgbClr val="6E1832"/>
-                </a:solidFill>
-                <a:latin typeface="Cambria" pitchFamily="34" charset="0"/>
-                <a:ea typeface="Cambria" pitchFamily="34" charset="-122"/>
-                <a:cs typeface="Cambria" pitchFamily="34" charset="-120"/>
-              </a:rPr>
-              <a:t>Contents</a:t>
-            </a:r>
-            <a:endParaRPr lang="en-US" sz="3000" dirty="0"/>
-          </a:p>
-        </p:txBody>
-      </p:sp>
-      <p:sp>
-        <p:nvSpPr>
-          <p:cNvPr id="3" name="Shape 1"/>
-          <p:cNvSpPr/>
-          <p:nvPr/>
-        </p:nvSpPr>
-        <p:spPr>
-          <a:xfrm>
-            <a:off x="0" y="6748272"/>
-            <a:ext cx="304792" cy="109728"/>
-          </a:xfrm>
-          <a:prstGeom prst="rect">
-            <a:avLst/>
-          </a:prstGeom>
-          <a:solidFill>
-            <a:srgbClr val="8B1E3F"/>
-          </a:solidFill>
-          <a:ln/>
-        </p:spPr>
-      </p:sp>
-      <p:sp>
-        <p:nvSpPr>
-          <p:cNvPr id="4" name="Shape 2"/>
-          <p:cNvSpPr/>
-          <p:nvPr/>
-        </p:nvSpPr>
-        <p:spPr>
-          <a:xfrm>
-            <a:off x="304792" y="6748272"/>
-            <a:ext cx="304792" cy="109728"/>
-          </a:xfrm>
-          <a:prstGeom prst="rect">
-            <a:avLst/>
-          </a:prstGeom>
-          <a:solidFill>
-            <a:srgbClr val="0E5E6F"/>
-          </a:solidFill>
-          <a:ln/>
-        </p:spPr>
-      </p:sp>
-      <p:sp>
-        <p:nvSpPr>
-          <p:cNvPr id="5" name="Shape 3"/>
-          <p:cNvSpPr/>
-          <p:nvPr/>
-        </p:nvSpPr>
-        <p:spPr>
-          <a:xfrm>
-            <a:off x="609585" y="6748272"/>
-            <a:ext cx="304792" cy="109728"/>
-          </a:xfrm>
-          <a:prstGeom prst="rect">
-            <a:avLst/>
-          </a:prstGeom>
-          <a:solidFill>
-            <a:srgbClr val="E0A526"/>
-          </a:solidFill>
-          <a:ln/>
-        </p:spPr>
-      </p:sp>
-      <p:sp>
-        <p:nvSpPr>
-          <p:cNvPr id="6" name="Shape 4"/>
-          <p:cNvSpPr/>
-          <p:nvPr/>
-        </p:nvSpPr>
-        <p:spPr>
-          <a:xfrm>
-            <a:off x="914377" y="6748272"/>
-            <a:ext cx="304792" cy="109728"/>
-          </a:xfrm>
-          <a:prstGeom prst="rect">
-            <a:avLst/>
-          </a:prstGeom>
-          <a:solidFill>
-            <a:srgbClr val="0E5E6F"/>
-          </a:solidFill>
-          <a:ln/>
-        </p:spPr>
-      </p:sp>
-      <p:sp>
-        <p:nvSpPr>
-          <p:cNvPr id="7" name="Shape 5"/>
-          <p:cNvSpPr/>
-          <p:nvPr/>
-        </p:nvSpPr>
-        <p:spPr>
-          <a:xfrm>
-            <a:off x="1219170" y="6748272"/>
-            <a:ext cx="304792" cy="109728"/>
-          </a:xfrm>
-          <a:prstGeom prst="rect">
-            <a:avLst/>
-          </a:prstGeom>
-          <a:solidFill>
-            <a:srgbClr val="8B1E3F"/>
-          </a:solidFill>
-          <a:ln/>
-        </p:spPr>
-      </p:sp>
-      <p:sp>
-        <p:nvSpPr>
-          <p:cNvPr id="8" name="Shape 6"/>
-          <p:cNvSpPr/>
-          <p:nvPr/>
-        </p:nvSpPr>
-        <p:spPr>
-          <a:xfrm>
-            <a:off x="1523962" y="6748272"/>
-            <a:ext cx="304792" cy="109728"/>
-          </a:xfrm>
-          <a:prstGeom prst="rect">
-            <a:avLst/>
-          </a:prstGeom>
-          <a:solidFill>
-            <a:srgbClr val="0E5E6F"/>
-          </a:solidFill>
-          <a:ln/>
-        </p:spPr>
-      </p:sp>
-      <p:sp>
-        <p:nvSpPr>
-          <p:cNvPr id="9" name="Shape 7"/>
-          <p:cNvSpPr/>
-          <p:nvPr/>
-        </p:nvSpPr>
-        <p:spPr>
-          <a:xfrm>
-            <a:off x="1828754" y="6748272"/>
-            <a:ext cx="304792" cy="109728"/>
-          </a:xfrm>
-          <a:prstGeom prst="rect">
-            <a:avLst/>
-          </a:prstGeom>
-          <a:solidFill>
-            <a:srgbClr val="E0A526"/>
-          </a:solidFill>
-          <a:ln/>
-        </p:spPr>
-      </p:sp>
-      <p:sp>
-        <p:nvSpPr>
-          <p:cNvPr id="10" name="Shape 8"/>
-          <p:cNvSpPr/>
-          <p:nvPr/>
-        </p:nvSpPr>
-        <p:spPr>
-          <a:xfrm>
-            <a:off x="2133547" y="6748272"/>
-            <a:ext cx="304792" cy="109728"/>
-          </a:xfrm>
-          <a:prstGeom prst="rect">
-            <a:avLst/>
-          </a:prstGeom>
-          <a:solidFill>
-            <a:srgbClr val="0E5E6F"/>
-          </a:solidFill>
-          <a:ln/>
-        </p:spPr>
-      </p:sp>
-      <p:sp>
-        <p:nvSpPr>
-          <p:cNvPr id="11" name="Shape 9"/>
-          <p:cNvSpPr/>
-          <p:nvPr/>
-        </p:nvSpPr>
-        <p:spPr>
-          <a:xfrm>
-            <a:off x="2438339" y="6748272"/>
-            <a:ext cx="304792" cy="109728"/>
-          </a:xfrm>
-          <a:prstGeom prst="rect">
-            <a:avLst/>
-          </a:prstGeom>
-          <a:solidFill>
-            <a:srgbClr val="8B1E3F"/>
-          </a:solidFill>
-          <a:ln/>
-        </p:spPr>
-      </p:sp>
-      <p:sp>
-        <p:nvSpPr>
-          <p:cNvPr id="12" name="Shape 10"/>
-          <p:cNvSpPr/>
-          <p:nvPr/>
-        </p:nvSpPr>
-        <p:spPr>
-          <a:xfrm>
-            <a:off x="2743131" y="6748272"/>
-            <a:ext cx="304792" cy="109728"/>
-          </a:xfrm>
-          <a:prstGeom prst="rect">
-            <a:avLst/>
-          </a:prstGeom>
-          <a:solidFill>
-            <a:srgbClr val="0E5E6F"/>
-          </a:solidFill>
-          <a:ln/>
-        </p:spPr>
-      </p:sp>
-      <p:sp>
-        <p:nvSpPr>
-          <p:cNvPr id="13" name="Shape 11"/>
-          <p:cNvSpPr/>
-          <p:nvPr/>
-        </p:nvSpPr>
-        <p:spPr>
-          <a:xfrm>
-            <a:off x="3047924" y="6748272"/>
-            <a:ext cx="304792" cy="109728"/>
-          </a:xfrm>
-          <a:prstGeom prst="rect">
-            <a:avLst/>
-          </a:prstGeom>
-          <a:solidFill>
-            <a:srgbClr val="E0A526"/>
-          </a:solidFill>
-          <a:ln/>
-        </p:spPr>
-      </p:sp>
-      <p:sp>
-        <p:nvSpPr>
-          <p:cNvPr id="14" name="Shape 12"/>
-          <p:cNvSpPr/>
-          <p:nvPr/>
-        </p:nvSpPr>
-        <p:spPr>
-          <a:xfrm>
-            <a:off x="3352716" y="6748272"/>
-            <a:ext cx="304792" cy="109728"/>
-          </a:xfrm>
-          <a:prstGeom prst="rect">
-            <a:avLst/>
-          </a:prstGeom>
-          <a:solidFill>
-            <a:srgbClr val="0E5E6F"/>
-          </a:solidFill>
-          <a:ln/>
-        </p:spPr>
-      </p:sp>
-      <p:sp>
-        <p:nvSpPr>
-          <p:cNvPr id="15" name="Shape 13"/>
-          <p:cNvSpPr/>
-          <p:nvPr/>
-        </p:nvSpPr>
-        <p:spPr>
-          <a:xfrm>
-            <a:off x="3657509" y="6748272"/>
-            <a:ext cx="304792" cy="109728"/>
-          </a:xfrm>
-          <a:prstGeom prst="rect">
-            <a:avLst/>
-          </a:prstGeom>
-          <a:solidFill>
-            <a:srgbClr val="8B1E3F"/>
-          </a:solidFill>
-          <a:ln/>
-        </p:spPr>
-      </p:sp>
-      <p:sp>
-        <p:nvSpPr>
-          <p:cNvPr id="16" name="Shape 14"/>
-          <p:cNvSpPr/>
-          <p:nvPr/>
-        </p:nvSpPr>
-        <p:spPr>
-          <a:xfrm>
-            <a:off x="3962301" y="6748272"/>
-            <a:ext cx="304792" cy="109728"/>
-          </a:xfrm>
-          <a:prstGeom prst="rect">
-            <a:avLst/>
-          </a:prstGeom>
-          <a:solidFill>
-            <a:srgbClr val="0E5E6F"/>
-          </a:solidFill>
-          <a:ln/>
-        </p:spPr>
-      </p:sp>
-      <p:sp>
-        <p:nvSpPr>
-          <p:cNvPr id="17" name="Shape 15"/>
-          <p:cNvSpPr/>
-          <p:nvPr/>
-        </p:nvSpPr>
-        <p:spPr>
-          <a:xfrm>
-            <a:off x="4267093" y="6748272"/>
-            <a:ext cx="304792" cy="109728"/>
-          </a:xfrm>
-          <a:prstGeom prst="rect">
-            <a:avLst/>
-          </a:prstGeom>
-          <a:solidFill>
-            <a:srgbClr val="E0A526"/>
-          </a:solidFill>
-          <a:ln/>
-        </p:spPr>
-      </p:sp>
-      <p:sp>
-        <p:nvSpPr>
-          <p:cNvPr id="18" name="Shape 16"/>
-          <p:cNvSpPr/>
-          <p:nvPr/>
-        </p:nvSpPr>
-        <p:spPr>
-          <a:xfrm>
-            <a:off x="4571886" y="6748272"/>
-            <a:ext cx="304792" cy="109728"/>
-          </a:xfrm>
-          <a:prstGeom prst="rect">
-            <a:avLst/>
-          </a:prstGeom>
-          <a:solidFill>
-            <a:srgbClr val="0E5E6F"/>
-          </a:solidFill>
-          <a:ln/>
-        </p:spPr>
-      </p:sp>
-      <p:sp>
-        <p:nvSpPr>
-          <p:cNvPr id="19" name="Shape 17"/>
-          <p:cNvSpPr/>
-          <p:nvPr/>
-        </p:nvSpPr>
-        <p:spPr>
-          <a:xfrm>
-            <a:off x="4876678" y="6748272"/>
-            <a:ext cx="304792" cy="109728"/>
-          </a:xfrm>
-          <a:prstGeom prst="rect">
-            <a:avLst/>
-          </a:prstGeom>
-          <a:solidFill>
-            <a:srgbClr val="8B1E3F"/>
-          </a:solidFill>
-          <a:ln/>
-        </p:spPr>
-      </p:sp>
-      <p:sp>
-        <p:nvSpPr>
-          <p:cNvPr id="20" name="Shape 18"/>
-          <p:cNvSpPr/>
-          <p:nvPr/>
-        </p:nvSpPr>
-        <p:spPr>
-          <a:xfrm>
-            <a:off x="5181470" y="6748272"/>
-            <a:ext cx="304792" cy="109728"/>
-          </a:xfrm>
-          <a:prstGeom prst="rect">
-            <a:avLst/>
-          </a:prstGeom>
-          <a:solidFill>
-            <a:srgbClr val="0E5E6F"/>
-          </a:solidFill>
-          <a:ln/>
-        </p:spPr>
-      </p:sp>
-      <p:sp>
-        <p:nvSpPr>
-          <p:cNvPr id="21" name="Shape 19"/>
-          <p:cNvSpPr/>
-          <p:nvPr/>
-        </p:nvSpPr>
-        <p:spPr>
-          <a:xfrm>
-            <a:off x="5486263" y="6748272"/>
-            <a:ext cx="304792" cy="109728"/>
-          </a:xfrm>
-          <a:prstGeom prst="rect">
-            <a:avLst/>
-          </a:prstGeom>
-          <a:solidFill>
-            <a:srgbClr val="E0A526"/>
-          </a:solidFill>
-          <a:ln/>
-        </p:spPr>
-      </p:sp>
-      <p:sp>
-        <p:nvSpPr>
-          <p:cNvPr id="22" name="Shape 20"/>
-          <p:cNvSpPr/>
-          <p:nvPr/>
-        </p:nvSpPr>
-        <p:spPr>
-          <a:xfrm>
-            <a:off x="5791055" y="6748272"/>
-            <a:ext cx="304792" cy="109728"/>
-          </a:xfrm>
-          <a:prstGeom prst="rect">
-            <a:avLst/>
-          </a:prstGeom>
-          <a:solidFill>
-            <a:srgbClr val="0E5E6F"/>
-          </a:solidFill>
-          <a:ln/>
-        </p:spPr>
-      </p:sp>
-      <p:sp>
-        <p:nvSpPr>
-          <p:cNvPr id="23" name="Shape 21"/>
-          <p:cNvSpPr/>
-          <p:nvPr/>
-        </p:nvSpPr>
-        <p:spPr>
-          <a:xfrm>
-            <a:off x="6095848" y="6748272"/>
-            <a:ext cx="304792" cy="109728"/>
-          </a:xfrm>
-          <a:prstGeom prst="rect">
-            <a:avLst/>
-          </a:prstGeom>
-          <a:solidFill>
-            <a:srgbClr val="8B1E3F"/>
-          </a:solidFill>
-          <a:ln/>
-        </p:spPr>
-      </p:sp>
-      <p:sp>
-        <p:nvSpPr>
-          <p:cNvPr id="24" name="Shape 22"/>
-          <p:cNvSpPr/>
-          <p:nvPr/>
-        </p:nvSpPr>
-        <p:spPr>
-          <a:xfrm>
-            <a:off x="6400640" y="6748272"/>
-            <a:ext cx="304792" cy="109728"/>
-          </a:xfrm>
-          <a:prstGeom prst="rect">
-            <a:avLst/>
-          </a:prstGeom>
-          <a:solidFill>
-            <a:srgbClr val="0E5E6F"/>
-          </a:solidFill>
-          <a:ln/>
-        </p:spPr>
-      </p:sp>
-      <p:sp>
-        <p:nvSpPr>
-          <p:cNvPr id="25" name="Shape 23"/>
-          <p:cNvSpPr/>
-          <p:nvPr/>
-        </p:nvSpPr>
-        <p:spPr>
-          <a:xfrm>
-            <a:off x="6705432" y="6748272"/>
-            <a:ext cx="304792" cy="109728"/>
-          </a:xfrm>
-          <a:prstGeom prst="rect">
-            <a:avLst/>
-          </a:prstGeom>
-          <a:solidFill>
-            <a:srgbClr val="E0A526"/>
-          </a:solidFill>
-          <a:ln/>
-        </p:spPr>
-      </p:sp>
-      <p:sp>
-        <p:nvSpPr>
-          <p:cNvPr id="26" name="Shape 24"/>
-          <p:cNvSpPr/>
-          <p:nvPr/>
-        </p:nvSpPr>
-        <p:spPr>
-          <a:xfrm>
-            <a:off x="7010225" y="6748272"/>
-            <a:ext cx="304792" cy="109728"/>
-          </a:xfrm>
-          <a:prstGeom prst="rect">
-            <a:avLst/>
-          </a:prstGeom>
-          <a:solidFill>
-            <a:srgbClr val="0E5E6F"/>
-          </a:solidFill>
-          <a:ln/>
-        </p:spPr>
-      </p:sp>
-      <p:sp>
-        <p:nvSpPr>
-          <p:cNvPr id="27" name="Shape 25"/>
-          <p:cNvSpPr/>
-          <p:nvPr/>
-        </p:nvSpPr>
-        <p:spPr>
-          <a:xfrm>
-            <a:off x="7315017" y="6748272"/>
-            <a:ext cx="304792" cy="109728"/>
-          </a:xfrm>
-          <a:prstGeom prst="rect">
-            <a:avLst/>
-          </a:prstGeom>
-          <a:solidFill>
-            <a:srgbClr val="8B1E3F"/>
-          </a:solidFill>
-          <a:ln/>
-        </p:spPr>
-      </p:sp>
-      <p:sp>
-        <p:nvSpPr>
-          <p:cNvPr id="28" name="Shape 26"/>
-          <p:cNvSpPr/>
-          <p:nvPr/>
-        </p:nvSpPr>
-        <p:spPr>
-          <a:xfrm>
-            <a:off x="7619809" y="6748272"/>
-            <a:ext cx="304792" cy="109728"/>
-          </a:xfrm>
-          <a:prstGeom prst="rect">
-            <a:avLst/>
-          </a:prstGeom>
-          <a:solidFill>
-            <a:srgbClr val="0E5E6F"/>
-          </a:solidFill>
-          <a:ln/>
-        </p:spPr>
-      </p:sp>
-      <p:sp>
-        <p:nvSpPr>
-          <p:cNvPr id="29" name="Shape 27"/>
-          <p:cNvSpPr/>
-          <p:nvPr/>
-        </p:nvSpPr>
-        <p:spPr>
-          <a:xfrm>
-            <a:off x="7924602" y="6748272"/>
-            <a:ext cx="304792" cy="109728"/>
-          </a:xfrm>
-          <a:prstGeom prst="rect">
-            <a:avLst/>
-          </a:prstGeom>
-          <a:solidFill>
-            <a:srgbClr val="E0A526"/>
-          </a:solidFill>
-          <a:ln/>
-        </p:spPr>
-      </p:sp>
-      <p:sp>
-        <p:nvSpPr>
-          <p:cNvPr id="30" name="Shape 28"/>
-          <p:cNvSpPr/>
-          <p:nvPr/>
-        </p:nvSpPr>
-        <p:spPr>
-          <a:xfrm>
-            <a:off x="8229394" y="6748272"/>
-            <a:ext cx="304792" cy="109728"/>
-          </a:xfrm>
-          <a:prstGeom prst="rect">
-            <a:avLst/>
-          </a:prstGeom>
-          <a:solidFill>
-            <a:srgbClr val="0E5E6F"/>
-          </a:solidFill>
-          <a:ln/>
-        </p:spPr>
-      </p:sp>
-      <p:sp>
-        <p:nvSpPr>
-          <p:cNvPr id="31" name="Shape 29"/>
-          <p:cNvSpPr/>
-          <p:nvPr/>
-        </p:nvSpPr>
-        <p:spPr>
-          <a:xfrm>
-            <a:off x="8534187" y="6748272"/>
-            <a:ext cx="304792" cy="109728"/>
-          </a:xfrm>
-          <a:prstGeom prst="rect">
-            <a:avLst/>
-          </a:prstGeom>
-          <a:solidFill>
-            <a:srgbClr val="8B1E3F"/>
-          </a:solidFill>
-          <a:ln/>
-        </p:spPr>
-      </p:sp>
-      <p:sp>
-        <p:nvSpPr>
-          <p:cNvPr id="32" name="Shape 30"/>
-          <p:cNvSpPr/>
-          <p:nvPr/>
-        </p:nvSpPr>
-        <p:spPr>
-          <a:xfrm>
-            <a:off x="8838979" y="6748272"/>
-            <a:ext cx="304792" cy="109728"/>
-          </a:xfrm>
-          <a:prstGeom prst="rect">
-            <a:avLst/>
-          </a:prstGeom>
-          <a:solidFill>
-            <a:srgbClr val="0E5E6F"/>
-          </a:solidFill>
-          <a:ln/>
-        </p:spPr>
-      </p:sp>
-      <p:sp>
-        <p:nvSpPr>
-          <p:cNvPr id="33" name="Shape 31"/>
-          <p:cNvSpPr/>
-          <p:nvPr/>
-        </p:nvSpPr>
-        <p:spPr>
-          <a:xfrm>
-            <a:off x="9143771" y="6748272"/>
-            <a:ext cx="304792" cy="109728"/>
-          </a:xfrm>
-          <a:prstGeom prst="rect">
-            <a:avLst/>
-          </a:prstGeom>
-          <a:solidFill>
-            <a:srgbClr val="E0A526"/>
-          </a:solidFill>
-          <a:ln/>
-        </p:spPr>
-      </p:sp>
-      <p:sp>
-        <p:nvSpPr>
-          <p:cNvPr id="34" name="Shape 32"/>
-          <p:cNvSpPr/>
-          <p:nvPr/>
-        </p:nvSpPr>
-        <p:spPr>
-          <a:xfrm>
-            <a:off x="9448564" y="6748272"/>
-            <a:ext cx="304792" cy="109728"/>
-          </a:xfrm>
-          <a:prstGeom prst="rect">
-            <a:avLst/>
-          </a:prstGeom>
-          <a:solidFill>
-            <a:srgbClr val="0E5E6F"/>
-          </a:solidFill>
-          <a:ln/>
-        </p:spPr>
-      </p:sp>
-      <p:sp>
-        <p:nvSpPr>
-          <p:cNvPr id="35" name="Shape 33"/>
-          <p:cNvSpPr/>
-          <p:nvPr/>
-        </p:nvSpPr>
-        <p:spPr>
-          <a:xfrm>
-            <a:off x="9753356" y="6748272"/>
-            <a:ext cx="304792" cy="109728"/>
-          </a:xfrm>
-          <a:prstGeom prst="rect">
-            <a:avLst/>
-          </a:prstGeom>
-          <a:solidFill>
-            <a:srgbClr val="8B1E3F"/>
-          </a:solidFill>
-          <a:ln/>
-        </p:spPr>
-      </p:sp>
-      <p:sp>
-        <p:nvSpPr>
-          <p:cNvPr id="36" name="Shape 34"/>
-          <p:cNvSpPr/>
-          <p:nvPr/>
-        </p:nvSpPr>
-        <p:spPr>
-          <a:xfrm>
-            <a:off x="10058149" y="6748272"/>
-            <a:ext cx="304792" cy="109728"/>
-          </a:xfrm>
-          <a:prstGeom prst="rect">
-            <a:avLst/>
-          </a:prstGeom>
-          <a:solidFill>
-            <a:srgbClr val="0E5E6F"/>
-          </a:solidFill>
-          <a:ln/>
-        </p:spPr>
-      </p:sp>
-      <p:sp>
-        <p:nvSpPr>
-          <p:cNvPr id="37" name="Shape 35"/>
-          <p:cNvSpPr/>
-          <p:nvPr/>
-        </p:nvSpPr>
-        <p:spPr>
-          <a:xfrm>
-            <a:off x="10362941" y="6748272"/>
-            <a:ext cx="304792" cy="109728"/>
-          </a:xfrm>
-          <a:prstGeom prst="rect">
-            <a:avLst/>
-          </a:prstGeom>
-          <a:solidFill>
-            <a:srgbClr val="E0A526"/>
-          </a:solidFill>
-          <a:ln/>
-        </p:spPr>
-      </p:sp>
-      <p:sp>
-        <p:nvSpPr>
-          <p:cNvPr id="38" name="Shape 36"/>
-          <p:cNvSpPr/>
-          <p:nvPr/>
-        </p:nvSpPr>
-        <p:spPr>
-          <a:xfrm>
-            <a:off x="10667733" y="6748272"/>
-            <a:ext cx="304792" cy="109728"/>
-          </a:xfrm>
-          <a:prstGeom prst="rect">
-            <a:avLst/>
-          </a:prstGeom>
-          <a:solidFill>
-            <a:srgbClr val="0E5E6F"/>
-          </a:solidFill>
-          <a:ln/>
-        </p:spPr>
-      </p:sp>
-      <p:sp>
-        <p:nvSpPr>
-          <p:cNvPr id="39" name="Shape 37"/>
-          <p:cNvSpPr/>
-          <p:nvPr/>
-        </p:nvSpPr>
-        <p:spPr>
-          <a:xfrm>
-            <a:off x="10972526" y="6748272"/>
-            <a:ext cx="304792" cy="109728"/>
-          </a:xfrm>
-          <a:prstGeom prst="rect">
-            <a:avLst/>
-          </a:prstGeom>
-          <a:solidFill>
-            <a:srgbClr val="8B1E3F"/>
-          </a:solidFill>
-          <a:ln/>
-        </p:spPr>
-      </p:sp>
-      <p:sp>
-        <p:nvSpPr>
-          <p:cNvPr id="40" name="Shape 38"/>
-          <p:cNvSpPr/>
-          <p:nvPr/>
-        </p:nvSpPr>
-        <p:spPr>
-          <a:xfrm>
-            <a:off x="11277318" y="6748272"/>
-            <a:ext cx="304792" cy="109728"/>
-          </a:xfrm>
-          <a:prstGeom prst="rect">
-            <a:avLst/>
-          </a:prstGeom>
-          <a:solidFill>
-            <a:srgbClr val="0E5E6F"/>
-          </a:solidFill>
-          <a:ln/>
-        </p:spPr>
-      </p:sp>
-      <p:sp>
-        <p:nvSpPr>
-          <p:cNvPr id="41" name="Shape 39"/>
-          <p:cNvSpPr/>
-          <p:nvPr/>
-        </p:nvSpPr>
-        <p:spPr>
-          <a:xfrm>
-            <a:off x="11582110" y="6748272"/>
-            <a:ext cx="304792" cy="109728"/>
-          </a:xfrm>
-          <a:prstGeom prst="rect">
-            <a:avLst/>
-          </a:prstGeom>
-          <a:solidFill>
-            <a:srgbClr val="E0A526"/>
-          </a:solidFill>
-          <a:ln/>
-        </p:spPr>
-      </p:sp>
-      <p:sp>
-        <p:nvSpPr>
-          <p:cNvPr id="42" name="Shape 40"/>
-          <p:cNvSpPr/>
-          <p:nvPr/>
-        </p:nvSpPr>
-        <p:spPr>
-          <a:xfrm>
-            <a:off x="11886903" y="6748272"/>
-            <a:ext cx="304792" cy="109728"/>
-          </a:xfrm>
-          <a:prstGeom prst="rect">
-            <a:avLst/>
-          </a:prstGeom>
-          <a:solidFill>
-            <a:srgbClr val="0E5E6F"/>
-          </a:solidFill>
-          <a:ln/>
-        </p:spPr>
-      </p:sp>
-      <p:sp>
-        <p:nvSpPr>
-          <p:cNvPr id="43" name="Text 41"/>
-          <p:cNvSpPr txBox="1"/>
-          <p:nvPr/>
-        </p:nvSpPr>
-        <p:spPr>
-          <a:xfrm>
-            <a:off x="548640" y="1463040"/>
-            <a:ext cx="5394960" cy="4480560"/>
-          </a:xfrm>
-          <a:prstGeom prst="rect">
-            <a:avLst/>
-          </a:prstGeom>
-          <a:noFill/>
-          <a:ln/>
-        </p:spPr>
-        <p:txBody>
-          <a:bodyPr wrap="square" lIns="0" tIns="0" rIns="0" bIns="0" rtlCol="0" anchor="t"/>
-          <a:lstStyle/>
-          <a:p>
-            <a:pPr indent="0" marL="0">
-              <a:spcAft>
-                <a:spcPts val="1200"/>
-              </a:spcAft>
-              <a:buNone/>
-            </a:pPr>
-            <a:r>
-              <a:rPr lang="en-US" sz="1700" dirty="0">
-                <a:solidFill>
-                  <a:srgbClr val="1C2833"/>
-                </a:solidFill>
-                <a:latin typeface="Calibri" pitchFamily="34" charset="0"/>
-                <a:ea typeface="Calibri" pitchFamily="34" charset="-122"/>
-                <a:cs typeface="Calibri" pitchFamily="34" charset="-120"/>
-              </a:rPr>
-              <a:t>Overview   3–5</a:t>
-            </a:r>
-            <a:endParaRPr lang="en-US" sz="1700" dirty="0"/>
-          </a:p>
-          <a:p>
-            <a:pPr indent="0" marL="0">
-              <a:spcAft>
-                <a:spcPts val="1200"/>
-              </a:spcAft>
-              <a:buNone/>
-            </a:pPr>
-            <a:r>
-              <a:rPr lang="en-US" sz="1700" dirty="0">
-                <a:solidFill>
-                  <a:srgbClr val="1C2833"/>
-                </a:solidFill>
-                <a:latin typeface="Calibri" pitchFamily="34" charset="0"/>
-                <a:ea typeface="Calibri" pitchFamily="34" charset="-122"/>
-                <a:cs typeface="Calibri" pitchFamily="34" charset="-120"/>
-              </a:rPr>
-              <a:t>Age, sex, religion, 2002   6–9</a:t>
-            </a:r>
-            <a:endParaRPr lang="en-US" sz="1700" dirty="0"/>
-          </a:p>
-          <a:p>
-            <a:pPr indent="0" marL="0">
-              <a:spcAft>
-                <a:spcPts val="1200"/>
-              </a:spcAft>
-              <a:buNone/>
-            </a:pPr>
-            <a:r>
-              <a:rPr lang="en-US" sz="1700" dirty="0">
-                <a:solidFill>
-                  <a:srgbClr val="1C2833"/>
-                </a:solidFill>
-                <a:latin typeface="Calibri" pitchFamily="34" charset="0"/>
-                <a:ea typeface="Calibri" pitchFamily="34" charset="-122"/>
-                <a:cs typeface="Calibri" pitchFamily="34" charset="-120"/>
-              </a:rPr>
-              <a:t>Polling parts   10–12</a:t>
-            </a:r>
-            <a:endParaRPr lang="en-US" sz="1700" dirty="0"/>
-          </a:p>
-          <a:p>
-            <a:pPr indent="0" marL="0">
-              <a:spcAft>
-                <a:spcPts val="1200"/>
-              </a:spcAft>
-              <a:buNone/>
-            </a:pPr>
-            <a:r>
-              <a:rPr lang="en-US" sz="1700" dirty="0">
-                <a:solidFill>
-                  <a:srgbClr val="1C2833"/>
-                </a:solidFill>
-                <a:latin typeface="Calibri" pitchFamily="34" charset="0"/>
-                <a:ea typeface="Calibri" pitchFamily="34" charset="-122"/>
-                <a:cs typeface="Calibri" pitchFamily="34" charset="-120"/>
-              </a:rPr>
-              <a:t>Hearings   13–14</a:t>
-            </a:r>
-            <a:endParaRPr lang="en-US" sz="1700" dirty="0"/>
-          </a:p>
-        </p:txBody>
-      </p:sp>
-      <p:sp>
-        <p:nvSpPr>
-          <p:cNvPr id="44" name="Text 42"/>
-          <p:cNvSpPr txBox="1"/>
-          <p:nvPr/>
-        </p:nvSpPr>
-        <p:spPr>
-          <a:xfrm>
-            <a:off x="6217920" y="1463040"/>
-            <a:ext cx="5394960" cy="4480560"/>
-          </a:xfrm>
-          <a:prstGeom prst="rect">
-            <a:avLst/>
-          </a:prstGeom>
-          <a:noFill/>
-          <a:ln/>
-        </p:spPr>
-        <p:txBody>
-          <a:bodyPr wrap="square" lIns="0" tIns="0" rIns="0" bIns="0" rtlCol="0" anchor="t"/>
-          <a:lstStyle/>
-          <a:p>
-            <a:pPr indent="0" marL="0">
-              <a:spcAft>
-                <a:spcPts val="1200"/>
-              </a:spcAft>
-              <a:buNone/>
-            </a:pPr>
-            <a:r>
-              <a:rPr lang="en-US" sz="1700" dirty="0">
-                <a:solidFill>
-                  <a:srgbClr val="1C2833"/>
-                </a:solidFill>
-                <a:latin typeface="Calibri" pitchFamily="34" charset="0"/>
-                <a:ea typeface="Calibri" pitchFamily="34" charset="-122"/>
-                <a:cs typeface="Calibri" pitchFamily="34" charset="-120"/>
-              </a:rPr>
-              <a:t>Questions put to this analysis   15–16</a:t>
-            </a:r>
-            <a:endParaRPr lang="en-US" sz="1700" dirty="0"/>
-          </a:p>
-          <a:p>
-            <a:pPr indent="0" marL="0">
-              <a:spcAft>
-                <a:spcPts val="1200"/>
-              </a:spcAft>
-              <a:buNone/>
-            </a:pPr>
-            <a:r>
-              <a:rPr lang="en-US" sz="1700" dirty="0">
-                <a:solidFill>
-                  <a:srgbClr val="1C2833"/>
-                </a:solidFill>
-                <a:latin typeface="Calibri" pitchFamily="34" charset="0"/>
-                <a:ea typeface="Calibri" pitchFamily="34" charset="-122"/>
-                <a:cs typeface="Calibri" pitchFamily="34" charset="-120"/>
-              </a:rPr>
-              <a:t>Limits   17–17</a:t>
-            </a:r>
-            <a:endParaRPr lang="en-US" sz="1700" dirty="0"/>
-          </a:p>
-          <a:p>
-            <a:pPr indent="0" marL="0">
-              <a:spcAft>
-                <a:spcPts val="1200"/>
-              </a:spcAft>
-              <a:buNone/>
-            </a:pPr>
-            <a:r>
-              <a:rPr lang="en-US" sz="1700" dirty="0">
-                <a:solidFill>
-                  <a:srgbClr val="1C2833"/>
-                </a:solidFill>
-                <a:latin typeface="Calibri" pitchFamily="34" charset="0"/>
-                <a:ea typeface="Calibri" pitchFamily="34" charset="-122"/>
-                <a:cs typeface="Calibri" pitchFamily="34" charset="-120"/>
-              </a:rPr>
-              <a:t>What the Election Commission should do   18–18</a:t>
-            </a:r>
-            <a:endParaRPr lang="en-US" sz="1700" dirty="0"/>
-          </a:p>
-          <a:p>
-            <a:pPr indent="0" marL="0">
-              <a:spcAft>
-                <a:spcPts val="1200"/>
-              </a:spcAft>
-              <a:buNone/>
-            </a:pPr>
-            <a:r>
-              <a:rPr lang="en-US" sz="1700" dirty="0">
-                <a:solidFill>
-                  <a:srgbClr val="1C2833"/>
-                </a:solidFill>
-                <a:latin typeface="Calibri" pitchFamily="34" charset="0"/>
-                <a:ea typeface="Calibri" pitchFamily="34" charset="-122"/>
-                <a:cs typeface="Calibri" pitchFamily="34" charset="-120"/>
-              </a:rPr>
-              <a:t>Method   19–20</a:t>
-            </a:r>
-            <a:endParaRPr lang="en-US" sz="1700" dirty="0"/>
-          </a:p>
-        </p:txBody>
-      </p:sp>
-    </p:spTree>
-  </p:cSld>
-  <p:clrMapOvr>
-    <a:masterClrMapping/>
-  </p:clrMapOvr>
-</p:sld>
-</file>
-
-<file path=ppt/slides/slide20.xml><?xml version="1.0" encoding="utf-8"?>
-<p:sld xmlns:a="http://schemas.openxmlformats.org/drawingml/2006/main" xmlns:r="http://schemas.openxmlformats.org/officeDocument/2006/relationships" xmlns:p="http://schemas.openxmlformats.org/presentationml/2006/main">
-  <p:cSld name="Slide 20">
+  <p:cSld name="Slide 21">
     <p:bg>
       <p:bgPr>
         <a:solidFill>
@@ -36992,6 +38682,1131 @@
                 <a:ea typeface="Calibri" pitchFamily="34" charset="-122"/>
                 <a:cs typeface="Calibri" pitchFamily="34" charset="-120"/>
               </a:rPr>
+              <a:t>HYDERABAD AND TELANGANA</a:t>
+            </a:r>
+            <a:endParaRPr lang="en-US" sz="1100" dirty="0"/>
+          </a:p>
+        </p:txBody>
+      </p:sp>
+      <p:sp>
+        <p:nvSpPr>
+          <p:cNvPr id="3" name="Text 1"/>
+          <p:cNvSpPr txBox="1"/>
+          <p:nvPr/>
+        </p:nvSpPr>
+        <p:spPr>
+          <a:xfrm>
+            <a:off x="548640" y="530352"/>
+            <a:ext cx="11094415" cy="914400"/>
+          </a:xfrm>
+          <a:prstGeom prst="rect">
+            <a:avLst/>
+          </a:prstGeom>
+          <a:noFill/>
+          <a:ln/>
+        </p:spPr>
+        <p:txBody>
+          <a:bodyPr wrap="square" lIns="0" tIns="0" rIns="0" bIns="0" rtlCol="0" anchor="t">
+            <a:normAutofit/>
+          </a:bodyPr>
+          <a:lstStyle/>
+          <a:p>
+            <a:pPr indent="0" marL="0">
+              <a:buNone/>
+            </a:pPr>
+            <a:r>
+              <a:rPr lang="en-US" sz="2700" b="1" dirty="0">
+                <a:solidFill>
+                  <a:srgbClr val="6E1832"/>
+                </a:solidFill>
+                <a:latin typeface="Cambria" pitchFamily="34" charset="0"/>
+                <a:ea typeface="Cambria" pitchFamily="34" charset="-122"/>
+                <a:cs typeface="Cambria" pitchFamily="34" charset="-120"/>
+              </a:rPr>
+              <a:t>The Old City seats lost 39.9% of their roll, Hyderabad's other ten seats 41.6%</a:t>
+            </a:r>
+            <a:endParaRPr lang="en-US" sz="2700" dirty="0"/>
+          </a:p>
+        </p:txBody>
+      </p:sp>
+      <p:sp>
+        <p:nvSpPr>
+          <p:cNvPr id="4" name="Text 2"/>
+          <p:cNvSpPr txBox="1"/>
+          <p:nvPr/>
+        </p:nvSpPr>
+        <p:spPr>
+          <a:xfrm>
+            <a:off x="548640" y="1463040"/>
+            <a:ext cx="11094415" cy="365760"/>
+          </a:xfrm>
+          <a:prstGeom prst="rect">
+            <a:avLst/>
+          </a:prstGeom>
+          <a:noFill/>
+          <a:ln/>
+        </p:spPr>
+        <p:txBody>
+          <a:bodyPr wrap="square" lIns="0" tIns="0" rIns="0" bIns="0" rtlCol="0" anchor="t"/>
+          <a:lstStyle/>
+          <a:p>
+            <a:pPr indent="0" marL="0">
+              <a:buNone/>
+            </a:pPr>
+            <a:r>
+              <a:rPr lang="en-US" sz="1400" dirty="0">
+                <a:solidFill>
+                  <a:srgbClr val="4D5B69"/>
+                </a:solidFill>
+                <a:latin typeface="Calibri" pitchFamily="34" charset="0"/>
+                <a:ea typeface="Calibri" pitchFamily="34" charset="-122"/>
+                <a:cs typeface="Calibri" pitchFamily="34" charset="-120"/>
+              </a:rPr>
+              <a:t>Share of each roll left off the state's draft of 17 August 2026; Old City seats in maroon</a:t>
+            </a:r>
+            <a:endParaRPr lang="en-US" sz="1400" dirty="0"/>
+          </a:p>
+        </p:txBody>
+      </p:sp>
+      <p:sp>
+        <p:nvSpPr>
+          <p:cNvPr id="5" name="Text 3"/>
+          <p:cNvSpPr txBox="1"/>
+          <p:nvPr/>
+        </p:nvSpPr>
+        <p:spPr>
+          <a:xfrm>
+            <a:off x="548640" y="6400800"/>
+            <a:ext cx="10180015" cy="274320"/>
+          </a:xfrm>
+          <a:prstGeom prst="rect">
+            <a:avLst/>
+          </a:prstGeom>
+          <a:noFill/>
+          <a:ln/>
+        </p:spPr>
+        <p:txBody>
+          <a:bodyPr wrap="square" lIns="0" tIns="0" rIns="0" bIns="0" rtlCol="0" anchor="ctr"/>
+          <a:lstStyle/>
+          <a:p>
+            <a:pPr indent="0" marL="0">
+              <a:buNone/>
+            </a:pPr>
+            <a:r>
+              <a:rPr lang="en-US" sz="900" dirty="0">
+                <a:solidFill>
+                  <a:srgbClr val="4D5B69"/>
+                </a:solidFill>
+                <a:latin typeface="Calibri" pitchFamily="34" charset="0"/>
+                <a:ea typeface="Calibri" pitchFamily="34" charset="-122"/>
+                <a:cs typeface="Calibri" pitchFamily="34" charset="-120"/>
+              </a:rPr>
+              <a:t>Hyderabad Old City SIR 2026 · Varna Sri Raman · aggregates only; no names or EPIC numbers</a:t>
+            </a:r>
+            <a:endParaRPr lang="en-US" sz="900" dirty="0"/>
+          </a:p>
+        </p:txBody>
+      </p:sp>
+      <p:sp>
+        <p:nvSpPr>
+          <p:cNvPr id="6" name="Text 4"/>
+          <p:cNvSpPr txBox="1"/>
+          <p:nvPr/>
+        </p:nvSpPr>
+        <p:spPr>
+          <a:xfrm>
+            <a:off x="10911535" y="6400800"/>
+            <a:ext cx="731520" cy="274320"/>
+          </a:xfrm>
+          <a:prstGeom prst="rect">
+            <a:avLst/>
+          </a:prstGeom>
+          <a:noFill/>
+          <a:ln/>
+        </p:spPr>
+        <p:txBody>
+          <a:bodyPr wrap="square" lIns="0" tIns="0" rIns="0" bIns="0" rtlCol="0" anchor="ctr"/>
+          <a:lstStyle/>
+          <a:p>
+            <a:pPr algn="r" indent="0" marL="0">
+              <a:buNone/>
+            </a:pPr>
+            <a:r>
+              <a:rPr lang="en-US" sz="900" dirty="0">
+                <a:solidFill>
+                  <a:srgbClr val="4D5B69"/>
+                </a:solidFill>
+                <a:latin typeface="Calibri" pitchFamily="34" charset="0"/>
+                <a:ea typeface="Calibri" pitchFamily="34" charset="-122"/>
+                <a:cs typeface="Calibri" pitchFamily="34" charset="-120"/>
+              </a:rPr>
+              <a:t>6</a:t>
+            </a:r>
+            <a:endParaRPr lang="en-US" sz="900" dirty="0"/>
+          </a:p>
+        </p:txBody>
+      </p:sp>
+      <p:sp>
+        <p:nvSpPr>
+          <p:cNvPr id="7" name="Shape 5"/>
+          <p:cNvSpPr/>
+          <p:nvPr/>
+        </p:nvSpPr>
+        <p:spPr>
+          <a:xfrm>
+            <a:off x="0" y="6748272"/>
+            <a:ext cx="304792" cy="109728"/>
+          </a:xfrm>
+          <a:prstGeom prst="rect">
+            <a:avLst/>
+          </a:prstGeom>
+          <a:solidFill>
+            <a:srgbClr val="8B1E3F"/>
+          </a:solidFill>
+          <a:ln/>
+        </p:spPr>
+      </p:sp>
+      <p:sp>
+        <p:nvSpPr>
+          <p:cNvPr id="8" name="Shape 6"/>
+          <p:cNvSpPr/>
+          <p:nvPr/>
+        </p:nvSpPr>
+        <p:spPr>
+          <a:xfrm>
+            <a:off x="304792" y="6748272"/>
+            <a:ext cx="304792" cy="109728"/>
+          </a:xfrm>
+          <a:prstGeom prst="rect">
+            <a:avLst/>
+          </a:prstGeom>
+          <a:solidFill>
+            <a:srgbClr val="0E5E6F"/>
+          </a:solidFill>
+          <a:ln/>
+        </p:spPr>
+      </p:sp>
+      <p:sp>
+        <p:nvSpPr>
+          <p:cNvPr id="9" name="Shape 7"/>
+          <p:cNvSpPr/>
+          <p:nvPr/>
+        </p:nvSpPr>
+        <p:spPr>
+          <a:xfrm>
+            <a:off x="609585" y="6748272"/>
+            <a:ext cx="304792" cy="109728"/>
+          </a:xfrm>
+          <a:prstGeom prst="rect">
+            <a:avLst/>
+          </a:prstGeom>
+          <a:solidFill>
+            <a:srgbClr val="E0A526"/>
+          </a:solidFill>
+          <a:ln/>
+        </p:spPr>
+      </p:sp>
+      <p:sp>
+        <p:nvSpPr>
+          <p:cNvPr id="10" name="Shape 8"/>
+          <p:cNvSpPr/>
+          <p:nvPr/>
+        </p:nvSpPr>
+        <p:spPr>
+          <a:xfrm>
+            <a:off x="914377" y="6748272"/>
+            <a:ext cx="304792" cy="109728"/>
+          </a:xfrm>
+          <a:prstGeom prst="rect">
+            <a:avLst/>
+          </a:prstGeom>
+          <a:solidFill>
+            <a:srgbClr val="0E5E6F"/>
+          </a:solidFill>
+          <a:ln/>
+        </p:spPr>
+      </p:sp>
+      <p:sp>
+        <p:nvSpPr>
+          <p:cNvPr id="11" name="Shape 9"/>
+          <p:cNvSpPr/>
+          <p:nvPr/>
+        </p:nvSpPr>
+        <p:spPr>
+          <a:xfrm>
+            <a:off x="1219170" y="6748272"/>
+            <a:ext cx="304792" cy="109728"/>
+          </a:xfrm>
+          <a:prstGeom prst="rect">
+            <a:avLst/>
+          </a:prstGeom>
+          <a:solidFill>
+            <a:srgbClr val="8B1E3F"/>
+          </a:solidFill>
+          <a:ln/>
+        </p:spPr>
+      </p:sp>
+      <p:sp>
+        <p:nvSpPr>
+          <p:cNvPr id="12" name="Shape 10"/>
+          <p:cNvSpPr/>
+          <p:nvPr/>
+        </p:nvSpPr>
+        <p:spPr>
+          <a:xfrm>
+            <a:off x="1523962" y="6748272"/>
+            <a:ext cx="304792" cy="109728"/>
+          </a:xfrm>
+          <a:prstGeom prst="rect">
+            <a:avLst/>
+          </a:prstGeom>
+          <a:solidFill>
+            <a:srgbClr val="0E5E6F"/>
+          </a:solidFill>
+          <a:ln/>
+        </p:spPr>
+      </p:sp>
+      <p:sp>
+        <p:nvSpPr>
+          <p:cNvPr id="13" name="Shape 11"/>
+          <p:cNvSpPr/>
+          <p:nvPr/>
+        </p:nvSpPr>
+        <p:spPr>
+          <a:xfrm>
+            <a:off x="1828754" y="6748272"/>
+            <a:ext cx="304792" cy="109728"/>
+          </a:xfrm>
+          <a:prstGeom prst="rect">
+            <a:avLst/>
+          </a:prstGeom>
+          <a:solidFill>
+            <a:srgbClr val="E0A526"/>
+          </a:solidFill>
+          <a:ln/>
+        </p:spPr>
+      </p:sp>
+      <p:sp>
+        <p:nvSpPr>
+          <p:cNvPr id="14" name="Shape 12"/>
+          <p:cNvSpPr/>
+          <p:nvPr/>
+        </p:nvSpPr>
+        <p:spPr>
+          <a:xfrm>
+            <a:off x="2133547" y="6748272"/>
+            <a:ext cx="304792" cy="109728"/>
+          </a:xfrm>
+          <a:prstGeom prst="rect">
+            <a:avLst/>
+          </a:prstGeom>
+          <a:solidFill>
+            <a:srgbClr val="0E5E6F"/>
+          </a:solidFill>
+          <a:ln/>
+        </p:spPr>
+      </p:sp>
+      <p:sp>
+        <p:nvSpPr>
+          <p:cNvPr id="15" name="Shape 13"/>
+          <p:cNvSpPr/>
+          <p:nvPr/>
+        </p:nvSpPr>
+        <p:spPr>
+          <a:xfrm>
+            <a:off x="2438339" y="6748272"/>
+            <a:ext cx="304792" cy="109728"/>
+          </a:xfrm>
+          <a:prstGeom prst="rect">
+            <a:avLst/>
+          </a:prstGeom>
+          <a:solidFill>
+            <a:srgbClr val="8B1E3F"/>
+          </a:solidFill>
+          <a:ln/>
+        </p:spPr>
+      </p:sp>
+      <p:sp>
+        <p:nvSpPr>
+          <p:cNvPr id="16" name="Shape 14"/>
+          <p:cNvSpPr/>
+          <p:nvPr/>
+        </p:nvSpPr>
+        <p:spPr>
+          <a:xfrm>
+            <a:off x="2743131" y="6748272"/>
+            <a:ext cx="304792" cy="109728"/>
+          </a:xfrm>
+          <a:prstGeom prst="rect">
+            <a:avLst/>
+          </a:prstGeom>
+          <a:solidFill>
+            <a:srgbClr val="0E5E6F"/>
+          </a:solidFill>
+          <a:ln/>
+        </p:spPr>
+      </p:sp>
+      <p:sp>
+        <p:nvSpPr>
+          <p:cNvPr id="17" name="Shape 15"/>
+          <p:cNvSpPr/>
+          <p:nvPr/>
+        </p:nvSpPr>
+        <p:spPr>
+          <a:xfrm>
+            <a:off x="3047924" y="6748272"/>
+            <a:ext cx="304792" cy="109728"/>
+          </a:xfrm>
+          <a:prstGeom prst="rect">
+            <a:avLst/>
+          </a:prstGeom>
+          <a:solidFill>
+            <a:srgbClr val="E0A526"/>
+          </a:solidFill>
+          <a:ln/>
+        </p:spPr>
+      </p:sp>
+      <p:sp>
+        <p:nvSpPr>
+          <p:cNvPr id="18" name="Shape 16"/>
+          <p:cNvSpPr/>
+          <p:nvPr/>
+        </p:nvSpPr>
+        <p:spPr>
+          <a:xfrm>
+            <a:off x="3352716" y="6748272"/>
+            <a:ext cx="304792" cy="109728"/>
+          </a:xfrm>
+          <a:prstGeom prst="rect">
+            <a:avLst/>
+          </a:prstGeom>
+          <a:solidFill>
+            <a:srgbClr val="0E5E6F"/>
+          </a:solidFill>
+          <a:ln/>
+        </p:spPr>
+      </p:sp>
+      <p:sp>
+        <p:nvSpPr>
+          <p:cNvPr id="19" name="Shape 17"/>
+          <p:cNvSpPr/>
+          <p:nvPr/>
+        </p:nvSpPr>
+        <p:spPr>
+          <a:xfrm>
+            <a:off x="3657509" y="6748272"/>
+            <a:ext cx="304792" cy="109728"/>
+          </a:xfrm>
+          <a:prstGeom prst="rect">
+            <a:avLst/>
+          </a:prstGeom>
+          <a:solidFill>
+            <a:srgbClr val="8B1E3F"/>
+          </a:solidFill>
+          <a:ln/>
+        </p:spPr>
+      </p:sp>
+      <p:sp>
+        <p:nvSpPr>
+          <p:cNvPr id="20" name="Shape 18"/>
+          <p:cNvSpPr/>
+          <p:nvPr/>
+        </p:nvSpPr>
+        <p:spPr>
+          <a:xfrm>
+            <a:off x="3962301" y="6748272"/>
+            <a:ext cx="304792" cy="109728"/>
+          </a:xfrm>
+          <a:prstGeom prst="rect">
+            <a:avLst/>
+          </a:prstGeom>
+          <a:solidFill>
+            <a:srgbClr val="0E5E6F"/>
+          </a:solidFill>
+          <a:ln/>
+        </p:spPr>
+      </p:sp>
+      <p:sp>
+        <p:nvSpPr>
+          <p:cNvPr id="21" name="Shape 19"/>
+          <p:cNvSpPr/>
+          <p:nvPr/>
+        </p:nvSpPr>
+        <p:spPr>
+          <a:xfrm>
+            <a:off x="4267093" y="6748272"/>
+            <a:ext cx="304792" cy="109728"/>
+          </a:xfrm>
+          <a:prstGeom prst="rect">
+            <a:avLst/>
+          </a:prstGeom>
+          <a:solidFill>
+            <a:srgbClr val="E0A526"/>
+          </a:solidFill>
+          <a:ln/>
+        </p:spPr>
+      </p:sp>
+      <p:sp>
+        <p:nvSpPr>
+          <p:cNvPr id="22" name="Shape 20"/>
+          <p:cNvSpPr/>
+          <p:nvPr/>
+        </p:nvSpPr>
+        <p:spPr>
+          <a:xfrm>
+            <a:off x="4571886" y="6748272"/>
+            <a:ext cx="304792" cy="109728"/>
+          </a:xfrm>
+          <a:prstGeom prst="rect">
+            <a:avLst/>
+          </a:prstGeom>
+          <a:solidFill>
+            <a:srgbClr val="0E5E6F"/>
+          </a:solidFill>
+          <a:ln/>
+        </p:spPr>
+      </p:sp>
+      <p:sp>
+        <p:nvSpPr>
+          <p:cNvPr id="23" name="Shape 21"/>
+          <p:cNvSpPr/>
+          <p:nvPr/>
+        </p:nvSpPr>
+        <p:spPr>
+          <a:xfrm>
+            <a:off x="4876678" y="6748272"/>
+            <a:ext cx="304792" cy="109728"/>
+          </a:xfrm>
+          <a:prstGeom prst="rect">
+            <a:avLst/>
+          </a:prstGeom>
+          <a:solidFill>
+            <a:srgbClr val="8B1E3F"/>
+          </a:solidFill>
+          <a:ln/>
+        </p:spPr>
+      </p:sp>
+      <p:sp>
+        <p:nvSpPr>
+          <p:cNvPr id="24" name="Shape 22"/>
+          <p:cNvSpPr/>
+          <p:nvPr/>
+        </p:nvSpPr>
+        <p:spPr>
+          <a:xfrm>
+            <a:off x="5181470" y="6748272"/>
+            <a:ext cx="304792" cy="109728"/>
+          </a:xfrm>
+          <a:prstGeom prst="rect">
+            <a:avLst/>
+          </a:prstGeom>
+          <a:solidFill>
+            <a:srgbClr val="0E5E6F"/>
+          </a:solidFill>
+          <a:ln/>
+        </p:spPr>
+      </p:sp>
+      <p:sp>
+        <p:nvSpPr>
+          <p:cNvPr id="25" name="Shape 23"/>
+          <p:cNvSpPr/>
+          <p:nvPr/>
+        </p:nvSpPr>
+        <p:spPr>
+          <a:xfrm>
+            <a:off x="5486263" y="6748272"/>
+            <a:ext cx="304792" cy="109728"/>
+          </a:xfrm>
+          <a:prstGeom prst="rect">
+            <a:avLst/>
+          </a:prstGeom>
+          <a:solidFill>
+            <a:srgbClr val="E0A526"/>
+          </a:solidFill>
+          <a:ln/>
+        </p:spPr>
+      </p:sp>
+      <p:sp>
+        <p:nvSpPr>
+          <p:cNvPr id="26" name="Shape 24"/>
+          <p:cNvSpPr/>
+          <p:nvPr/>
+        </p:nvSpPr>
+        <p:spPr>
+          <a:xfrm>
+            <a:off x="5791055" y="6748272"/>
+            <a:ext cx="304792" cy="109728"/>
+          </a:xfrm>
+          <a:prstGeom prst="rect">
+            <a:avLst/>
+          </a:prstGeom>
+          <a:solidFill>
+            <a:srgbClr val="0E5E6F"/>
+          </a:solidFill>
+          <a:ln/>
+        </p:spPr>
+      </p:sp>
+      <p:sp>
+        <p:nvSpPr>
+          <p:cNvPr id="27" name="Shape 25"/>
+          <p:cNvSpPr/>
+          <p:nvPr/>
+        </p:nvSpPr>
+        <p:spPr>
+          <a:xfrm>
+            <a:off x="6095848" y="6748272"/>
+            <a:ext cx="304792" cy="109728"/>
+          </a:xfrm>
+          <a:prstGeom prst="rect">
+            <a:avLst/>
+          </a:prstGeom>
+          <a:solidFill>
+            <a:srgbClr val="8B1E3F"/>
+          </a:solidFill>
+          <a:ln/>
+        </p:spPr>
+      </p:sp>
+      <p:sp>
+        <p:nvSpPr>
+          <p:cNvPr id="28" name="Shape 26"/>
+          <p:cNvSpPr/>
+          <p:nvPr/>
+        </p:nvSpPr>
+        <p:spPr>
+          <a:xfrm>
+            <a:off x="6400640" y="6748272"/>
+            <a:ext cx="304792" cy="109728"/>
+          </a:xfrm>
+          <a:prstGeom prst="rect">
+            <a:avLst/>
+          </a:prstGeom>
+          <a:solidFill>
+            <a:srgbClr val="0E5E6F"/>
+          </a:solidFill>
+          <a:ln/>
+        </p:spPr>
+      </p:sp>
+      <p:sp>
+        <p:nvSpPr>
+          <p:cNvPr id="29" name="Shape 27"/>
+          <p:cNvSpPr/>
+          <p:nvPr/>
+        </p:nvSpPr>
+        <p:spPr>
+          <a:xfrm>
+            <a:off x="6705432" y="6748272"/>
+            <a:ext cx="304792" cy="109728"/>
+          </a:xfrm>
+          <a:prstGeom prst="rect">
+            <a:avLst/>
+          </a:prstGeom>
+          <a:solidFill>
+            <a:srgbClr val="E0A526"/>
+          </a:solidFill>
+          <a:ln/>
+        </p:spPr>
+      </p:sp>
+      <p:sp>
+        <p:nvSpPr>
+          <p:cNvPr id="30" name="Shape 28"/>
+          <p:cNvSpPr/>
+          <p:nvPr/>
+        </p:nvSpPr>
+        <p:spPr>
+          <a:xfrm>
+            <a:off x="7010225" y="6748272"/>
+            <a:ext cx="304792" cy="109728"/>
+          </a:xfrm>
+          <a:prstGeom prst="rect">
+            <a:avLst/>
+          </a:prstGeom>
+          <a:solidFill>
+            <a:srgbClr val="0E5E6F"/>
+          </a:solidFill>
+          <a:ln/>
+        </p:spPr>
+      </p:sp>
+      <p:sp>
+        <p:nvSpPr>
+          <p:cNvPr id="31" name="Shape 29"/>
+          <p:cNvSpPr/>
+          <p:nvPr/>
+        </p:nvSpPr>
+        <p:spPr>
+          <a:xfrm>
+            <a:off x="7315017" y="6748272"/>
+            <a:ext cx="304792" cy="109728"/>
+          </a:xfrm>
+          <a:prstGeom prst="rect">
+            <a:avLst/>
+          </a:prstGeom>
+          <a:solidFill>
+            <a:srgbClr val="8B1E3F"/>
+          </a:solidFill>
+          <a:ln/>
+        </p:spPr>
+      </p:sp>
+      <p:sp>
+        <p:nvSpPr>
+          <p:cNvPr id="32" name="Shape 30"/>
+          <p:cNvSpPr/>
+          <p:nvPr/>
+        </p:nvSpPr>
+        <p:spPr>
+          <a:xfrm>
+            <a:off x="7619809" y="6748272"/>
+            <a:ext cx="304792" cy="109728"/>
+          </a:xfrm>
+          <a:prstGeom prst="rect">
+            <a:avLst/>
+          </a:prstGeom>
+          <a:solidFill>
+            <a:srgbClr val="0E5E6F"/>
+          </a:solidFill>
+          <a:ln/>
+        </p:spPr>
+      </p:sp>
+      <p:sp>
+        <p:nvSpPr>
+          <p:cNvPr id="33" name="Shape 31"/>
+          <p:cNvSpPr/>
+          <p:nvPr/>
+        </p:nvSpPr>
+        <p:spPr>
+          <a:xfrm>
+            <a:off x="7924602" y="6748272"/>
+            <a:ext cx="304792" cy="109728"/>
+          </a:xfrm>
+          <a:prstGeom prst="rect">
+            <a:avLst/>
+          </a:prstGeom>
+          <a:solidFill>
+            <a:srgbClr val="E0A526"/>
+          </a:solidFill>
+          <a:ln/>
+        </p:spPr>
+      </p:sp>
+      <p:sp>
+        <p:nvSpPr>
+          <p:cNvPr id="34" name="Shape 32"/>
+          <p:cNvSpPr/>
+          <p:nvPr/>
+        </p:nvSpPr>
+        <p:spPr>
+          <a:xfrm>
+            <a:off x="8229394" y="6748272"/>
+            <a:ext cx="304792" cy="109728"/>
+          </a:xfrm>
+          <a:prstGeom prst="rect">
+            <a:avLst/>
+          </a:prstGeom>
+          <a:solidFill>
+            <a:srgbClr val="0E5E6F"/>
+          </a:solidFill>
+          <a:ln/>
+        </p:spPr>
+      </p:sp>
+      <p:sp>
+        <p:nvSpPr>
+          <p:cNvPr id="35" name="Shape 33"/>
+          <p:cNvSpPr/>
+          <p:nvPr/>
+        </p:nvSpPr>
+        <p:spPr>
+          <a:xfrm>
+            <a:off x="8534187" y="6748272"/>
+            <a:ext cx="304792" cy="109728"/>
+          </a:xfrm>
+          <a:prstGeom prst="rect">
+            <a:avLst/>
+          </a:prstGeom>
+          <a:solidFill>
+            <a:srgbClr val="8B1E3F"/>
+          </a:solidFill>
+          <a:ln/>
+        </p:spPr>
+      </p:sp>
+      <p:sp>
+        <p:nvSpPr>
+          <p:cNvPr id="36" name="Shape 34"/>
+          <p:cNvSpPr/>
+          <p:nvPr/>
+        </p:nvSpPr>
+        <p:spPr>
+          <a:xfrm>
+            <a:off x="8838979" y="6748272"/>
+            <a:ext cx="304792" cy="109728"/>
+          </a:xfrm>
+          <a:prstGeom prst="rect">
+            <a:avLst/>
+          </a:prstGeom>
+          <a:solidFill>
+            <a:srgbClr val="0E5E6F"/>
+          </a:solidFill>
+          <a:ln/>
+        </p:spPr>
+      </p:sp>
+      <p:sp>
+        <p:nvSpPr>
+          <p:cNvPr id="37" name="Shape 35"/>
+          <p:cNvSpPr/>
+          <p:nvPr/>
+        </p:nvSpPr>
+        <p:spPr>
+          <a:xfrm>
+            <a:off x="9143771" y="6748272"/>
+            <a:ext cx="304792" cy="109728"/>
+          </a:xfrm>
+          <a:prstGeom prst="rect">
+            <a:avLst/>
+          </a:prstGeom>
+          <a:solidFill>
+            <a:srgbClr val="E0A526"/>
+          </a:solidFill>
+          <a:ln/>
+        </p:spPr>
+      </p:sp>
+      <p:sp>
+        <p:nvSpPr>
+          <p:cNvPr id="38" name="Shape 36"/>
+          <p:cNvSpPr/>
+          <p:nvPr/>
+        </p:nvSpPr>
+        <p:spPr>
+          <a:xfrm>
+            <a:off x="9448564" y="6748272"/>
+            <a:ext cx="304792" cy="109728"/>
+          </a:xfrm>
+          <a:prstGeom prst="rect">
+            <a:avLst/>
+          </a:prstGeom>
+          <a:solidFill>
+            <a:srgbClr val="0E5E6F"/>
+          </a:solidFill>
+          <a:ln/>
+        </p:spPr>
+      </p:sp>
+      <p:sp>
+        <p:nvSpPr>
+          <p:cNvPr id="39" name="Shape 37"/>
+          <p:cNvSpPr/>
+          <p:nvPr/>
+        </p:nvSpPr>
+        <p:spPr>
+          <a:xfrm>
+            <a:off x="9753356" y="6748272"/>
+            <a:ext cx="304792" cy="109728"/>
+          </a:xfrm>
+          <a:prstGeom prst="rect">
+            <a:avLst/>
+          </a:prstGeom>
+          <a:solidFill>
+            <a:srgbClr val="8B1E3F"/>
+          </a:solidFill>
+          <a:ln/>
+        </p:spPr>
+      </p:sp>
+      <p:sp>
+        <p:nvSpPr>
+          <p:cNvPr id="40" name="Shape 38"/>
+          <p:cNvSpPr/>
+          <p:nvPr/>
+        </p:nvSpPr>
+        <p:spPr>
+          <a:xfrm>
+            <a:off x="10058149" y="6748272"/>
+            <a:ext cx="304792" cy="109728"/>
+          </a:xfrm>
+          <a:prstGeom prst="rect">
+            <a:avLst/>
+          </a:prstGeom>
+          <a:solidFill>
+            <a:srgbClr val="0E5E6F"/>
+          </a:solidFill>
+          <a:ln/>
+        </p:spPr>
+      </p:sp>
+      <p:sp>
+        <p:nvSpPr>
+          <p:cNvPr id="41" name="Shape 39"/>
+          <p:cNvSpPr/>
+          <p:nvPr/>
+        </p:nvSpPr>
+        <p:spPr>
+          <a:xfrm>
+            <a:off x="10362941" y="6748272"/>
+            <a:ext cx="304792" cy="109728"/>
+          </a:xfrm>
+          <a:prstGeom prst="rect">
+            <a:avLst/>
+          </a:prstGeom>
+          <a:solidFill>
+            <a:srgbClr val="E0A526"/>
+          </a:solidFill>
+          <a:ln/>
+        </p:spPr>
+      </p:sp>
+      <p:sp>
+        <p:nvSpPr>
+          <p:cNvPr id="42" name="Shape 40"/>
+          <p:cNvSpPr/>
+          <p:nvPr/>
+        </p:nvSpPr>
+        <p:spPr>
+          <a:xfrm>
+            <a:off x="10667733" y="6748272"/>
+            <a:ext cx="304792" cy="109728"/>
+          </a:xfrm>
+          <a:prstGeom prst="rect">
+            <a:avLst/>
+          </a:prstGeom>
+          <a:solidFill>
+            <a:srgbClr val="0E5E6F"/>
+          </a:solidFill>
+          <a:ln/>
+        </p:spPr>
+      </p:sp>
+      <p:sp>
+        <p:nvSpPr>
+          <p:cNvPr id="43" name="Shape 41"/>
+          <p:cNvSpPr/>
+          <p:nvPr/>
+        </p:nvSpPr>
+        <p:spPr>
+          <a:xfrm>
+            <a:off x="10972526" y="6748272"/>
+            <a:ext cx="304792" cy="109728"/>
+          </a:xfrm>
+          <a:prstGeom prst="rect">
+            <a:avLst/>
+          </a:prstGeom>
+          <a:solidFill>
+            <a:srgbClr val="8B1E3F"/>
+          </a:solidFill>
+          <a:ln/>
+        </p:spPr>
+      </p:sp>
+      <p:sp>
+        <p:nvSpPr>
+          <p:cNvPr id="44" name="Shape 42"/>
+          <p:cNvSpPr/>
+          <p:nvPr/>
+        </p:nvSpPr>
+        <p:spPr>
+          <a:xfrm>
+            <a:off x="11277318" y="6748272"/>
+            <a:ext cx="304792" cy="109728"/>
+          </a:xfrm>
+          <a:prstGeom prst="rect">
+            <a:avLst/>
+          </a:prstGeom>
+          <a:solidFill>
+            <a:srgbClr val="0E5E6F"/>
+          </a:solidFill>
+          <a:ln/>
+        </p:spPr>
+      </p:sp>
+      <p:sp>
+        <p:nvSpPr>
+          <p:cNvPr id="45" name="Shape 43"/>
+          <p:cNvSpPr/>
+          <p:nvPr/>
+        </p:nvSpPr>
+        <p:spPr>
+          <a:xfrm>
+            <a:off x="11582110" y="6748272"/>
+            <a:ext cx="304792" cy="109728"/>
+          </a:xfrm>
+          <a:prstGeom prst="rect">
+            <a:avLst/>
+          </a:prstGeom>
+          <a:solidFill>
+            <a:srgbClr val="E0A526"/>
+          </a:solidFill>
+          <a:ln/>
+        </p:spPr>
+      </p:sp>
+      <p:sp>
+        <p:nvSpPr>
+          <p:cNvPr id="46" name="Shape 44"/>
+          <p:cNvSpPr/>
+          <p:nvPr/>
+        </p:nvSpPr>
+        <p:spPr>
+          <a:xfrm>
+            <a:off x="11886903" y="6748272"/>
+            <a:ext cx="304792" cy="109728"/>
+          </a:xfrm>
+          <a:prstGeom prst="rect">
+            <a:avLst/>
+          </a:prstGeom>
+          <a:solidFill>
+            <a:srgbClr val="0E5E6F"/>
+          </a:solidFill>
+          <a:ln/>
+        </p:spPr>
+      </p:sp>
+      <p:graphicFrame>
+        <p:nvGraphicFramePr>
+          <p:cNvPr id="47" name="Chart 0" descr=""/>
+          <p:cNvGraphicFramePr/>
+          <p:nvPr/>
+        </p:nvGraphicFramePr>
+        <p:xfrm>
+          <a:off x="548640" y="1920240"/>
+          <a:ext cx="7040880" cy="4343400"/>
+        </p:xfrm>
+        <a:graphic xmlns:a="http://schemas.openxmlformats.org/drawingml/2006/main">
+          <a:graphicData uri="http://schemas.openxmlformats.org/drawingml/2006/chart">
+            <c:chart xmlns:c="http://schemas.openxmlformats.org/drawingml/2006/chart" r:id="rId1"/>
+          </a:graphicData>
+        </a:graphic>
+      </p:graphicFrame>
+      <p:sp>
+        <p:nvSpPr>
+          <p:cNvPr id="48" name="Text 45"/>
+          <p:cNvSpPr txBox="1"/>
+          <p:nvPr/>
+        </p:nvSpPr>
+        <p:spPr>
+          <a:xfrm>
+            <a:off x="7909560" y="2011680"/>
+            <a:ext cx="3733495" cy="4251960"/>
+          </a:xfrm>
+          <a:prstGeom prst="rect">
+            <a:avLst/>
+          </a:prstGeom>
+          <a:noFill/>
+          <a:ln/>
+        </p:spPr>
+        <p:txBody>
+          <a:bodyPr wrap="square" lIns="0" tIns="0" rIns="0" bIns="0" rtlCol="0" anchor="t">
+            <a:normAutofit/>
+          </a:bodyPr>
+          <a:lstStyle/>
+          <a:p>
+            <a:pPr marL="342900" indent="-342900">
+              <a:spcAft>
+                <a:spcPts val="800"/>
+              </a:spcAft>
+              <a:buSzPct val="100000"/>
+              <a:buChar char="•"/>
+            </a:pPr>
+            <a:r>
+              <a:rPr lang="en-US" sz="1350" dirty="0">
+                <a:solidFill>
+                  <a:srgbClr val="1C2833"/>
+                </a:solidFill>
+                <a:latin typeface="Calibri" pitchFamily="34" charset="0"/>
+                <a:ea typeface="Calibri" pitchFamily="34" charset="-122"/>
+                <a:cs typeface="Calibri" pitchFamily="34" charset="-120"/>
+              </a:rPr>
+              <a:t>Hyderabad district: 41.0%. The rest of Telangana: 18.6%.</a:t>
+            </a:r>
+            <a:endParaRPr lang="en-US" sz="1350" dirty="0"/>
+          </a:p>
+          <a:p>
+            <a:pPr marL="342900" indent="-342900">
+              <a:spcAft>
+                <a:spcPts val="800"/>
+              </a:spcAft>
+              <a:buSzPct val="100000"/>
+              <a:buChar char="•"/>
+            </a:pPr>
+            <a:r>
+              <a:rPr lang="en-US" sz="1350" dirty="0">
+                <a:solidFill>
+                  <a:srgbClr val="1C2833"/>
+                </a:solidFill>
+                <a:latin typeface="Calibri" pitchFamily="34" charset="0"/>
+                <a:ea typeface="Calibri" pitchFamily="34" charset="-122"/>
+                <a:cs typeface="Calibri" pitchFamily="34" charset="-120"/>
+              </a:rPr>
+              <a:t>The removals follow the capital region, not the Old City.</a:t>
+            </a:r>
+            <a:endParaRPr lang="en-US" sz="1350" dirty="0"/>
+          </a:p>
+          <a:p>
+            <a:pPr marL="342900" indent="-342900">
+              <a:spcAft>
+                <a:spcPts val="800"/>
+              </a:spcAft>
+              <a:buSzPct val="100000"/>
+              <a:buChar char="•"/>
+            </a:pPr>
+            <a:r>
+              <a:rPr lang="en-US" sz="1350" dirty="0">
+                <a:solidFill>
+                  <a:srgbClr val="1C2833"/>
+                </a:solidFill>
+                <a:latin typeface="Calibri" pitchFamily="34" charset="0"/>
+                <a:ea typeface="Calibri" pitchFamily="34" charset="-122"/>
+                <a:cs typeface="Calibri" pitchFamily="34" charset="-120"/>
+              </a:rPr>
+              <a:t>The state publishes totals only below the district: no split by reason.</a:t>
+            </a:r>
+            <a:endParaRPr lang="en-US" sz="1350" dirty="0"/>
+          </a:p>
+        </p:txBody>
+      </p:sp>
+    </p:spTree>
+  </p:cSld>
+  <p:clrMapOvr>
+    <a:masterClrMapping/>
+  </p:clrMapOvr>
+</p:sld>
+</file>
+
+<file path=ppt/slides/slide7.xml><?xml version="1.0" encoding="utf-8"?>
+<p:sld xmlns:a="http://schemas.openxmlformats.org/drawingml/2006/main" xmlns:r="http://schemas.openxmlformats.org/officeDocument/2006/relationships" xmlns:p="http://schemas.openxmlformats.org/presentationml/2006/main">
+  <p:cSld name="Slide 7">
+    <p:spTree>
+      <p:nvGrpSpPr>
+        <p:cNvPr id="1" name=""/>
+        <p:cNvGrpSpPr/>
+        <p:nvPr/>
+      </p:nvGrpSpPr>
+      <p:grpSpPr>
+        <a:xfrm>
+          <a:off x="0" y="0"/>
+          <a:ext cx="0" cy="0"/>
+          <a:chOff x="0" y="0"/>
+          <a:chExt cx="0" cy="0"/>
+        </a:xfrm>
+      </p:grpSpPr>
+      <p:sp>
+        <p:nvSpPr>
+          <p:cNvPr id="2" name="Text 0"/>
+          <p:cNvSpPr txBox="1"/>
+          <p:nvPr/>
+        </p:nvSpPr>
+        <p:spPr>
+          <a:xfrm>
+            <a:off x="548640" y="256032"/>
+            <a:ext cx="11094415" cy="274320"/>
+          </a:xfrm>
+          <a:prstGeom prst="rect">
+            <a:avLst/>
+          </a:prstGeom>
+          <a:noFill/>
+          <a:ln/>
+        </p:spPr>
+        <p:txBody>
+          <a:bodyPr wrap="square" lIns="0" tIns="0" rIns="0" bIns="0" rtlCol="0" anchor="ctr"/>
+          <a:lstStyle/>
+          <a:p>
+            <a:pPr indent="0" marL="0">
+              <a:buNone/>
+            </a:pPr>
+            <a:r>
+              <a:rPr lang="en-US" sz="1100" b="1" spc="200" kern="0" dirty="0">
+                <a:solidFill>
+                  <a:srgbClr val="8B1E3F"/>
+                </a:solidFill>
+                <a:latin typeface="Calibri" pitchFamily="34" charset="0"/>
+                <a:ea typeface="Calibri" pitchFamily="34" charset="-122"/>
+                <a:cs typeface="Calibri" pitchFamily="34" charset="-120"/>
+              </a:rPr>
               <a:t>AGE, SEX, RELIGION, 2002</a:t>
             </a:r>
             <a:endParaRPr lang="en-US" sz="1100" dirty="0"/>
@@ -37150,7 +39965,7 @@
                 <a:ea typeface="Calibri" pitchFamily="34" charset="-122"/>
                 <a:cs typeface="Calibri" pitchFamily="34" charset="-120"/>
               </a:rPr>
-              <a:t>6</a:t>
+              <a:t>7</a:t>
             </a:r>
             <a:endParaRPr lang="en-US" sz="900" dirty="0"/>
           </a:p>
@@ -38067,9 +40882,9 @@
 </p:sld>
 </file>
 
-<file path=ppt/slides/slide7.xml><?xml version="1.0" encoding="utf-8"?>
+<file path=ppt/slides/slide8.xml><?xml version="1.0" encoding="utf-8"?>
 <p:sld xmlns:a="http://schemas.openxmlformats.org/drawingml/2006/main" xmlns:r="http://schemas.openxmlformats.org/officeDocument/2006/relationships" xmlns:p="http://schemas.openxmlformats.org/presentationml/2006/main">
-  <p:cSld name="Slide 7">
+  <p:cSld name="Slide 8">
     <p:spTree>
       <p:nvGrpSpPr>
         <p:cNvPr id="1" name=""/>
@@ -38275,7 +41090,7 @@
                 <a:ea typeface="Calibri" pitchFamily="34" charset="-122"/>
                 <a:cs typeface="Calibri" pitchFamily="34" charset="-120"/>
               </a:rPr>
-              <a:t>7</a:t>
+              <a:t>8</a:t>
             </a:r>
             <a:endParaRPr lang="en-US" sz="900" dirty="0"/>
           </a:p>
@@ -39192,9 +42007,9 @@
 </p:sld>
 </file>
 
-<file path=ppt/slides/slide8.xml><?xml version="1.0" encoding="utf-8"?>
+<file path=ppt/slides/slide9.xml><?xml version="1.0" encoding="utf-8"?>
 <p:sld xmlns:a="http://schemas.openxmlformats.org/drawingml/2006/main" xmlns:r="http://schemas.openxmlformats.org/officeDocument/2006/relationships" xmlns:p="http://schemas.openxmlformats.org/presentationml/2006/main">
-  <p:cSld name="Slide 8">
+  <p:cSld name="Slide 9">
     <p:spTree>
       <p:nvGrpSpPr>
         <p:cNvPr id="1" name=""/>
@@ -39400,7 +42215,7 @@
                 <a:ea typeface="Calibri" pitchFamily="34" charset="-122"/>
                 <a:cs typeface="Calibri" pitchFamily="34" charset="-120"/>
               </a:rPr>
-              <a:t>8</a:t>
+              <a:t>9</a:t>
             </a:r>
             <a:endParaRPr lang="en-US" sz="900" dirty="0"/>
           </a:p>
@@ -40304,1110 +43119,6 @@
                 <a:cs typeface="Calibri" pitchFamily="34" charset="-120"/>
               </a:rPr>
               <a:t>Religion is estimated from names; the roll records none.</a:t>
-            </a:r>
-            <a:endParaRPr lang="en-US" sz="1400" dirty="0"/>
-          </a:p>
-        </p:txBody>
-      </p:sp>
-    </p:spTree>
-  </p:cSld>
-  <p:clrMapOvr>
-    <a:masterClrMapping/>
-  </p:clrMapOvr>
-</p:sld>
-</file>
-
-<file path=ppt/slides/slide9.xml><?xml version="1.0" encoding="utf-8"?>
-<p:sld xmlns:a="http://schemas.openxmlformats.org/drawingml/2006/main" xmlns:r="http://schemas.openxmlformats.org/officeDocument/2006/relationships" xmlns:p="http://schemas.openxmlformats.org/presentationml/2006/main">
-  <p:cSld name="Slide 9">
-    <p:spTree>
-      <p:nvGrpSpPr>
-        <p:cNvPr id="1" name=""/>
-        <p:cNvGrpSpPr/>
-        <p:nvPr/>
-      </p:nvGrpSpPr>
-      <p:grpSpPr>
-        <a:xfrm>
-          <a:off x="0" y="0"/>
-          <a:ext cx="0" cy="0"/>
-          <a:chOff x="0" y="0"/>
-          <a:chExt cx="0" cy="0"/>
-        </a:xfrm>
-      </p:grpSpPr>
-      <p:sp>
-        <p:nvSpPr>
-          <p:cNvPr id="2" name="Text 0"/>
-          <p:cNvSpPr txBox="1"/>
-          <p:nvPr/>
-        </p:nvSpPr>
-        <p:spPr>
-          <a:xfrm>
-            <a:off x="548640" y="256032"/>
-            <a:ext cx="11094415" cy="274320"/>
-          </a:xfrm>
-          <a:prstGeom prst="rect">
-            <a:avLst/>
-          </a:prstGeom>
-          <a:noFill/>
-          <a:ln/>
-        </p:spPr>
-        <p:txBody>
-          <a:bodyPr wrap="square" lIns="0" tIns="0" rIns="0" bIns="0" rtlCol="0" anchor="ctr"/>
-          <a:lstStyle/>
-          <a:p>
-            <a:pPr indent="0" marL="0">
-              <a:buNone/>
-            </a:pPr>
-            <a:r>
-              <a:rPr lang="en-US" sz="1100" b="1" spc="200" kern="0" dirty="0">
-                <a:solidFill>
-                  <a:srgbClr val="8B1E3F"/>
-                </a:solidFill>
-                <a:latin typeface="Calibri" pitchFamily="34" charset="0"/>
-                <a:ea typeface="Calibri" pitchFamily="34" charset="-122"/>
-                <a:cs typeface="Calibri" pitchFamily="34" charset="-120"/>
-              </a:rPr>
-              <a:t>AGE, SEX, RELIGION, 2002</a:t>
-            </a:r>
-            <a:endParaRPr lang="en-US" sz="1100" dirty="0"/>
-          </a:p>
-        </p:txBody>
-      </p:sp>
-      <p:sp>
-        <p:nvSpPr>
-          <p:cNvPr id="3" name="Text 1"/>
-          <p:cNvSpPr txBox="1"/>
-          <p:nvPr/>
-        </p:nvSpPr>
-        <p:spPr>
-          <a:xfrm>
-            <a:off x="548640" y="530352"/>
-            <a:ext cx="11094415" cy="914400"/>
-          </a:xfrm>
-          <a:prstGeom prst="rect">
-            <a:avLst/>
-          </a:prstGeom>
-          <a:noFill/>
-          <a:ln/>
-        </p:spPr>
-        <p:txBody>
-          <a:bodyPr wrap="square" lIns="0" tIns="0" rIns="0" bIns="0" rtlCol="0" anchor="t">
-            <a:normAutofit/>
-          </a:bodyPr>
-          <a:lstStyle/>
-          <a:p>
-            <a:pPr indent="0" marL="0">
-              <a:buNone/>
-            </a:pPr>
-            <a:r>
-              <a:rPr lang="en-US" sz="2700" b="1" dirty="0">
-                <a:solidFill>
-                  <a:srgbClr val="6E1832"/>
-                </a:solidFill>
-                <a:latin typeface="Cambria" pitchFamily="34" charset="0"/>
-                <a:ea typeface="Cambria" pitchFamily="34" charset="-122"/>
-                <a:cs typeface="Cambria" pitchFamily="34" charset="-120"/>
-              </a:rPr>
-              <a:t>Women and men were struck off at similar rates, 39.9% and 40.5%</a:t>
-            </a:r>
-            <a:endParaRPr lang="en-US" sz="2700" dirty="0"/>
-          </a:p>
-        </p:txBody>
-      </p:sp>
-      <p:sp>
-        <p:nvSpPr>
-          <p:cNvPr id="4" name="Text 2"/>
-          <p:cNvSpPr txBox="1"/>
-          <p:nvPr/>
-        </p:nvSpPr>
-        <p:spPr>
-          <a:xfrm>
-            <a:off x="548640" y="1463040"/>
-            <a:ext cx="11094415" cy="365760"/>
-          </a:xfrm>
-          <a:prstGeom prst="rect">
-            <a:avLst/>
-          </a:prstGeom>
-          <a:noFill/>
-          <a:ln/>
-        </p:spPr>
-        <p:txBody>
-          <a:bodyPr wrap="square" lIns="0" tIns="0" rIns="0" bIns="0" rtlCol="0" anchor="t"/>
-          <a:lstStyle/>
-          <a:p>
-            <a:pPr indent="0" marL="0">
-              <a:buNone/>
-            </a:pPr>
-            <a:r>
-              <a:rPr lang="en-US" sz="1400" dirty="0">
-                <a:solidFill>
-                  <a:srgbClr val="4D5B69"/>
-                </a:solidFill>
-                <a:latin typeface="Calibri" pitchFamily="34" charset="0"/>
-                <a:ea typeface="Calibri" pitchFamily="34" charset="-122"/>
-                <a:cs typeface="Calibri" pitchFamily="34" charset="-120"/>
-              </a:rPr>
-              <a:t>Share struck off by sex, constituency by constituency</a:t>
-            </a:r>
-            <a:endParaRPr lang="en-US" sz="1400" dirty="0"/>
-          </a:p>
-        </p:txBody>
-      </p:sp>
-      <p:sp>
-        <p:nvSpPr>
-          <p:cNvPr id="5" name="Text 3"/>
-          <p:cNvSpPr txBox="1"/>
-          <p:nvPr/>
-        </p:nvSpPr>
-        <p:spPr>
-          <a:xfrm>
-            <a:off x="548640" y="6400800"/>
-            <a:ext cx="10180015" cy="274320"/>
-          </a:xfrm>
-          <a:prstGeom prst="rect">
-            <a:avLst/>
-          </a:prstGeom>
-          <a:noFill/>
-          <a:ln/>
-        </p:spPr>
-        <p:txBody>
-          <a:bodyPr wrap="square" lIns="0" tIns="0" rIns="0" bIns="0" rtlCol="0" anchor="ctr"/>
-          <a:lstStyle/>
-          <a:p>
-            <a:pPr indent="0" marL="0">
-              <a:buNone/>
-            </a:pPr>
-            <a:r>
-              <a:rPr lang="en-US" sz="900" dirty="0">
-                <a:solidFill>
-                  <a:srgbClr val="4D5B69"/>
-                </a:solidFill>
-                <a:latin typeface="Calibri" pitchFamily="34" charset="0"/>
-                <a:ea typeface="Calibri" pitchFamily="34" charset="-122"/>
-                <a:cs typeface="Calibri" pitchFamily="34" charset="-120"/>
-              </a:rPr>
-              <a:t>Hyderabad Old City SIR 2026 · Varna Sri Raman · aggregates only; no names or EPIC numbers</a:t>
-            </a:r>
-            <a:endParaRPr lang="en-US" sz="900" dirty="0"/>
-          </a:p>
-        </p:txBody>
-      </p:sp>
-      <p:sp>
-        <p:nvSpPr>
-          <p:cNvPr id="6" name="Text 4"/>
-          <p:cNvSpPr txBox="1"/>
-          <p:nvPr/>
-        </p:nvSpPr>
-        <p:spPr>
-          <a:xfrm>
-            <a:off x="10911535" y="6400800"/>
-            <a:ext cx="731520" cy="274320"/>
-          </a:xfrm>
-          <a:prstGeom prst="rect">
-            <a:avLst/>
-          </a:prstGeom>
-          <a:noFill/>
-          <a:ln/>
-        </p:spPr>
-        <p:txBody>
-          <a:bodyPr wrap="square" lIns="0" tIns="0" rIns="0" bIns="0" rtlCol="0" anchor="ctr"/>
-          <a:lstStyle/>
-          <a:p>
-            <a:pPr algn="r" indent="0" marL="0">
-              <a:buNone/>
-            </a:pPr>
-            <a:r>
-              <a:rPr lang="en-US" sz="900" dirty="0">
-                <a:solidFill>
-                  <a:srgbClr val="4D5B69"/>
-                </a:solidFill>
-                <a:latin typeface="Calibri" pitchFamily="34" charset="0"/>
-                <a:ea typeface="Calibri" pitchFamily="34" charset="-122"/>
-                <a:cs typeface="Calibri" pitchFamily="34" charset="-120"/>
-              </a:rPr>
-              <a:t>9</a:t>
-            </a:r>
-            <a:endParaRPr lang="en-US" sz="900" dirty="0"/>
-          </a:p>
-        </p:txBody>
-      </p:sp>
-      <p:sp>
-        <p:nvSpPr>
-          <p:cNvPr id="7" name="Shape 5"/>
-          <p:cNvSpPr/>
-          <p:nvPr/>
-        </p:nvSpPr>
-        <p:spPr>
-          <a:xfrm>
-            <a:off x="0" y="6748272"/>
-            <a:ext cx="304792" cy="109728"/>
-          </a:xfrm>
-          <a:prstGeom prst="rect">
-            <a:avLst/>
-          </a:prstGeom>
-          <a:solidFill>
-            <a:srgbClr val="8B1E3F"/>
-          </a:solidFill>
-          <a:ln/>
-        </p:spPr>
-      </p:sp>
-      <p:sp>
-        <p:nvSpPr>
-          <p:cNvPr id="8" name="Shape 6"/>
-          <p:cNvSpPr/>
-          <p:nvPr/>
-        </p:nvSpPr>
-        <p:spPr>
-          <a:xfrm>
-            <a:off x="304792" y="6748272"/>
-            <a:ext cx="304792" cy="109728"/>
-          </a:xfrm>
-          <a:prstGeom prst="rect">
-            <a:avLst/>
-          </a:prstGeom>
-          <a:solidFill>
-            <a:srgbClr val="0E5E6F"/>
-          </a:solidFill>
-          <a:ln/>
-        </p:spPr>
-      </p:sp>
-      <p:sp>
-        <p:nvSpPr>
-          <p:cNvPr id="9" name="Shape 7"/>
-          <p:cNvSpPr/>
-          <p:nvPr/>
-        </p:nvSpPr>
-        <p:spPr>
-          <a:xfrm>
-            <a:off x="609585" y="6748272"/>
-            <a:ext cx="304792" cy="109728"/>
-          </a:xfrm>
-          <a:prstGeom prst="rect">
-            <a:avLst/>
-          </a:prstGeom>
-          <a:solidFill>
-            <a:srgbClr val="E0A526"/>
-          </a:solidFill>
-          <a:ln/>
-        </p:spPr>
-      </p:sp>
-      <p:sp>
-        <p:nvSpPr>
-          <p:cNvPr id="10" name="Shape 8"/>
-          <p:cNvSpPr/>
-          <p:nvPr/>
-        </p:nvSpPr>
-        <p:spPr>
-          <a:xfrm>
-            <a:off x="914377" y="6748272"/>
-            <a:ext cx="304792" cy="109728"/>
-          </a:xfrm>
-          <a:prstGeom prst="rect">
-            <a:avLst/>
-          </a:prstGeom>
-          <a:solidFill>
-            <a:srgbClr val="0E5E6F"/>
-          </a:solidFill>
-          <a:ln/>
-        </p:spPr>
-      </p:sp>
-      <p:sp>
-        <p:nvSpPr>
-          <p:cNvPr id="11" name="Shape 9"/>
-          <p:cNvSpPr/>
-          <p:nvPr/>
-        </p:nvSpPr>
-        <p:spPr>
-          <a:xfrm>
-            <a:off x="1219170" y="6748272"/>
-            <a:ext cx="304792" cy="109728"/>
-          </a:xfrm>
-          <a:prstGeom prst="rect">
-            <a:avLst/>
-          </a:prstGeom>
-          <a:solidFill>
-            <a:srgbClr val="8B1E3F"/>
-          </a:solidFill>
-          <a:ln/>
-        </p:spPr>
-      </p:sp>
-      <p:sp>
-        <p:nvSpPr>
-          <p:cNvPr id="12" name="Shape 10"/>
-          <p:cNvSpPr/>
-          <p:nvPr/>
-        </p:nvSpPr>
-        <p:spPr>
-          <a:xfrm>
-            <a:off x="1523962" y="6748272"/>
-            <a:ext cx="304792" cy="109728"/>
-          </a:xfrm>
-          <a:prstGeom prst="rect">
-            <a:avLst/>
-          </a:prstGeom>
-          <a:solidFill>
-            <a:srgbClr val="0E5E6F"/>
-          </a:solidFill>
-          <a:ln/>
-        </p:spPr>
-      </p:sp>
-      <p:sp>
-        <p:nvSpPr>
-          <p:cNvPr id="13" name="Shape 11"/>
-          <p:cNvSpPr/>
-          <p:nvPr/>
-        </p:nvSpPr>
-        <p:spPr>
-          <a:xfrm>
-            <a:off x="1828754" y="6748272"/>
-            <a:ext cx="304792" cy="109728"/>
-          </a:xfrm>
-          <a:prstGeom prst="rect">
-            <a:avLst/>
-          </a:prstGeom>
-          <a:solidFill>
-            <a:srgbClr val="E0A526"/>
-          </a:solidFill>
-          <a:ln/>
-        </p:spPr>
-      </p:sp>
-      <p:sp>
-        <p:nvSpPr>
-          <p:cNvPr id="14" name="Shape 12"/>
-          <p:cNvSpPr/>
-          <p:nvPr/>
-        </p:nvSpPr>
-        <p:spPr>
-          <a:xfrm>
-            <a:off x="2133547" y="6748272"/>
-            <a:ext cx="304792" cy="109728"/>
-          </a:xfrm>
-          <a:prstGeom prst="rect">
-            <a:avLst/>
-          </a:prstGeom>
-          <a:solidFill>
-            <a:srgbClr val="0E5E6F"/>
-          </a:solidFill>
-          <a:ln/>
-        </p:spPr>
-      </p:sp>
-      <p:sp>
-        <p:nvSpPr>
-          <p:cNvPr id="15" name="Shape 13"/>
-          <p:cNvSpPr/>
-          <p:nvPr/>
-        </p:nvSpPr>
-        <p:spPr>
-          <a:xfrm>
-            <a:off x="2438339" y="6748272"/>
-            <a:ext cx="304792" cy="109728"/>
-          </a:xfrm>
-          <a:prstGeom prst="rect">
-            <a:avLst/>
-          </a:prstGeom>
-          <a:solidFill>
-            <a:srgbClr val="8B1E3F"/>
-          </a:solidFill>
-          <a:ln/>
-        </p:spPr>
-      </p:sp>
-      <p:sp>
-        <p:nvSpPr>
-          <p:cNvPr id="16" name="Shape 14"/>
-          <p:cNvSpPr/>
-          <p:nvPr/>
-        </p:nvSpPr>
-        <p:spPr>
-          <a:xfrm>
-            <a:off x="2743131" y="6748272"/>
-            <a:ext cx="304792" cy="109728"/>
-          </a:xfrm>
-          <a:prstGeom prst="rect">
-            <a:avLst/>
-          </a:prstGeom>
-          <a:solidFill>
-            <a:srgbClr val="0E5E6F"/>
-          </a:solidFill>
-          <a:ln/>
-        </p:spPr>
-      </p:sp>
-      <p:sp>
-        <p:nvSpPr>
-          <p:cNvPr id="17" name="Shape 15"/>
-          <p:cNvSpPr/>
-          <p:nvPr/>
-        </p:nvSpPr>
-        <p:spPr>
-          <a:xfrm>
-            <a:off x="3047924" y="6748272"/>
-            <a:ext cx="304792" cy="109728"/>
-          </a:xfrm>
-          <a:prstGeom prst="rect">
-            <a:avLst/>
-          </a:prstGeom>
-          <a:solidFill>
-            <a:srgbClr val="E0A526"/>
-          </a:solidFill>
-          <a:ln/>
-        </p:spPr>
-      </p:sp>
-      <p:sp>
-        <p:nvSpPr>
-          <p:cNvPr id="18" name="Shape 16"/>
-          <p:cNvSpPr/>
-          <p:nvPr/>
-        </p:nvSpPr>
-        <p:spPr>
-          <a:xfrm>
-            <a:off x="3352716" y="6748272"/>
-            <a:ext cx="304792" cy="109728"/>
-          </a:xfrm>
-          <a:prstGeom prst="rect">
-            <a:avLst/>
-          </a:prstGeom>
-          <a:solidFill>
-            <a:srgbClr val="0E5E6F"/>
-          </a:solidFill>
-          <a:ln/>
-        </p:spPr>
-      </p:sp>
-      <p:sp>
-        <p:nvSpPr>
-          <p:cNvPr id="19" name="Shape 17"/>
-          <p:cNvSpPr/>
-          <p:nvPr/>
-        </p:nvSpPr>
-        <p:spPr>
-          <a:xfrm>
-            <a:off x="3657509" y="6748272"/>
-            <a:ext cx="304792" cy="109728"/>
-          </a:xfrm>
-          <a:prstGeom prst="rect">
-            <a:avLst/>
-          </a:prstGeom>
-          <a:solidFill>
-            <a:srgbClr val="8B1E3F"/>
-          </a:solidFill>
-          <a:ln/>
-        </p:spPr>
-      </p:sp>
-      <p:sp>
-        <p:nvSpPr>
-          <p:cNvPr id="20" name="Shape 18"/>
-          <p:cNvSpPr/>
-          <p:nvPr/>
-        </p:nvSpPr>
-        <p:spPr>
-          <a:xfrm>
-            <a:off x="3962301" y="6748272"/>
-            <a:ext cx="304792" cy="109728"/>
-          </a:xfrm>
-          <a:prstGeom prst="rect">
-            <a:avLst/>
-          </a:prstGeom>
-          <a:solidFill>
-            <a:srgbClr val="0E5E6F"/>
-          </a:solidFill>
-          <a:ln/>
-        </p:spPr>
-      </p:sp>
-      <p:sp>
-        <p:nvSpPr>
-          <p:cNvPr id="21" name="Shape 19"/>
-          <p:cNvSpPr/>
-          <p:nvPr/>
-        </p:nvSpPr>
-        <p:spPr>
-          <a:xfrm>
-            <a:off x="4267093" y="6748272"/>
-            <a:ext cx="304792" cy="109728"/>
-          </a:xfrm>
-          <a:prstGeom prst="rect">
-            <a:avLst/>
-          </a:prstGeom>
-          <a:solidFill>
-            <a:srgbClr val="E0A526"/>
-          </a:solidFill>
-          <a:ln/>
-        </p:spPr>
-      </p:sp>
-      <p:sp>
-        <p:nvSpPr>
-          <p:cNvPr id="22" name="Shape 20"/>
-          <p:cNvSpPr/>
-          <p:nvPr/>
-        </p:nvSpPr>
-        <p:spPr>
-          <a:xfrm>
-            <a:off x="4571886" y="6748272"/>
-            <a:ext cx="304792" cy="109728"/>
-          </a:xfrm>
-          <a:prstGeom prst="rect">
-            <a:avLst/>
-          </a:prstGeom>
-          <a:solidFill>
-            <a:srgbClr val="0E5E6F"/>
-          </a:solidFill>
-          <a:ln/>
-        </p:spPr>
-      </p:sp>
-      <p:sp>
-        <p:nvSpPr>
-          <p:cNvPr id="23" name="Shape 21"/>
-          <p:cNvSpPr/>
-          <p:nvPr/>
-        </p:nvSpPr>
-        <p:spPr>
-          <a:xfrm>
-            <a:off x="4876678" y="6748272"/>
-            <a:ext cx="304792" cy="109728"/>
-          </a:xfrm>
-          <a:prstGeom prst="rect">
-            <a:avLst/>
-          </a:prstGeom>
-          <a:solidFill>
-            <a:srgbClr val="8B1E3F"/>
-          </a:solidFill>
-          <a:ln/>
-        </p:spPr>
-      </p:sp>
-      <p:sp>
-        <p:nvSpPr>
-          <p:cNvPr id="24" name="Shape 22"/>
-          <p:cNvSpPr/>
-          <p:nvPr/>
-        </p:nvSpPr>
-        <p:spPr>
-          <a:xfrm>
-            <a:off x="5181470" y="6748272"/>
-            <a:ext cx="304792" cy="109728"/>
-          </a:xfrm>
-          <a:prstGeom prst="rect">
-            <a:avLst/>
-          </a:prstGeom>
-          <a:solidFill>
-            <a:srgbClr val="0E5E6F"/>
-          </a:solidFill>
-          <a:ln/>
-        </p:spPr>
-      </p:sp>
-      <p:sp>
-        <p:nvSpPr>
-          <p:cNvPr id="25" name="Shape 23"/>
-          <p:cNvSpPr/>
-          <p:nvPr/>
-        </p:nvSpPr>
-        <p:spPr>
-          <a:xfrm>
-            <a:off x="5486263" y="6748272"/>
-            <a:ext cx="304792" cy="109728"/>
-          </a:xfrm>
-          <a:prstGeom prst="rect">
-            <a:avLst/>
-          </a:prstGeom>
-          <a:solidFill>
-            <a:srgbClr val="E0A526"/>
-          </a:solidFill>
-          <a:ln/>
-        </p:spPr>
-      </p:sp>
-      <p:sp>
-        <p:nvSpPr>
-          <p:cNvPr id="26" name="Shape 24"/>
-          <p:cNvSpPr/>
-          <p:nvPr/>
-        </p:nvSpPr>
-        <p:spPr>
-          <a:xfrm>
-            <a:off x="5791055" y="6748272"/>
-            <a:ext cx="304792" cy="109728"/>
-          </a:xfrm>
-          <a:prstGeom prst="rect">
-            <a:avLst/>
-          </a:prstGeom>
-          <a:solidFill>
-            <a:srgbClr val="0E5E6F"/>
-          </a:solidFill>
-          <a:ln/>
-        </p:spPr>
-      </p:sp>
-      <p:sp>
-        <p:nvSpPr>
-          <p:cNvPr id="27" name="Shape 25"/>
-          <p:cNvSpPr/>
-          <p:nvPr/>
-        </p:nvSpPr>
-        <p:spPr>
-          <a:xfrm>
-            <a:off x="6095848" y="6748272"/>
-            <a:ext cx="304792" cy="109728"/>
-          </a:xfrm>
-          <a:prstGeom prst="rect">
-            <a:avLst/>
-          </a:prstGeom>
-          <a:solidFill>
-            <a:srgbClr val="8B1E3F"/>
-          </a:solidFill>
-          <a:ln/>
-        </p:spPr>
-      </p:sp>
-      <p:sp>
-        <p:nvSpPr>
-          <p:cNvPr id="28" name="Shape 26"/>
-          <p:cNvSpPr/>
-          <p:nvPr/>
-        </p:nvSpPr>
-        <p:spPr>
-          <a:xfrm>
-            <a:off x="6400640" y="6748272"/>
-            <a:ext cx="304792" cy="109728"/>
-          </a:xfrm>
-          <a:prstGeom prst="rect">
-            <a:avLst/>
-          </a:prstGeom>
-          <a:solidFill>
-            <a:srgbClr val="0E5E6F"/>
-          </a:solidFill>
-          <a:ln/>
-        </p:spPr>
-      </p:sp>
-      <p:sp>
-        <p:nvSpPr>
-          <p:cNvPr id="29" name="Shape 27"/>
-          <p:cNvSpPr/>
-          <p:nvPr/>
-        </p:nvSpPr>
-        <p:spPr>
-          <a:xfrm>
-            <a:off x="6705432" y="6748272"/>
-            <a:ext cx="304792" cy="109728"/>
-          </a:xfrm>
-          <a:prstGeom prst="rect">
-            <a:avLst/>
-          </a:prstGeom>
-          <a:solidFill>
-            <a:srgbClr val="E0A526"/>
-          </a:solidFill>
-          <a:ln/>
-        </p:spPr>
-      </p:sp>
-      <p:sp>
-        <p:nvSpPr>
-          <p:cNvPr id="30" name="Shape 28"/>
-          <p:cNvSpPr/>
-          <p:nvPr/>
-        </p:nvSpPr>
-        <p:spPr>
-          <a:xfrm>
-            <a:off x="7010225" y="6748272"/>
-            <a:ext cx="304792" cy="109728"/>
-          </a:xfrm>
-          <a:prstGeom prst="rect">
-            <a:avLst/>
-          </a:prstGeom>
-          <a:solidFill>
-            <a:srgbClr val="0E5E6F"/>
-          </a:solidFill>
-          <a:ln/>
-        </p:spPr>
-      </p:sp>
-      <p:sp>
-        <p:nvSpPr>
-          <p:cNvPr id="31" name="Shape 29"/>
-          <p:cNvSpPr/>
-          <p:nvPr/>
-        </p:nvSpPr>
-        <p:spPr>
-          <a:xfrm>
-            <a:off x="7315017" y="6748272"/>
-            <a:ext cx="304792" cy="109728"/>
-          </a:xfrm>
-          <a:prstGeom prst="rect">
-            <a:avLst/>
-          </a:prstGeom>
-          <a:solidFill>
-            <a:srgbClr val="8B1E3F"/>
-          </a:solidFill>
-          <a:ln/>
-        </p:spPr>
-      </p:sp>
-      <p:sp>
-        <p:nvSpPr>
-          <p:cNvPr id="32" name="Shape 30"/>
-          <p:cNvSpPr/>
-          <p:nvPr/>
-        </p:nvSpPr>
-        <p:spPr>
-          <a:xfrm>
-            <a:off x="7619809" y="6748272"/>
-            <a:ext cx="304792" cy="109728"/>
-          </a:xfrm>
-          <a:prstGeom prst="rect">
-            <a:avLst/>
-          </a:prstGeom>
-          <a:solidFill>
-            <a:srgbClr val="0E5E6F"/>
-          </a:solidFill>
-          <a:ln/>
-        </p:spPr>
-      </p:sp>
-      <p:sp>
-        <p:nvSpPr>
-          <p:cNvPr id="33" name="Shape 31"/>
-          <p:cNvSpPr/>
-          <p:nvPr/>
-        </p:nvSpPr>
-        <p:spPr>
-          <a:xfrm>
-            <a:off x="7924602" y="6748272"/>
-            <a:ext cx="304792" cy="109728"/>
-          </a:xfrm>
-          <a:prstGeom prst="rect">
-            <a:avLst/>
-          </a:prstGeom>
-          <a:solidFill>
-            <a:srgbClr val="E0A526"/>
-          </a:solidFill>
-          <a:ln/>
-        </p:spPr>
-      </p:sp>
-      <p:sp>
-        <p:nvSpPr>
-          <p:cNvPr id="34" name="Shape 32"/>
-          <p:cNvSpPr/>
-          <p:nvPr/>
-        </p:nvSpPr>
-        <p:spPr>
-          <a:xfrm>
-            <a:off x="8229394" y="6748272"/>
-            <a:ext cx="304792" cy="109728"/>
-          </a:xfrm>
-          <a:prstGeom prst="rect">
-            <a:avLst/>
-          </a:prstGeom>
-          <a:solidFill>
-            <a:srgbClr val="0E5E6F"/>
-          </a:solidFill>
-          <a:ln/>
-        </p:spPr>
-      </p:sp>
-      <p:sp>
-        <p:nvSpPr>
-          <p:cNvPr id="35" name="Shape 33"/>
-          <p:cNvSpPr/>
-          <p:nvPr/>
-        </p:nvSpPr>
-        <p:spPr>
-          <a:xfrm>
-            <a:off x="8534187" y="6748272"/>
-            <a:ext cx="304792" cy="109728"/>
-          </a:xfrm>
-          <a:prstGeom prst="rect">
-            <a:avLst/>
-          </a:prstGeom>
-          <a:solidFill>
-            <a:srgbClr val="8B1E3F"/>
-          </a:solidFill>
-          <a:ln/>
-        </p:spPr>
-      </p:sp>
-      <p:sp>
-        <p:nvSpPr>
-          <p:cNvPr id="36" name="Shape 34"/>
-          <p:cNvSpPr/>
-          <p:nvPr/>
-        </p:nvSpPr>
-        <p:spPr>
-          <a:xfrm>
-            <a:off x="8838979" y="6748272"/>
-            <a:ext cx="304792" cy="109728"/>
-          </a:xfrm>
-          <a:prstGeom prst="rect">
-            <a:avLst/>
-          </a:prstGeom>
-          <a:solidFill>
-            <a:srgbClr val="0E5E6F"/>
-          </a:solidFill>
-          <a:ln/>
-        </p:spPr>
-      </p:sp>
-      <p:sp>
-        <p:nvSpPr>
-          <p:cNvPr id="37" name="Shape 35"/>
-          <p:cNvSpPr/>
-          <p:nvPr/>
-        </p:nvSpPr>
-        <p:spPr>
-          <a:xfrm>
-            <a:off x="9143771" y="6748272"/>
-            <a:ext cx="304792" cy="109728"/>
-          </a:xfrm>
-          <a:prstGeom prst="rect">
-            <a:avLst/>
-          </a:prstGeom>
-          <a:solidFill>
-            <a:srgbClr val="E0A526"/>
-          </a:solidFill>
-          <a:ln/>
-        </p:spPr>
-      </p:sp>
-      <p:sp>
-        <p:nvSpPr>
-          <p:cNvPr id="38" name="Shape 36"/>
-          <p:cNvSpPr/>
-          <p:nvPr/>
-        </p:nvSpPr>
-        <p:spPr>
-          <a:xfrm>
-            <a:off x="9448564" y="6748272"/>
-            <a:ext cx="304792" cy="109728"/>
-          </a:xfrm>
-          <a:prstGeom prst="rect">
-            <a:avLst/>
-          </a:prstGeom>
-          <a:solidFill>
-            <a:srgbClr val="0E5E6F"/>
-          </a:solidFill>
-          <a:ln/>
-        </p:spPr>
-      </p:sp>
-      <p:sp>
-        <p:nvSpPr>
-          <p:cNvPr id="39" name="Shape 37"/>
-          <p:cNvSpPr/>
-          <p:nvPr/>
-        </p:nvSpPr>
-        <p:spPr>
-          <a:xfrm>
-            <a:off x="9753356" y="6748272"/>
-            <a:ext cx="304792" cy="109728"/>
-          </a:xfrm>
-          <a:prstGeom prst="rect">
-            <a:avLst/>
-          </a:prstGeom>
-          <a:solidFill>
-            <a:srgbClr val="8B1E3F"/>
-          </a:solidFill>
-          <a:ln/>
-        </p:spPr>
-      </p:sp>
-      <p:sp>
-        <p:nvSpPr>
-          <p:cNvPr id="40" name="Shape 38"/>
-          <p:cNvSpPr/>
-          <p:nvPr/>
-        </p:nvSpPr>
-        <p:spPr>
-          <a:xfrm>
-            <a:off x="10058149" y="6748272"/>
-            <a:ext cx="304792" cy="109728"/>
-          </a:xfrm>
-          <a:prstGeom prst="rect">
-            <a:avLst/>
-          </a:prstGeom>
-          <a:solidFill>
-            <a:srgbClr val="0E5E6F"/>
-          </a:solidFill>
-          <a:ln/>
-        </p:spPr>
-      </p:sp>
-      <p:sp>
-        <p:nvSpPr>
-          <p:cNvPr id="41" name="Shape 39"/>
-          <p:cNvSpPr/>
-          <p:nvPr/>
-        </p:nvSpPr>
-        <p:spPr>
-          <a:xfrm>
-            <a:off x="10362941" y="6748272"/>
-            <a:ext cx="304792" cy="109728"/>
-          </a:xfrm>
-          <a:prstGeom prst="rect">
-            <a:avLst/>
-          </a:prstGeom>
-          <a:solidFill>
-            <a:srgbClr val="E0A526"/>
-          </a:solidFill>
-          <a:ln/>
-        </p:spPr>
-      </p:sp>
-      <p:sp>
-        <p:nvSpPr>
-          <p:cNvPr id="42" name="Shape 40"/>
-          <p:cNvSpPr/>
-          <p:nvPr/>
-        </p:nvSpPr>
-        <p:spPr>
-          <a:xfrm>
-            <a:off x="10667733" y="6748272"/>
-            <a:ext cx="304792" cy="109728"/>
-          </a:xfrm>
-          <a:prstGeom prst="rect">
-            <a:avLst/>
-          </a:prstGeom>
-          <a:solidFill>
-            <a:srgbClr val="0E5E6F"/>
-          </a:solidFill>
-          <a:ln/>
-        </p:spPr>
-      </p:sp>
-      <p:sp>
-        <p:nvSpPr>
-          <p:cNvPr id="43" name="Shape 41"/>
-          <p:cNvSpPr/>
-          <p:nvPr/>
-        </p:nvSpPr>
-        <p:spPr>
-          <a:xfrm>
-            <a:off x="10972526" y="6748272"/>
-            <a:ext cx="304792" cy="109728"/>
-          </a:xfrm>
-          <a:prstGeom prst="rect">
-            <a:avLst/>
-          </a:prstGeom>
-          <a:solidFill>
-            <a:srgbClr val="8B1E3F"/>
-          </a:solidFill>
-          <a:ln/>
-        </p:spPr>
-      </p:sp>
-      <p:sp>
-        <p:nvSpPr>
-          <p:cNvPr id="44" name="Shape 42"/>
-          <p:cNvSpPr/>
-          <p:nvPr/>
-        </p:nvSpPr>
-        <p:spPr>
-          <a:xfrm>
-            <a:off x="11277318" y="6748272"/>
-            <a:ext cx="304792" cy="109728"/>
-          </a:xfrm>
-          <a:prstGeom prst="rect">
-            <a:avLst/>
-          </a:prstGeom>
-          <a:solidFill>
-            <a:srgbClr val="0E5E6F"/>
-          </a:solidFill>
-          <a:ln/>
-        </p:spPr>
-      </p:sp>
-      <p:sp>
-        <p:nvSpPr>
-          <p:cNvPr id="45" name="Shape 43"/>
-          <p:cNvSpPr/>
-          <p:nvPr/>
-        </p:nvSpPr>
-        <p:spPr>
-          <a:xfrm>
-            <a:off x="11582110" y="6748272"/>
-            <a:ext cx="304792" cy="109728"/>
-          </a:xfrm>
-          <a:prstGeom prst="rect">
-            <a:avLst/>
-          </a:prstGeom>
-          <a:solidFill>
-            <a:srgbClr val="E0A526"/>
-          </a:solidFill>
-          <a:ln/>
-        </p:spPr>
-      </p:sp>
-      <p:sp>
-        <p:nvSpPr>
-          <p:cNvPr id="46" name="Shape 44"/>
-          <p:cNvSpPr/>
-          <p:nvPr/>
-        </p:nvSpPr>
-        <p:spPr>
-          <a:xfrm>
-            <a:off x="11886903" y="6748272"/>
-            <a:ext cx="304792" cy="109728"/>
-          </a:xfrm>
-          <a:prstGeom prst="rect">
-            <a:avLst/>
-          </a:prstGeom>
-          <a:solidFill>
-            <a:srgbClr val="0E5E6F"/>
-          </a:solidFill>
-          <a:ln/>
-        </p:spPr>
-      </p:sp>
-      <p:graphicFrame>
-        <p:nvGraphicFramePr>
-          <p:cNvPr id="47" name="Chart 0" descr=""/>
-          <p:cNvGraphicFramePr/>
-          <p:nvPr/>
-        </p:nvGraphicFramePr>
-        <p:xfrm>
-          <a:off x="548640" y="1920240"/>
-          <a:ext cx="7040880" cy="4343400"/>
-        </p:xfrm>
-        <a:graphic xmlns:a="http://schemas.openxmlformats.org/drawingml/2006/main">
-          <a:graphicData uri="http://schemas.openxmlformats.org/drawingml/2006/chart">
-            <c:chart xmlns:c="http://schemas.openxmlformats.org/drawingml/2006/chart" r:id="rId1"/>
-          </a:graphicData>
-        </a:graphic>
-      </p:graphicFrame>
-      <p:sp>
-        <p:nvSpPr>
-          <p:cNvPr id="48" name="Text 45"/>
-          <p:cNvSpPr txBox="1"/>
-          <p:nvPr/>
-        </p:nvSpPr>
-        <p:spPr>
-          <a:xfrm>
-            <a:off x="7909560" y="2011680"/>
-            <a:ext cx="3733495" cy="4251960"/>
-          </a:xfrm>
-          <a:prstGeom prst="rect">
-            <a:avLst/>
-          </a:prstGeom>
-          <a:noFill/>
-          <a:ln/>
-        </p:spPr>
-        <p:txBody>
-          <a:bodyPr wrap="square" lIns="0" tIns="0" rIns="0" bIns="0" rtlCol="0" anchor="t">
-            <a:normAutofit/>
-          </a:bodyPr>
-          <a:lstStyle/>
-          <a:p>
-            <a:pPr marL="342900" indent="-342900">
-              <a:spcAft>
-                <a:spcPts val="800"/>
-              </a:spcAft>
-              <a:buSzPct val="100000"/>
-              <a:buChar char="•"/>
-            </a:pPr>
-            <a:r>
-              <a:rPr lang="en-US" sz="1400" dirty="0">
-                <a:solidFill>
-                  <a:srgbClr val="1C2833"/>
-                </a:solidFill>
-                <a:latin typeface="Calibri" pitchFamily="34" charset="0"/>
-                <a:ea typeface="Calibri" pitchFamily="34" charset="-122"/>
-                <a:cs typeface="Calibri" pitchFamily="34" charset="-120"/>
-              </a:rPr>
-              <a:t>Inside the same part the gaps are under 2.5 points either way.</a:t>
-            </a:r>
-            <a:endParaRPr lang="en-US" sz="1400" dirty="0"/>
-          </a:p>
-          <a:p>
-            <a:pPr marL="342900" indent="-342900">
-              <a:spcAft>
-                <a:spcPts val="800"/>
-              </a:spcAft>
-              <a:buSzPct val="100000"/>
-              <a:buChar char="•"/>
-            </a:pPr>
-            <a:r>
-              <a:rPr lang="en-US" sz="1400" dirty="0">
-                <a:solidFill>
-                  <a:srgbClr val="1C2833"/>
-                </a:solidFill>
-                <a:latin typeface="Calibri" pitchFamily="34" charset="0"/>
-                <a:ea typeface="Calibri" pitchFamily="34" charset="-122"/>
-                <a:cs typeface="Calibri" pitchFamily="34" charset="-120"/>
-              </a:rPr>
-              <a:t>In Bihar, women were 55.5% of the removed. The Old City shows no such gap.</a:t>
             </a:r>
             <a:endParaRPr lang="en-US" sz="1400" dirty="0"/>
           </a:p>

--- a/reports/hyderabad-old-city-sir-2026-deck.pptx
+++ b/reports/hyderabad-old-city-sir-2026-deck.pptx
@@ -127,7 +127,7 @@
 </p:presentation>
 </file>
 
-<file path=ppt/charts/chart21.xml><?xml version="1.0" encoding="utf-8"?>
+<file path=ppt/charts/chart23.xml><?xml version="1.0" encoding="utf-8"?>
 <c:chartSpace xmlns:c="http://schemas.openxmlformats.org/drawingml/2006/chart" xmlns:a="http://schemas.openxmlformats.org/drawingml/2006/main" xmlns:r="http://schemas.openxmlformats.org/officeDocument/2006/relationships">
   <c:date1904 val="0"/>
   <c:roundedCorners val="1"/>
@@ -591,7 +591,7 @@
 </c:chartSpace>
 </file>
 
-<file path=ppt/charts/chart22.xml><?xml version="1.0" encoding="utf-8"?>
+<file path=ppt/charts/chart24.xml><?xml version="1.0" encoding="utf-8"?>
 <c:chartSpace xmlns:c="http://schemas.openxmlformats.org/drawingml/2006/chart" xmlns:a="http://schemas.openxmlformats.org/drawingml/2006/main" xmlns:r="http://schemas.openxmlformats.org/officeDocument/2006/relationships">
   <c:date1904 val="0"/>
   <c:roundedCorners val="1"/>
@@ -1145,7 +1145,7 @@
 </c:chartSpace>
 </file>
 
-<file path=ppt/charts/chart23.xml><?xml version="1.0" encoding="utf-8"?>
+<file path=ppt/charts/chart25.xml><?xml version="1.0" encoding="utf-8"?>
 <c:chartSpace xmlns:c="http://schemas.openxmlformats.org/drawingml/2006/chart" xmlns:a="http://schemas.openxmlformats.org/drawingml/2006/main" xmlns:r="http://schemas.openxmlformats.org/officeDocument/2006/relationships">
   <c:date1904 val="0"/>
   <c:roundedCorners val="1"/>
@@ -1622,7 +1622,7 @@
 </c:chartSpace>
 </file>
 
-<file path=ppt/charts/chart24.xml><?xml version="1.0" encoding="utf-8"?>
+<file path=ppt/charts/chart26.xml><?xml version="1.0" encoding="utf-8"?>
 <c:chartSpace xmlns:c="http://schemas.openxmlformats.org/drawingml/2006/chart" xmlns:a="http://schemas.openxmlformats.org/drawingml/2006/main" xmlns:r="http://schemas.openxmlformats.org/officeDocument/2006/relationships">
   <c:date1904 val="0"/>
   <c:roundedCorners val="1"/>
@@ -1892,7 +1892,7 @@
 </c:chartSpace>
 </file>
 
-<file path=ppt/charts/chart25.xml><?xml version="1.0" encoding="utf-8"?>
+<file path=ppt/charts/chart27.xml><?xml version="1.0" encoding="utf-8"?>
 <c:chartSpace xmlns:c="http://schemas.openxmlformats.org/drawingml/2006/chart" xmlns:a="http://schemas.openxmlformats.org/drawingml/2006/main" xmlns:r="http://schemas.openxmlformats.org/officeDocument/2006/relationships">
   <c:date1904 val="0"/>
   <c:roundedCorners val="1"/>
@@ -2244,7 +2244,7 @@
 </c:chartSpace>
 </file>
 
-<file path=ppt/charts/chart26.xml><?xml version="1.0" encoding="utf-8"?>
+<file path=ppt/charts/chart28.xml><?xml version="1.0" encoding="utf-8"?>
 <c:chartSpace xmlns:c="http://schemas.openxmlformats.org/drawingml/2006/chart" xmlns:a="http://schemas.openxmlformats.org/drawingml/2006/main" xmlns:r="http://schemas.openxmlformats.org/officeDocument/2006/relationships">
   <c:date1904 val="0"/>
   <c:roundedCorners val="1"/>
@@ -2608,7 +2608,7 @@
 </c:chartSpace>
 </file>
 
-<file path=ppt/charts/chart27.xml><?xml version="1.0" encoding="utf-8"?>
+<file path=ppt/charts/chart29.xml><?xml version="1.0" encoding="utf-8"?>
 <c:chartSpace xmlns:c="http://schemas.openxmlformats.org/drawingml/2006/chart" xmlns:a="http://schemas.openxmlformats.org/drawingml/2006/main" xmlns:r="http://schemas.openxmlformats.org/officeDocument/2006/relationships">
   <c:date1904 val="0"/>
   <c:roundedCorners val="1"/>
@@ -2972,7 +2972,7 @@
 </c:chartSpace>
 </file>
 
-<file path=ppt/charts/chart28.xml><?xml version="1.0" encoding="utf-8"?>
+<file path=ppt/charts/chart30.xml><?xml version="1.0" encoding="utf-8"?>
 <c:chartSpace xmlns:c="http://schemas.openxmlformats.org/drawingml/2006/chart" xmlns:a="http://schemas.openxmlformats.org/drawingml/2006/main" xmlns:r="http://schemas.openxmlformats.org/officeDocument/2006/relationships">
   <c:date1904 val="0"/>
   <c:roundedCorners val="1"/>
@@ -3313,7 +3313,7 @@
 </c:chartSpace>
 </file>
 
-<file path=ppt/charts/chart29.xml><?xml version="1.0" encoding="utf-8"?>
+<file path=ppt/charts/chart31.xml><?xml version="1.0" encoding="utf-8"?>
 <c:chartSpace xmlns:c="http://schemas.openxmlformats.org/drawingml/2006/chart" xmlns:a="http://schemas.openxmlformats.org/drawingml/2006/main" xmlns:r="http://schemas.openxmlformats.org/officeDocument/2006/relationships">
   <c:date1904 val="0"/>
   <c:roundedCorners val="1"/>
@@ -3577,7 +3577,7 @@
 </c:chartSpace>
 </file>
 
-<file path=ppt/charts/chart30.xml><?xml version="1.0" encoding="utf-8"?>
+<file path=ppt/charts/chart32.xml><?xml version="1.0" encoding="utf-8"?>
 <c:chartSpace xmlns:c="http://schemas.openxmlformats.org/drawingml/2006/chart" xmlns:a="http://schemas.openxmlformats.org/drawingml/2006/main" xmlns:r="http://schemas.openxmlformats.org/officeDocument/2006/relationships">
   <c:date1904 val="0"/>
   <c:roundedCorners val="1"/>
@@ -3941,7 +3941,7 @@
 </c:chartSpace>
 </file>
 
-<file path=ppt/charts/chart31.xml><?xml version="1.0" encoding="utf-8"?>
+<file path=ppt/charts/chart33.xml><?xml version="1.0" encoding="utf-8"?>
 <c:chartSpace xmlns:c="http://schemas.openxmlformats.org/drawingml/2006/chart" xmlns:a="http://schemas.openxmlformats.org/drawingml/2006/main" xmlns:r="http://schemas.openxmlformats.org/officeDocument/2006/relationships">
   <c:date1904 val="0"/>
   <c:roundedCorners val="1"/>
@@ -29948,7 +29948,7 @@
                 <a:ea typeface="Calibri" pitchFamily="34" charset="-122"/>
                 <a:cs typeface="Calibri" pitchFamily="34" charset="-120"/>
               </a:rPr>
-              <a:t>Hyderabad and Telangana   6–6</a:t>
+              <a:t>Hyderabad and Telangana   6</a:t>
             </a:r>
             <a:endParaRPr lang="en-US" sz="1700" dirty="0"/>
           </a:p>
@@ -30070,7 +30070,7 @@
                 <a:ea typeface="Calibri" pitchFamily="34" charset="-122"/>
                 <a:cs typeface="Calibri" pitchFamily="34" charset="-120"/>
               </a:rPr>
-              <a:t>Limits   18–18</a:t>
+              <a:t>Limits   18</a:t>
             </a:r>
             <a:endParaRPr lang="en-US" sz="1700" dirty="0"/>
           </a:p>
@@ -30090,7 +30090,7 @@
                 <a:ea typeface="Calibri" pitchFamily="34" charset="-122"/>
                 <a:cs typeface="Calibri" pitchFamily="34" charset="-120"/>
               </a:rPr>
-              <a:t>What the Election Commission should do   19–19</a:t>
+              <a:t>What the Election Commission should do   19</a:t>
             </a:r>
             <a:endParaRPr lang="en-US" sz="1700" dirty="0"/>
           </a:p>

--- a/reports/hyderabad-old-city-sir-2026-deck.pptx
+++ b/reports/hyderabad-old-city-sir-2026-deck.pptx
@@ -4747,7 +4747,7 @@
           <a:p>
             <a:r>
               <a:rPr lang="en-US" dirty="0"/>
-              <a:t>The lists cover every elector on the pre-revision rolls of the five constituencies, so each group has a true removal rate. These are the September 2026 lists; the final roll is due on 9 November, so restorations after hearings are not in them.</a:t>
+              <a:t>The lists cover every elector on the pre-revision rolls of the five constituencies, so each group has a true removal rate. These are the September 2026 lists and the final roll is due on 9 November, so names put back after hearings are not in them.</a:t>
             </a:r>
             <a:endParaRPr lang="en-US" dirty="0"/>
           </a:p>
@@ -5275,7 +5275,7 @@
           <a:p>
             <a:r>
               <a:rPr lang="en-US" dirty="0"/>
-              <a:t>The Commission extended the calendar on 7 September: claims to 7 October, hearings to 5 November, final roll 9 November. The schedules here are those in the September lists. The length of a slot is not recorded.</a:t>
+              <a:t>On 7 September the Commission extended the calendar, with claims to 7 October, hearings to 5 November and the final roll on 9 November. The schedules here are those in the September lists. The length of a slot is not recorded.</a:t>
             </a:r>
             <a:endParaRPr lang="en-US" dirty="0"/>
           </a:p>
@@ -6067,7 +6067,7 @@
           <a:p>
             <a:r>
               <a:rPr lang="en-US" dirty="0"/>
-              <a:t>No election has been held on the revised roll. The comparison is one of size; the roll records no one's vote.</a:t>
+              <a:t>No election has been held on the revised roll. The comparison is of size only, because the roll records nobody's vote.</a:t>
             </a:r>
             <a:endParaRPr lang="en-US" dirty="0"/>
           </a:p>
@@ -8431,7 +8431,7 @@
                 <a:ea typeface="Calibri" pitchFamily="34" charset="-122"/>
                 <a:cs typeface="Calibri" pitchFamily="34" charset="-120"/>
               </a:rPr>
-              <a:t>Hyderabad Old City SIR 2026 · Varna Sri Raman · aggregates only; no names or EPIC numbers</a:t>
+              <a:t>Hyderabad Old City SIR 2026 · Varna Sri Raman · totals only, never names or EPIC numbers</a:t>
             </a:r>
             <a:endParaRPr lang="en-US" sz="900" dirty="0"/>
           </a:p>
@@ -9535,7 +9535,7 @@
                 <a:ea typeface="Calibri" pitchFamily="34" charset="-122"/>
                 <a:cs typeface="Calibri" pitchFamily="34" charset="-120"/>
               </a:rPr>
-              <a:t>Hyderabad Old City SIR 2026 · Varna Sri Raman · aggregates only; no names or EPIC numbers</a:t>
+              <a:t>Hyderabad Old City SIR 2026 · Varna Sri Raman · totals only, never names or EPIC numbers</a:t>
             </a:r>
             <a:endParaRPr lang="en-US" sz="900" dirty="0"/>
           </a:p>
@@ -11975,7 +11975,7 @@
                 <a:ea typeface="Calibri" pitchFamily="34" charset="-122"/>
                 <a:cs typeface="Calibri" pitchFamily="34" charset="-120"/>
               </a:rPr>
-              <a:t>Hyderabad Old City SIR 2026 · Varna Sri Raman · aggregates only; no names or EPIC numbers</a:t>
+              <a:t>Hyderabad Old City SIR 2026 · Varna Sri Raman · totals only, never names or EPIC numbers</a:t>
             </a:r>
             <a:endParaRPr lang="en-US" sz="900" dirty="0"/>
           </a:p>
@@ -14261,7 +14261,7 @@
                 <a:ea typeface="Calibri" pitchFamily="34" charset="-122"/>
                 <a:cs typeface="Calibri" pitchFamily="34" charset="-120"/>
               </a:rPr>
-              <a:t>Negative: parts with more of that group lost fewer names.</a:t>
+              <a:t>A negative figure means parts with more of that group lost fewer names.</a:t>
             </a:r>
             <a:endParaRPr lang="en-US" sz="1350" dirty="0"/>
           </a:p>
@@ -14303,7 +14303,7 @@
                 <a:ea typeface="Calibri" pitchFamily="34" charset="-122"/>
                 <a:cs typeface="Calibri" pitchFamily="34" charset="-120"/>
               </a:rPr>
-              <a:t>Parts with at least 100 electors; the untraceable share uses parts with at least 20 removals.</a:t>
+              <a:t>Parts with at least 100 electors, and for the untraceable share, parts with at least 20 removals.</a:t>
             </a:r>
             <a:endParaRPr lang="en-US" sz="1350" dirty="0"/>
           </a:p>
@@ -14486,7 +14486,7 @@
                 <a:ea typeface="Calibri" pitchFamily="34" charset="-122"/>
                 <a:cs typeface="Calibri" pitchFamily="34" charset="-120"/>
               </a:rPr>
-              <a:t>Hyderabad Old City SIR 2026 · Varna Sri Raman · aggregates only; no names or EPIC numbers</a:t>
+              <a:t>Hyderabad Old City SIR 2026 · Varna Sri Raman · totals only, never names or EPIC numbers</a:t>
             </a:r>
             <a:endParaRPr lang="en-US" sz="900" dirty="0"/>
           </a:p>
@@ -22102,7 +22102,7 @@
                 <a:ea typeface="Calibri" pitchFamily="34" charset="-122"/>
                 <a:cs typeface="Calibri" pitchFamily="34" charset="-120"/>
               </a:rPr>
-              <a:t>Hyderabad Old City SIR 2026 · Varna Sri Raman · aggregates only; no names or EPIC numbers</a:t>
+              <a:t>Hyderabad Old City SIR 2026 · Varna Sri Raman · totals only, never names or EPIC numbers</a:t>
             </a:r>
             <a:endParaRPr lang="en-US" sz="900" dirty="0"/>
           </a:p>
@@ -23227,7 +23227,7 @@
                 <a:ea typeface="Calibri" pitchFamily="34" charset="-122"/>
                 <a:cs typeface="Calibri" pitchFamily="34" charset="-120"/>
               </a:rPr>
-              <a:t>Hyderabad Old City SIR 2026 · Varna Sri Raman · aggregates only; no names or EPIC numbers</a:t>
+              <a:t>Hyderabad Old City SIR 2026 · Varna Sri Raman · totals only, never names or EPIC numbers</a:t>
             </a:r>
             <a:endParaRPr lang="en-US" sz="900" dirty="0"/>
           </a:p>
@@ -24242,7 +24242,7 @@
                 <a:ea typeface="Calibri" pitchFamily="34" charset="-122"/>
                 <a:cs typeface="Calibri" pitchFamily="34" charset="-120"/>
               </a:rPr>
-              <a:t>Hyderabad Old City SIR 2026 · Varna Sri Raman · aggregates only; no names or EPIC numbers</a:t>
+              <a:t>Hyderabad Old City SIR 2026 · Varna Sri Raman · totals only, never names or EPIC numbers</a:t>
             </a:r>
             <a:endParaRPr lang="en-US" sz="900" dirty="0"/>
           </a:p>
@@ -25167,7 +25167,7 @@
                 <a:ea typeface="Calibri" pitchFamily="34" charset="-122"/>
                 <a:cs typeface="Calibri" pitchFamily="34" charset="-120"/>
               </a:rPr>
-              <a:t>The largest recorded reason is "permanently shifted", 64.2% of removals, and the Old City has a large moving population. But 20.8% were entered as untraceable or absent, 8.7% as dead and 6.0% as enrolled elsewhere. Each is an officer's entry, not a finding.</a:t>
+              <a:t>The largest recorded reason is "permanently shifted", 64.2% of removals, and the Old City has a large moving population. But 20.8% were entered as untraceable or absent, 8.7% as dead and 6.0% as enrolled elsewhere. Each is what the officer wrote down, and nobody checked it.</a:t>
             </a:r>
             <a:endParaRPr lang="en-US" sz="1400" dirty="0"/>
           </a:p>
@@ -25253,7 +25253,7 @@
                 <a:ea typeface="Calibri" pitchFamily="34" charset="-122"/>
                 <a:cs typeface="Calibri" pitchFamily="34" charset="-120"/>
               </a:rPr>
-              <a:t>The lists do not show that. Inside the same polling part, Hindu-name electors were struck off more often than Muslim-name electors. What the lists show is who carried the burden: the old, and those who could not be traced to the 2002 roll.</a:t>
+              <a:t>The lists do not show that. Inside the same polling part, Hindu-name electors were struck off more often than Muslim-name electors. The lists do show who bore the removals, the old and those who could not be traced to the 2002 roll.</a:t>
             </a:r>
             <a:endParaRPr lang="en-US" sz="1400" dirty="0"/>
           </a:p>
@@ -25569,7 +25569,7 @@
                 <a:ea typeface="Calibri" pitchFamily="34" charset="-122"/>
                 <a:cs typeface="Calibri" pitchFamily="34" charset="-120"/>
               </a:rPr>
-              <a:t>Hyderabad Old City SIR 2026 · Varna Sri Raman · aggregates only; no names or EPIC numbers</a:t>
+              <a:t>Hyderabad Old City SIR 2026 · Varna Sri Raman · totals only, never names or EPIC numbers</a:t>
             </a:r>
             <a:endParaRPr lang="en-US" sz="900" dirty="0"/>
           </a:p>
@@ -26896,7 +26896,7 @@
                 <a:ea typeface="Calibri" pitchFamily="34" charset="-122"/>
                 <a:cs typeface="Calibri" pitchFamily="34" charset="-120"/>
               </a:rPr>
-              <a:t>Hyderabad Old City SIR 2026 · Varna Sri Raman · aggregates only; no names or EPIC numbers</a:t>
+              <a:t>Hyderabad Old City SIR 2026 · Varna Sri Raman · totals only, never names or EPIC numbers</a:t>
             </a:r>
             <a:endParaRPr lang="en-US" sz="900" dirty="0"/>
           </a:p>
@@ -27861,7 +27861,7 @@
                 <a:ea typeface="Calibri" pitchFamily="34" charset="-122"/>
                 <a:cs typeface="Calibri" pitchFamily="34" charset="-120"/>
               </a:rPr>
-              <a:t>Whether any single removal was right. A household that moved out is a correct "shifted" deletion; the files cannot tell it from an elector who was at home and missed. Religion and age are given separately, never together.</a:t>
+              <a:t>Whether any single removal was right. A household that moved out is rightly marked "shifted", and the files cannot tell it apart from an elector who was at home when the officer missed them. Religion and age are given separately and never together.</a:t>
             </a:r>
             <a:endParaRPr lang="en-US" sz="1500" dirty="0"/>
           </a:p>
@@ -28049,7 +28049,7 @@
                 <a:ea typeface="Calibri" pitchFamily="34" charset="-122"/>
                 <a:cs typeface="Calibri" pitchFamily="34" charset="-120"/>
               </a:rPr>
-              <a:t>Hyderabad Old City SIR 2026 · Varna Sri Raman · aggregates only; no names or EPIC numbers</a:t>
+              <a:t>Hyderabad Old City SIR 2026 · Varna Sri Raman · totals only, never names or EPIC numbers</a:t>
             </a:r>
             <a:endParaRPr lang="en-US" sz="900" dirty="0"/>
           </a:p>
@@ -28934,7 +28934,7 @@
                 <a:ea typeface="Calibri" pitchFamily="34" charset="-122"/>
                 <a:cs typeface="Calibri" pitchFamily="34" charset="-120"/>
               </a:rPr>
-              <a:t>Record and publish the basis for every removal entered as "untraceable or absent", 1,37,825 names: the visits made and the notice given.</a:t>
+              <a:t>Record and publish the basis for every removal entered as "untraceable or absent", 1,37,825 names in all, including the visits made and the notice given.</a:t>
             </a:r>
             <a:endParaRPr lang="en-US" sz="1700" dirty="0"/>
           </a:p>
@@ -30254,7 +30254,7 @@
                 <a:ea typeface="Calibri" pitchFamily="34" charset="-122"/>
                 <a:cs typeface="Calibri" pitchFamily="34" charset="-120"/>
               </a:rPr>
-              <a:t>Hyderabad Old City SIR 2026 · Varna Sri Raman · aggregates only; no names or EPIC numbers</a:t>
+              <a:t>Hyderabad Old City SIR 2026 · Varna Sri Raman · totals only, never names or EPIC numbers</a:t>
             </a:r>
             <a:endParaRPr lang="en-US" sz="900" dirty="0"/>
           </a:p>
@@ -31138,7 +31138,7 @@
                 <a:ea typeface="Calibri" pitchFamily="34" charset="-122"/>
                 <a:cs typeface="Calibri" pitchFamily="34" charset="-120"/>
               </a:rPr>
-              <a:t>Source: the September 2026 SIR lists for the five constituencies, which record the outcome for every elector on the pre-revision roll: struck off (with the officer's reason), kept but summoned to a hearing (with the rule), or kept.</a:t>
+              <a:t>The source is the September 2026 SIR lists for the five constituencies, compiled for these five seats only. They record the outcome for every elector on the roll before the revision, whether struck off (with the officer's reason), kept but summoned to a hearing (with the rule), or kept.</a:t>
             </a:r>
             <a:endParaRPr lang="en-US" sz="1500" dirty="0"/>
           </a:p>
@@ -31159,7 +31159,7 @@
                 <a:ea typeface="Calibri" pitchFamily="34" charset="-122"/>
                 <a:cs typeface="Calibri" pitchFamily="34" charset="-120"/>
               </a:rPr>
-              <a:t>Removal rate: electors on the absent-shifted-dead list divided by electors on the pre-revision roll, for each group. In Bihar the lists hold only the removed, so the Bihar deck gives shares of removals instead.</a:t>
+              <a:t>The removal rate is the electors on the absent-shifted-dead list divided by the electors on the roll before the revision, for each group. The Bihar lists hold only the removed, so the Bihar deck gives shares of removals.</a:t>
             </a:r>
             <a:endParaRPr lang="en-US" sz="1500" dirty="0"/>
           </a:p>
@@ -31180,7 +31180,7 @@
                 <a:ea typeface="Calibri" pitchFamily="34" charset="-122"/>
                 <a:cs typeface="Calibri" pitchFamily="34" charset="-120"/>
               </a:rPr>
-              <a:t>Within-part difference: one group's rate minus another's inside each polling part, pooled with each part weighted by its smaller group; parts with fewer than 20 of either are left out. This holds the locality and the officer fixed.</a:t>
+              <a:t>The within-part difference is one group's rate minus another's inside each polling part, pooled and weighted by the smaller group in each part. Parts with fewer than 20 of either group are left out. This holds the neighbourhood and the officer constant.</a:t>
             </a:r>
             <a:endParaRPr lang="en-US" sz="1500" dirty="0"/>
           </a:p>
@@ -31222,7 +31222,7 @@
                 <a:ea typeface="Calibri" pitchFamily="34" charset="-122"/>
                 <a:cs typeface="Calibri" pitchFamily="34" charset="-120"/>
               </a:rPr>
-              <a:t>2023 results: the declared Assembly results. Only counts are published: no name, EPIC number or address.</a:t>
+              <a:t>The 2023 results are the declared Assembly results. Only counts are published, never a name, EPIC number or address.</a:t>
             </a:r>
             <a:endParaRPr lang="en-US" sz="1500" dirty="0"/>
           </a:p>
@@ -32338,7 +32338,7 @@
                 <a:ea typeface="Calibri" pitchFamily="34" charset="-122"/>
                 <a:cs typeface="Calibri" pitchFamily="34" charset="-120"/>
               </a:rPr>
-              <a:t>Hyderabad Old City SIR 2026 · Varna Sri Raman · aggregates only; no names or EPIC numbers</a:t>
+              <a:t>Hyderabad Old City SIR 2026 · Varna Sri Raman · totals only, never names or EPIC numbers</a:t>
             </a:r>
             <a:endParaRPr lang="en-US" sz="900" dirty="0"/>
           </a:p>
@@ -33688,7 +33688,7 @@
                 <a:ea typeface="Calibri" pitchFamily="34" charset="-122"/>
                 <a:cs typeface="Calibri" pitchFamily="34" charset="-120"/>
               </a:rPr>
-              <a:t>Hyderabad Old City SIR 2026 · Varna Sri Raman · aggregates only; no names or EPIC numbers</a:t>
+              <a:t>Hyderabad Old City SIR 2026 · Varna Sri Raman · totals only, never names or EPIC numbers</a:t>
             </a:r>
             <a:endParaRPr lang="en-US" sz="900" dirty="0"/>
           </a:p>
@@ -37676,7 +37676,7 @@
                 <a:ea typeface="Calibri" pitchFamily="34" charset="-122"/>
                 <a:cs typeface="Calibri" pitchFamily="34" charset="-120"/>
               </a:rPr>
-              <a:t>Hyderabad Old City SIR 2026 · Varna Sri Raman · aggregates only; no names or EPIC numbers</a:t>
+              <a:t>Hyderabad Old City SIR 2026 · Varna Sri Raman · totals only, never names or EPIC numbers</a:t>
             </a:r>
             <a:endParaRPr lang="en-US" sz="900" dirty="0"/>
           </a:p>
@@ -38618,7 +38618,7 @@
                 <a:ea typeface="Calibri" pitchFamily="34" charset="-122"/>
                 <a:cs typeface="Calibri" pitchFamily="34" charset="-120"/>
               </a:rPr>
-              <a:t>Each reason is an officer's entry, not a finding. An untraceable entry records only that someone was not found.</a:t>
+              <a:t>Each reason is what the officer wrote down, and nobody checked it. An untraceable entry records only that the officer did not find the person.</a:t>
             </a:r>
             <a:endParaRPr lang="en-US" sz="1350" dirty="0"/>
           </a:p>
@@ -38801,7 +38801,7 @@
                 <a:ea typeface="Calibri" pitchFamily="34" charset="-122"/>
                 <a:cs typeface="Calibri" pitchFamily="34" charset="-120"/>
               </a:rPr>
-              <a:t>Hyderabad Old City SIR 2026 · Varna Sri Raman · aggregates only; no names or EPIC numbers</a:t>
+              <a:t>Hyderabad Old City SIR 2026 · Varna Sri Raman · totals only, never names or EPIC numbers</a:t>
             </a:r>
             <a:endParaRPr lang="en-US" sz="900" dirty="0"/>
           </a:p>
@@ -39722,7 +39722,7 @@
                 <a:ea typeface="Calibri" pitchFamily="34" charset="-122"/>
                 <a:cs typeface="Calibri" pitchFamily="34" charset="-120"/>
               </a:rPr>
-              <a:t>The removals follow the capital region, not the Old City.</a:t>
+              <a:t>The removals are heavy across the whole capital region.</a:t>
             </a:r>
             <a:endParaRPr lang="en-US" sz="1350" dirty="0"/>
           </a:p>
@@ -39743,7 +39743,7 @@
                 <a:ea typeface="Calibri" pitchFamily="34" charset="-122"/>
                 <a:cs typeface="Calibri" pitchFamily="34" charset="-120"/>
               </a:rPr>
-              <a:t>The state publishes totals only below the district: no split by reason.</a:t>
+              <a:t>Below the district the state publishes totals only, with no split by reason.</a:t>
             </a:r>
             <a:endParaRPr lang="en-US" sz="1350" dirty="0"/>
           </a:p>
@@ -39926,7 +39926,7 @@
                 <a:ea typeface="Calibri" pitchFamily="34" charset="-122"/>
                 <a:cs typeface="Calibri" pitchFamily="34" charset="-120"/>
               </a:rPr>
-              <a:t>Hyderabad Old City SIR 2026 · Varna Sri Raman · aggregates only; no names or EPIC numbers</a:t>
+              <a:t>Hyderabad Old City SIR 2026 · Varna Sri Raman · totals only, never names or EPIC numbers</a:t>
             </a:r>
             <a:endParaRPr lang="en-US" sz="900" dirty="0"/>
           </a:p>
@@ -41051,7 +41051,7 @@
                 <a:ea typeface="Calibri" pitchFamily="34" charset="-122"/>
                 <a:cs typeface="Calibri" pitchFamily="34" charset="-120"/>
               </a:rPr>
-              <a:t>Hyderabad Old City SIR 2026 · Varna Sri Raman · aggregates only; no names or EPIC numbers</a:t>
+              <a:t>Hyderabad Old City SIR 2026 · Varna Sri Raman · totals only, never names or EPIC numbers</a:t>
             </a:r>
             <a:endParaRPr lang="en-US" sz="900" dirty="0"/>
           </a:p>
@@ -42176,7 +42176,7 @@
                 <a:ea typeface="Calibri" pitchFamily="34" charset="-122"/>
                 <a:cs typeface="Calibri" pitchFamily="34" charset="-120"/>
               </a:rPr>
-              <a:t>Hyderabad Old City SIR 2026 · Varna Sri Raman · aggregates only; no names or EPIC numbers</a:t>
+              <a:t>Hyderabad Old City SIR 2026 · Varna Sri Raman · totals only, never names or EPIC numbers</a:t>
             </a:r>
             <a:endParaRPr lang="en-US" sz="900" dirty="0"/>
           </a:p>
@@ -43118,7 +43118,7 @@
                 <a:ea typeface="Calibri" pitchFamily="34" charset="-122"/>
                 <a:cs typeface="Calibri" pitchFamily="34" charset="-120"/>
               </a:rPr>
-              <a:t>Religion is estimated from names; the roll records none.</a:t>
+              <a:t>Religion is guessed from names, because the roll does not record it.</a:t>
             </a:r>
             <a:endParaRPr lang="en-US" sz="1400" dirty="0"/>
           </a:p>

--- a/reports/hyderabad-old-city-sir-2026-deck.pptx
+++ b/reports/hyderabad-old-city-sir-2026-deck.pptx
@@ -26580,7 +26580,7 @@
                 <a:ea typeface="Calibri" pitchFamily="34" charset="-122"/>
                 <a:cs typeface="Calibri" pitchFamily="34" charset="-120"/>
               </a:rPr>
-              <a:t>No election has been held on the revised roll. Every one of the five constituencies lost more names than its 2023 winning margin, and in Yakutpura and Malakpet the names struck off outnumber every valid vote cast in 2023.</a:t>
+              <a:t>No election has been held on the revised roll. Every one of the five constituencies lost more names than its 2023 winning margin, and in Yakutpura and Malakpet the names struck off outnumber every valid vote cast in 2023. Only Yakutpura is close. Its runner-up would need 50.8% of the removed who would vote to overturn the 2023 margin.</a:t>
             </a:r>
             <a:endParaRPr lang="en-US" sz="1400" dirty="0"/>
           </a:p>

--- a/reports/hyderabad-old-city-sir-2026-deck.pptx
+++ b/reports/hyderabad-old-city-sir-2026-deck.pptx
@@ -27798,7 +27798,7 @@
                 <a:ea typeface="Calibri" pitchFamily="34" charset="-122"/>
                 <a:cs typeface="Calibri" pitchFamily="34" charset="-120"/>
               </a:rPr>
-              <a:t>How many electors were struck off, from which parts, and who they were by age, sex, religion estimated from names, and link to the 2002 roll. Because the lists hold every elector, each group has a true removal rate.</a:t>
+              <a:t>How many electors were struck off, from which parts, and who they were by age, sex, religion guessed from names, and link to the 2002 roll. Because the lists hold every elector, each group has a true removal rate.</a:t>
             </a:r>
             <a:endParaRPr lang="en-US" sz="1500" dirty="0"/>
           </a:p>
@@ -38723,7 +38723,7 @@
                 <a:ea typeface="Cambria" pitchFamily="34" charset="-122"/>
                 <a:cs typeface="Cambria" pitchFamily="34" charset="-120"/>
               </a:rPr>
-              <a:t>The Old City seats lost 39.9% of their roll, Hyderabad's other ten seats 41.6%</a:t>
+              <a:t>Hyderabad lost 41.0% of its roll, more than twice the 18.6% in the rest of Telangana</a:t>
             </a:r>
             <a:endParaRPr lang="en-US" sz="2700" dirty="0"/>
           </a:p>
@@ -42137,7 +42137,7 @@
                 <a:ea typeface="Calibri" pitchFamily="34" charset="-122"/>
                 <a:cs typeface="Calibri" pitchFamily="34" charset="-120"/>
               </a:rPr>
-              <a:t>Share struck off by religion estimated from names, constituency by constituency</a:t>
+              <a:t>Share struck off by religion guessed from names, constituency by constituency</a:t>
             </a:r>
             <a:endParaRPr lang="en-US" sz="1400" dirty="0"/>
           </a:p>

--- a/reports/hyderabad-old-city-sir-2026-deck.pptx
+++ b/reports/hyderabad-old-city-sir-2026-deck.pptx
@@ -9335,27 +9335,6 @@
             </a:r>
             <a:endParaRPr lang="en-US" sz="1400" dirty="0"/>
           </a:p>
-          <a:p>
-            <a:pPr marL="342900" indent="-342900">
-              <a:spcAft>
-                <a:spcPts val="800"/>
-              </a:spcAft>
-              <a:buSzPct val="100000"/>
-              <a:buChar char="•"/>
-            </a:pPr>
-            <a:r>
-              <a:rPr lang="en-US" sz="1400" dirty="0">
-                <a:solidFill>
-                  <a:srgbClr val="1C2833"/>
-                </a:solidFill>
-                <a:latin typeface="Calibri" pitchFamily="34" charset="0"/>
-                <a:ea typeface="Calibri" pitchFamily="34" charset="-122"/>
-                <a:cs typeface="Calibri" pitchFamily="34" charset="-120"/>
-              </a:rPr>
-              <a:t>In Bihar, women were 55.5% of the removed. The Old City shows no such gap.</a:t>
-            </a:r>
-            <a:endParaRPr lang="en-US" sz="1400" dirty="0"/>
-          </a:p>
         </p:txBody>
       </p:sp>
     </p:spTree>
@@ -31159,7 +31138,7 @@
                 <a:ea typeface="Calibri" pitchFamily="34" charset="-122"/>
                 <a:cs typeface="Calibri" pitchFamily="34" charset="-120"/>
               </a:rPr>
-              <a:t>The removal rate is the electors on the absent-shifted-dead list divided by the electors on the roll before the revision, for each group. The Bihar lists hold only the removed, so the Bihar deck gives shares of removals.</a:t>
+              <a:t>The removal rate is the electors on the absent-shifted-dead list divided by the electors on the roll before the revision, for each group.</a:t>
             </a:r>
             <a:endParaRPr lang="en-US" sz="1500" dirty="0"/>
           </a:p>

--- a/reports/hyderabad-old-city-sir-2026-deck.pptx
+++ b/reports/hyderabad-old-city-sir-2026-deck.pptx
@@ -7448,7 +7448,7 @@
                 <a:ea typeface="Calibri" pitchFamily="34" charset="-122"/>
                 <a:cs typeface="Calibri" pitchFamily="34" charset="-120"/>
               </a:rPr>
-              <a:t>Varna Sri Raman</a:t>
+              <a:t>PinPoint Ventures</a:t>
             </a:r>
             <a:endParaRPr lang="en-US" sz="1300" dirty="0"/>
           </a:p>
@@ -8431,7 +8431,7 @@
                 <a:ea typeface="Calibri" pitchFamily="34" charset="-122"/>
                 <a:cs typeface="Calibri" pitchFamily="34" charset="-120"/>
               </a:rPr>
-              <a:t>Hyderabad Old City SIR 2026 · Varna Sri Raman · totals only, never names or EPIC numbers</a:t>
+              <a:t>Hyderabad Old City SIR 2026 · PinPoint Ventures · totals only, never names or EPIC numbers</a:t>
             </a:r>
             <a:endParaRPr lang="en-US" sz="900" dirty="0"/>
           </a:p>
@@ -9514,7 +9514,7 @@
                 <a:ea typeface="Calibri" pitchFamily="34" charset="-122"/>
                 <a:cs typeface="Calibri" pitchFamily="34" charset="-120"/>
               </a:rPr>
-              <a:t>Hyderabad Old City SIR 2026 · Varna Sri Raman · totals only, never names or EPIC numbers</a:t>
+              <a:t>Hyderabad Old City SIR 2026 · PinPoint Ventures · totals only, never names or EPIC numbers</a:t>
             </a:r>
             <a:endParaRPr lang="en-US" sz="900" dirty="0"/>
           </a:p>
@@ -11954,7 +11954,7 @@
                 <a:ea typeface="Calibri" pitchFamily="34" charset="-122"/>
                 <a:cs typeface="Calibri" pitchFamily="34" charset="-120"/>
               </a:rPr>
-              <a:t>Hyderabad Old City SIR 2026 · Varna Sri Raman · totals only, never names or EPIC numbers</a:t>
+              <a:t>Hyderabad Old City SIR 2026 · PinPoint Ventures · totals only, never names or EPIC numbers</a:t>
             </a:r>
             <a:endParaRPr lang="en-US" sz="900" dirty="0"/>
           </a:p>
@@ -14465,7 +14465,7 @@
                 <a:ea typeface="Calibri" pitchFamily="34" charset="-122"/>
                 <a:cs typeface="Calibri" pitchFamily="34" charset="-120"/>
               </a:rPr>
-              <a:t>Hyderabad Old City SIR 2026 · Varna Sri Raman · totals only, never names or EPIC numbers</a:t>
+              <a:t>Hyderabad Old City SIR 2026 · PinPoint Ventures · totals only, never names or EPIC numbers</a:t>
             </a:r>
             <a:endParaRPr lang="en-US" sz="900" dirty="0"/>
           </a:p>
@@ -22081,7 +22081,7 @@
                 <a:ea typeface="Calibri" pitchFamily="34" charset="-122"/>
                 <a:cs typeface="Calibri" pitchFamily="34" charset="-120"/>
               </a:rPr>
-              <a:t>Hyderabad Old City SIR 2026 · Varna Sri Raman · totals only, never names or EPIC numbers</a:t>
+              <a:t>Hyderabad Old City SIR 2026 · PinPoint Ventures · totals only, never names or EPIC numbers</a:t>
             </a:r>
             <a:endParaRPr lang="en-US" sz="900" dirty="0"/>
           </a:p>
@@ -23206,7 +23206,7 @@
                 <a:ea typeface="Calibri" pitchFamily="34" charset="-122"/>
                 <a:cs typeface="Calibri" pitchFamily="34" charset="-120"/>
               </a:rPr>
-              <a:t>Hyderabad Old City SIR 2026 · Varna Sri Raman · totals only, never names or EPIC numbers</a:t>
+              <a:t>Hyderabad Old City SIR 2026 · PinPoint Ventures · totals only, never names or EPIC numbers</a:t>
             </a:r>
             <a:endParaRPr lang="en-US" sz="900" dirty="0"/>
           </a:p>
@@ -24221,7 +24221,7 @@
                 <a:ea typeface="Calibri" pitchFamily="34" charset="-122"/>
                 <a:cs typeface="Calibri" pitchFamily="34" charset="-120"/>
               </a:rPr>
-              <a:t>Hyderabad Old City SIR 2026 · Varna Sri Raman · totals only, never names or EPIC numbers</a:t>
+              <a:t>Hyderabad Old City SIR 2026 · PinPoint Ventures · totals only, never names or EPIC numbers</a:t>
             </a:r>
             <a:endParaRPr lang="en-US" sz="900" dirty="0"/>
           </a:p>
@@ -25548,7 +25548,7 @@
                 <a:ea typeface="Calibri" pitchFamily="34" charset="-122"/>
                 <a:cs typeface="Calibri" pitchFamily="34" charset="-120"/>
               </a:rPr>
-              <a:t>Hyderabad Old City SIR 2026 · Varna Sri Raman · totals only, never names or EPIC numbers</a:t>
+              <a:t>Hyderabad Old City SIR 2026 · PinPoint Ventures · totals only, never names or EPIC numbers</a:t>
             </a:r>
             <a:endParaRPr lang="en-US" sz="900" dirty="0"/>
           </a:p>
@@ -26875,7 +26875,7 @@
                 <a:ea typeface="Calibri" pitchFamily="34" charset="-122"/>
                 <a:cs typeface="Calibri" pitchFamily="34" charset="-120"/>
               </a:rPr>
-              <a:t>Hyderabad Old City SIR 2026 · Varna Sri Raman · totals only, never names or EPIC numbers</a:t>
+              <a:t>Hyderabad Old City SIR 2026 · PinPoint Ventures · totals only, never names or EPIC numbers</a:t>
             </a:r>
             <a:endParaRPr lang="en-US" sz="900" dirty="0"/>
           </a:p>
@@ -28028,7 +28028,7 @@
                 <a:ea typeface="Calibri" pitchFamily="34" charset="-122"/>
                 <a:cs typeface="Calibri" pitchFamily="34" charset="-120"/>
               </a:rPr>
-              <a:t>Hyderabad Old City SIR 2026 · Varna Sri Raman · totals only, never names or EPIC numbers</a:t>
+              <a:t>Hyderabad Old City SIR 2026 · PinPoint Ventures · totals only, never names or EPIC numbers</a:t>
             </a:r>
             <a:endParaRPr lang="en-US" sz="900" dirty="0"/>
           </a:p>
@@ -30233,7 +30233,7 @@
                 <a:ea typeface="Calibri" pitchFamily="34" charset="-122"/>
                 <a:cs typeface="Calibri" pitchFamily="34" charset="-120"/>
               </a:rPr>
-              <a:t>Hyderabad Old City SIR 2026 · Varna Sri Raman · totals only, never names or EPIC numbers</a:t>
+              <a:t>Hyderabad Old City SIR 2026 · PinPoint Ventures · totals only, never names or EPIC numbers</a:t>
             </a:r>
             <a:endParaRPr lang="en-US" sz="900" dirty="0"/>
           </a:p>
@@ -31334,7 +31334,7 @@
                 <a:ea typeface="Calibri" pitchFamily="34" charset="-122"/>
                 <a:cs typeface="Calibri" pitchFamily="34" charset="-120"/>
               </a:rPr>
-              <a:t>Varna Sri Raman</a:t>
+              <a:t>PinPoint Ventures</a:t>
             </a:r>
             <a:endParaRPr lang="en-US" sz="1700" dirty="0"/>
           </a:p>
@@ -32317,7 +32317,7 @@
                 <a:ea typeface="Calibri" pitchFamily="34" charset="-122"/>
                 <a:cs typeface="Calibri" pitchFamily="34" charset="-120"/>
               </a:rPr>
-              <a:t>Hyderabad Old City SIR 2026 · Varna Sri Raman · totals only, never names or EPIC numbers</a:t>
+              <a:t>Hyderabad Old City SIR 2026 · PinPoint Ventures · totals only, never names or EPIC numbers</a:t>
             </a:r>
             <a:endParaRPr lang="en-US" sz="900" dirty="0"/>
           </a:p>
@@ -33667,7 +33667,7 @@
                 <a:ea typeface="Calibri" pitchFamily="34" charset="-122"/>
                 <a:cs typeface="Calibri" pitchFamily="34" charset="-120"/>
               </a:rPr>
-              <a:t>Hyderabad Old City SIR 2026 · Varna Sri Raman · totals only, never names or EPIC numbers</a:t>
+              <a:t>Hyderabad Old City SIR 2026 · PinPoint Ventures · totals only, never names or EPIC numbers</a:t>
             </a:r>
             <a:endParaRPr lang="en-US" sz="900" dirty="0"/>
           </a:p>
@@ -37655,7 +37655,7 @@
                 <a:ea typeface="Calibri" pitchFamily="34" charset="-122"/>
                 <a:cs typeface="Calibri" pitchFamily="34" charset="-120"/>
               </a:rPr>
-              <a:t>Hyderabad Old City SIR 2026 · Varna Sri Raman · totals only, never names or EPIC numbers</a:t>
+              <a:t>Hyderabad Old City SIR 2026 · PinPoint Ventures · totals only, never names or EPIC numbers</a:t>
             </a:r>
             <a:endParaRPr lang="en-US" sz="900" dirty="0"/>
           </a:p>
@@ -38780,7 +38780,7 @@
                 <a:ea typeface="Calibri" pitchFamily="34" charset="-122"/>
                 <a:cs typeface="Calibri" pitchFamily="34" charset="-120"/>
               </a:rPr>
-              <a:t>Hyderabad Old City SIR 2026 · Varna Sri Raman · totals only, never names or EPIC numbers</a:t>
+              <a:t>Hyderabad Old City SIR 2026 · PinPoint Ventures · totals only, never names or EPIC numbers</a:t>
             </a:r>
             <a:endParaRPr lang="en-US" sz="900" dirty="0"/>
           </a:p>
@@ -39905,7 +39905,7 @@
                 <a:ea typeface="Calibri" pitchFamily="34" charset="-122"/>
                 <a:cs typeface="Calibri" pitchFamily="34" charset="-120"/>
               </a:rPr>
-              <a:t>Hyderabad Old City SIR 2026 · Varna Sri Raman · totals only, never names or EPIC numbers</a:t>
+              <a:t>Hyderabad Old City SIR 2026 · PinPoint Ventures · totals only, never names or EPIC numbers</a:t>
             </a:r>
             <a:endParaRPr lang="en-US" sz="900" dirty="0"/>
           </a:p>
@@ -41030,7 +41030,7 @@
                 <a:ea typeface="Calibri" pitchFamily="34" charset="-122"/>
                 <a:cs typeface="Calibri" pitchFamily="34" charset="-120"/>
               </a:rPr>
-              <a:t>Hyderabad Old City SIR 2026 · Varna Sri Raman · totals only, never names or EPIC numbers</a:t>
+              <a:t>Hyderabad Old City SIR 2026 · PinPoint Ventures · totals only, never names or EPIC numbers</a:t>
             </a:r>
             <a:endParaRPr lang="en-US" sz="900" dirty="0"/>
           </a:p>
@@ -42155,7 +42155,7 @@
                 <a:ea typeface="Calibri" pitchFamily="34" charset="-122"/>
                 <a:cs typeface="Calibri" pitchFamily="34" charset="-120"/>
               </a:rPr>
-              <a:t>Hyderabad Old City SIR 2026 · Varna Sri Raman · totals only, never names or EPIC numbers</a:t>
+              <a:t>Hyderabad Old City SIR 2026 · PinPoint Ventures · totals only, never names or EPIC numbers</a:t>
             </a:r>
             <a:endParaRPr lang="en-US" sz="900" dirty="0"/>
           </a:p>

--- a/reports/hyderabad-old-city-sir-2026-deck.pptx
+++ b/reports/hyderabad-old-city-sir-2026-deck.pptx
@@ -127,7 +127,7 @@
 </p:presentation>
 </file>
 
-<file path=ppt/charts/chart23.xml><?xml version="1.0" encoding="utf-8"?>
+<file path=ppt/charts/chart25.xml><?xml version="1.0" encoding="utf-8"?>
 <c:chartSpace xmlns:c="http://schemas.openxmlformats.org/drawingml/2006/chart" xmlns:a="http://schemas.openxmlformats.org/drawingml/2006/main" xmlns:r="http://schemas.openxmlformats.org/officeDocument/2006/relationships">
   <c:date1904 val="0"/>
   <c:roundedCorners val="1"/>
@@ -591,7 +591,7 @@
 </c:chartSpace>
 </file>
 
-<file path=ppt/charts/chart24.xml><?xml version="1.0" encoding="utf-8"?>
+<file path=ppt/charts/chart26.xml><?xml version="1.0" encoding="utf-8"?>
 <c:chartSpace xmlns:c="http://schemas.openxmlformats.org/drawingml/2006/chart" xmlns:a="http://schemas.openxmlformats.org/drawingml/2006/main" xmlns:r="http://schemas.openxmlformats.org/officeDocument/2006/relationships">
   <c:date1904 val="0"/>
   <c:roundedCorners val="1"/>
@@ -1145,7 +1145,7 @@
 </c:chartSpace>
 </file>
 
-<file path=ppt/charts/chart25.xml><?xml version="1.0" encoding="utf-8"?>
+<file path=ppt/charts/chart27.xml><?xml version="1.0" encoding="utf-8"?>
 <c:chartSpace xmlns:c="http://schemas.openxmlformats.org/drawingml/2006/chart" xmlns:a="http://schemas.openxmlformats.org/drawingml/2006/main" xmlns:r="http://schemas.openxmlformats.org/officeDocument/2006/relationships">
   <c:date1904 val="0"/>
   <c:roundedCorners val="1"/>
@@ -1622,7 +1622,7 @@
 </c:chartSpace>
 </file>
 
-<file path=ppt/charts/chart26.xml><?xml version="1.0" encoding="utf-8"?>
+<file path=ppt/charts/chart28.xml><?xml version="1.0" encoding="utf-8"?>
 <c:chartSpace xmlns:c="http://schemas.openxmlformats.org/drawingml/2006/chart" xmlns:a="http://schemas.openxmlformats.org/drawingml/2006/main" xmlns:r="http://schemas.openxmlformats.org/officeDocument/2006/relationships">
   <c:date1904 val="0"/>
   <c:roundedCorners val="1"/>
@@ -1892,7 +1892,7 @@
 </c:chartSpace>
 </file>
 
-<file path=ppt/charts/chart27.xml><?xml version="1.0" encoding="utf-8"?>
+<file path=ppt/charts/chart29.xml><?xml version="1.0" encoding="utf-8"?>
 <c:chartSpace xmlns:c="http://schemas.openxmlformats.org/drawingml/2006/chart" xmlns:a="http://schemas.openxmlformats.org/drawingml/2006/main" xmlns:r="http://schemas.openxmlformats.org/officeDocument/2006/relationships">
   <c:date1904 val="0"/>
   <c:roundedCorners val="1"/>
@@ -2244,7 +2244,7 @@
 </c:chartSpace>
 </file>
 
-<file path=ppt/charts/chart28.xml><?xml version="1.0" encoding="utf-8"?>
+<file path=ppt/charts/chart30.xml><?xml version="1.0" encoding="utf-8"?>
 <c:chartSpace xmlns:c="http://schemas.openxmlformats.org/drawingml/2006/chart" xmlns:a="http://schemas.openxmlformats.org/drawingml/2006/main" xmlns:r="http://schemas.openxmlformats.org/officeDocument/2006/relationships">
   <c:date1904 val="0"/>
   <c:roundedCorners val="1"/>
@@ -2608,7 +2608,7 @@
 </c:chartSpace>
 </file>
 
-<file path=ppt/charts/chart29.xml><?xml version="1.0" encoding="utf-8"?>
+<file path=ppt/charts/chart31.xml><?xml version="1.0" encoding="utf-8"?>
 <c:chartSpace xmlns:c="http://schemas.openxmlformats.org/drawingml/2006/chart" xmlns:a="http://schemas.openxmlformats.org/drawingml/2006/main" xmlns:r="http://schemas.openxmlformats.org/officeDocument/2006/relationships">
   <c:date1904 val="0"/>
   <c:roundedCorners val="1"/>
@@ -2972,7 +2972,7 @@
 </c:chartSpace>
 </file>
 
-<file path=ppt/charts/chart30.xml><?xml version="1.0" encoding="utf-8"?>
+<file path=ppt/charts/chart32.xml><?xml version="1.0" encoding="utf-8"?>
 <c:chartSpace xmlns:c="http://schemas.openxmlformats.org/drawingml/2006/chart" xmlns:a="http://schemas.openxmlformats.org/drawingml/2006/main" xmlns:r="http://schemas.openxmlformats.org/officeDocument/2006/relationships">
   <c:date1904 val="0"/>
   <c:roundedCorners val="1"/>
@@ -3313,7 +3313,7 @@
 </c:chartSpace>
 </file>
 
-<file path=ppt/charts/chart31.xml><?xml version="1.0" encoding="utf-8"?>
+<file path=ppt/charts/chart33.xml><?xml version="1.0" encoding="utf-8"?>
 <c:chartSpace xmlns:c="http://schemas.openxmlformats.org/drawingml/2006/chart" xmlns:a="http://schemas.openxmlformats.org/drawingml/2006/main" xmlns:r="http://schemas.openxmlformats.org/officeDocument/2006/relationships">
   <c:date1904 val="0"/>
   <c:roundedCorners val="1"/>
@@ -3577,7 +3577,7 @@
 </c:chartSpace>
 </file>
 
-<file path=ppt/charts/chart32.xml><?xml version="1.0" encoding="utf-8"?>
+<file path=ppt/charts/chart34.xml><?xml version="1.0" encoding="utf-8"?>
 <c:chartSpace xmlns:c="http://schemas.openxmlformats.org/drawingml/2006/chart" xmlns:a="http://schemas.openxmlformats.org/drawingml/2006/main" xmlns:r="http://schemas.openxmlformats.org/officeDocument/2006/relationships">
   <c:date1904 val="0"/>
   <c:roundedCorners val="1"/>
@@ -3941,7 +3941,7 @@
 </c:chartSpace>
 </file>
 
-<file path=ppt/charts/chart33.xml><?xml version="1.0" encoding="utf-8"?>
+<file path=ppt/charts/chart35.xml><?xml version="1.0" encoding="utf-8"?>
 <c:chartSpace xmlns:c="http://schemas.openxmlformats.org/drawingml/2006/chart" xmlns:a="http://schemas.openxmlformats.org/drawingml/2006/main" xmlns:r="http://schemas.openxmlformats.org/officeDocument/2006/relationships">
   <c:date1904 val="0"/>
   <c:roundedCorners val="1"/>

--- a/reports/hyderabad-old-city-sir-2026-deck.pptx
+++ b/reports/hyderabad-old-city-sir-2026-deck.pptx
@@ -3598,7 +3598,7 @@
               <c:strCache>
                 <c:ptCount val="1"/>
                 <c:pt idx="0">
-                  <c:v>Median cases per slot</c:v>
+                  <c:v>Cases in the typical slot (median)</c:v>
                 </c:pt>
               </c:strCache>
             </c:strRef>
@@ -4747,7 +4747,7 @@
           <a:p>
             <a:r>
               <a:rPr lang="en-US" dirty="0"/>
-              <a:t>The lists cover every elector on the pre-revision rolls of the five constituencies, so each group has a true removal rate. These are the September 2026 lists and the final roll is due on 9 November, so names put back after hearings are not in them.</a:t>
+              <a:t>The Special Intensive Revision (SIR) is the Election Commission's house-to-house recheck of the electoral roll. The lists cover every elector on the rolls of the five constituencies before the revision, so each group has a true removal rate, the share of its own members struck off. These are the September 2026 lists. The final roll is due on 9 November, so names put back after hearings are not in them.</a:t>
             </a:r>
             <a:endParaRPr lang="en-US" dirty="0"/>
           </a:p>
@@ -5011,7 +5011,7 @@
           <a:p>
             <a:r>
               <a:rPr lang="en-US" dirty="0"/>
-              <a:t/>
+              <a:t>A polling part is the section of the roll served by one polling station. A rank correlation runs from -1 to 1 and measures how far two orderings of the parts agree.</a:t>
             </a:r>
             <a:endParaRPr lang="en-US" dirty="0"/>
           </a:p>
@@ -6067,7 +6067,7 @@
           <a:p>
             <a:r>
               <a:rPr lang="en-US" dirty="0"/>
-              <a:t>No election has been held on the revised roll. The comparison is of size only, because the roll records nobody's vote.</a:t>
+              <a:t>The winning margin is the winner's votes less the runner-up's. No election has been held on the revised roll. The comparison is of size only, because the roll records nobody's vote.</a:t>
             </a:r>
             <a:endParaRPr lang="en-US" dirty="0"/>
           </a:p>
@@ -7097,7 +7097,7 @@
                 <a:ea typeface="Calibri" pitchFamily="34" charset="-122"/>
                 <a:cs typeface="Calibri" pitchFamily="34" charset="-120"/>
               </a:rPr>
-              <a:t>electors struck off the pre-revision rolls</a:t>
+              <a:t>electors struck off the rolls before the revision</a:t>
             </a:r>
             <a:endParaRPr lang="en-US" sz="1250" dirty="0"/>
           </a:p>
@@ -9475,7 +9475,7 @@
                 <a:ea typeface="Calibri" pitchFamily="34" charset="-122"/>
                 <a:cs typeface="Calibri" pitchFamily="34" charset="-120"/>
               </a:rPr>
-              <a:t>Polling parts with at least 100 electors, by the share struck off; Malakpet has no part numbers</a:t>
+              <a:t>Polling parts with at least 100 electors, by the share struck off. Malakpet has no part numbers</a:t>
             </a:r>
             <a:endParaRPr lang="en-US" sz="1400" dirty="0"/>
           </a:p>
@@ -10557,7 +10557,7 @@
                           <a:ea typeface="Calibri" pitchFamily="34" charset="-122"/>
                           <a:cs typeface="Calibri" pitchFamily="34" charset="-120"/>
                         </a:rPr>
-                        <a:t>Median</a:t>
+                        <a:t>Middle</a:t>
                       </a:r>
                       <a:endParaRPr lang="en-US" sz="1300" dirty="0">
                         <a:latin typeface="Calibri" charset="0"/>
@@ -14203,7 +14203,7 @@
       </p:graphicFrame>
       <p:sp>
         <p:nvSpPr>
-          <p:cNvPr id="48" name="Text 45"/>
+          <p:cNvPr id="49" name="Text 45"/>
           <p:cNvSpPr txBox="1"/>
           <p:nvPr/>
         </p:nvSpPr>
@@ -22981,7 +22981,7 @@
                 <a:ea typeface="Calibri" pitchFamily="34" charset="-122"/>
                 <a:cs typeface="Calibri" pitchFamily="34" charset="-120"/>
               </a:rPr>
-              <a:t>31.6% of flags were for not being traced to the last intensive revision, in 2002; mismatched names came next.</a:t>
+              <a:t>31.6% of flags were for not being traced to the last intensive revision, in 2002. Mismatched names came next.</a:t>
             </a:r>
             <a:endParaRPr lang="en-US" sz="1400" dirty="0"/>
           </a:p>
@@ -23128,7 +23128,7 @@
                 <a:ea typeface="Cambria" pitchFamily="34" charset="-122"/>
                 <a:cs typeface="Cambria" pitchFamily="34" charset="-120"/>
               </a:rPr>
-              <a:t>The busiest hearing slot listed 459 cases; the median slot in Charminar listed 38</a:t>
+              <a:t>The busiest hearing slot listed 459 cases, and the typical slot in Charminar listed 38</a:t>
             </a:r>
             <a:endParaRPr lang="en-US" sz="2700" dirty="0"/>
           </a:p>
@@ -26473,7 +26473,7 @@
                 <a:ea typeface="Calibri" pitchFamily="34" charset="-122"/>
                 <a:cs typeface="Calibri" pitchFamily="34" charset="-120"/>
               </a:rPr>
-              <a:t>3,69,972 electors kept on the draft roll were summoned. The busiest single slot listed 459 cases, in Charminar, where the median slot listed 38. The lists do not record how long a slot was.</a:t>
+              <a:t>3,69,972 electors kept on the draft roll were summoned. The busiest single slot listed 459 cases, in Charminar, where the typical slot listed 38. The lists do not record how long a slot was.</a:t>
             </a:r>
             <a:endParaRPr lang="en-US" sz="1400" dirty="0"/>
           </a:p>
@@ -26645,7 +26645,7 @@
                 <a:ea typeface="Calibri" pitchFamily="34" charset="-122"/>
                 <a:cs typeface="Calibri" pitchFamily="34" charset="-120"/>
               </a:rPr>
-              <a:t>For four constituencies the counts agree exactly with an independent count of the same lists, as do the recorded reasons and women's share. The Malakpet list used here is incomplete: 1,42,688 names against 1,47,799 in the published list, with no part numbers or 2002 link.</a:t>
+              <a:t>For four constituencies the counts agree exactly with an independent count of the same lists, as do the recorded reasons and women's share. The Malakpet list used here is incomplete, with 1,42,688 names against 1,47,799 in the published list and no part numbers or 2002 link.</a:t>
             </a:r>
             <a:endParaRPr lang="en-US" sz="1400" dirty="0"/>
           </a:p>
@@ -31180,7 +31180,7 @@
                 <a:ea typeface="Calibri" pitchFamily="34" charset="-122"/>
                 <a:cs typeface="Calibri" pitchFamily="34" charset="-120"/>
               </a:rPr>
-              <a:t>Part correlations: Spearman rank correlations across parts with at least 100 electors, within each constituency.</a:t>
+              <a:t>Part correlations are Spearman rank correlations, which compare orderings only, across parts with at least 100 electors within each constituency.</a:t>
             </a:r>
             <a:endParaRPr lang="en-US" sz="1500" dirty="0"/>
           </a:p>
@@ -32278,7 +32278,7 @@
                 <a:ea typeface="Calibri" pitchFamily="34" charset="-122"/>
                 <a:cs typeface="Calibri" pitchFamily="34" charset="-120"/>
               </a:rPr>
-              <a:t>What happened to each elector on the five pre-revision rolls, % of the roll</a:t>
+              <a:t>What happened to each elector on the five rolls before the revision, as a % of the roll</a:t>
             </a:r>
             <a:endParaRPr lang="en-US" sz="1400" dirty="0"/>
           </a:p>
@@ -39680,7 +39680,7 @@
                 <a:ea typeface="Calibri" pitchFamily="34" charset="-122"/>
                 <a:cs typeface="Calibri" pitchFamily="34" charset="-120"/>
               </a:rPr>
-              <a:t>Hyderabad district: 41.0%. The rest of Telangana: 18.6%.</a:t>
+              <a:t>Hyderabad district lost 41.0% of its roll, and the rest of Telangana 18.6%.</a:t>
             </a:r>
             <a:endParaRPr lang="en-US" sz="1350" dirty="0"/>
           </a:p>
@@ -40805,7 +40805,7 @@
                 <a:ea typeface="Calibri" pitchFamily="34" charset="-122"/>
                 <a:cs typeface="Calibri" pitchFamily="34" charset="-120"/>
               </a:rPr>
-              <a:t>The pattern holds in every constituency: 70.1% to 76.6% of those aged 80 and over, 19.3% to 25.6% of those aged 18 to 24.</a:t>
+              <a:t>The pattern holds in every constituency, from 70.1% to 76.6% of those aged 80 and over and 19.3% to 25.6% of those aged 18 to 24.</a:t>
             </a:r>
             <a:endParaRPr lang="en-US" sz="1400" dirty="0"/>
           </a:p>
@@ -40991,7 +40991,7 @@
                 <a:ea typeface="Calibri" pitchFamily="34" charset="-122"/>
                 <a:cs typeface="Calibri" pitchFamily="34" charset="-120"/>
               </a:rPr>
-              <a:t>Share struck off, by whether the elector maps to the 2002 intensive revision roll. Malakpet's list carries no link.</a:t>
+              <a:t>Share struck off, by whether the elector can be traced to the roll of the 2002 intensive revision. Malakpet's list carries no link.</a:t>
             </a:r>
             <a:endParaRPr lang="en-US" sz="1400" dirty="0"/>
           </a:p>
@@ -41930,7 +41930,7 @@
                 <a:ea typeface="Calibri" pitchFamily="34" charset="-122"/>
                 <a:cs typeface="Calibri" pitchFamily="34" charset="-120"/>
               </a:rPr>
-              <a:t>Linked electors: 25.3% struck off. No link: 51.6%.</a:t>
+              <a:t>25.3% of linked electors were struck off, and 51.6% of those with no link.</a:t>
             </a:r>
             <a:endParaRPr lang="en-US" sz="1400" dirty="0"/>
           </a:p>
@@ -41972,7 +41972,7 @@
                 <a:ea typeface="Calibri" pitchFamily="34" charset="-122"/>
                 <a:cs typeface="Calibri" pitchFamily="34" charset="-120"/>
               </a:rPr>
-              <a:t>The 2002 link is the revision's own test. Anyone who moved to the city after 2002, or whose family name is spelt differently on the old roll, starts behind.</a:t>
+              <a:t>The revision asks every elector to show a link to the 2002 roll. Anyone who moved to the city after 2002, or whose family name is spelt differently on the old roll, starts behind.</a:t>
             </a:r>
             <a:endParaRPr lang="en-US" sz="1400" dirty="0"/>
           </a:p>

--- a/reports/hyderabad-old-city-sir-2026-deck.pptx
+++ b/reports/hyderabad-old-city-sir-2026-deck.pptx
@@ -25126,7 +25126,7 @@
                 <a:ea typeface="Calibri" pitchFamily="34" charset="-122"/>
                 <a:cs typeface="Calibri" pitchFamily="34" charset="-120"/>
               </a:rPr>
-              <a:t>Were most of those struck off not people who had moved away?</a:t>
+              <a:t>Were most of those struck off people who had moved away?</a:t>
             </a:r>
             <a:endParaRPr lang="en-US" sz="1400" dirty="0"/>
           </a:p>

--- a/reports/hyderabad-old-city-sir-2026-deck.pptx
+++ b/reports/hyderabad-old-city-sir-2026-deck.pptx
@@ -3598,7 +3598,7 @@
               <c:strCache>
                 <c:ptCount val="1"/>
                 <c:pt idx="0">
-                  <c:v>Median cases per slot</c:v>
+                  <c:v>Cases in the typical slot (median)</c:v>
                 </c:pt>
               </c:strCache>
             </c:strRef>
@@ -4747,7 +4747,7 @@
           <a:p>
             <a:r>
               <a:rPr lang="en-US" dirty="0"/>
-              <a:t>The lists cover every elector on the pre-revision rolls of the five constituencies, so each group has a true removal rate. These are the September 2026 lists and the final roll is due on 9 November, so names put back after hearings are not in them.</a:t>
+              <a:t>The Special Intensive Revision (SIR) is the Election Commission's house-to-house recheck of the electoral roll. The lists cover every elector on the rolls of the five constituencies before the revision, so each group has a true removal rate, the share of its own members struck off. These are the September 2026 lists. The final roll is due on 9 November, so names put back after hearings are not in them.</a:t>
             </a:r>
             <a:endParaRPr lang="en-US" dirty="0"/>
           </a:p>
@@ -5011,7 +5011,7 @@
           <a:p>
             <a:r>
               <a:rPr lang="en-US" dirty="0"/>
-              <a:t/>
+              <a:t>A polling part is the section of the roll served by one polling station. A rank correlation runs from -1 to 1 and measures how far two orderings of the parts agree.</a:t>
             </a:r>
             <a:endParaRPr lang="en-US" dirty="0"/>
           </a:p>
@@ -6067,7 +6067,7 @@
           <a:p>
             <a:r>
               <a:rPr lang="en-US" dirty="0"/>
-              <a:t>No election has been held on the revised roll. The comparison is of size only, because the roll records nobody's vote.</a:t>
+              <a:t>The winning margin is the winner's votes less the runner-up's. No election has been held on the revised roll. The comparison is of size only, because the roll records nobody's vote.</a:t>
             </a:r>
             <a:endParaRPr lang="en-US" dirty="0"/>
           </a:p>
@@ -7097,7 +7097,7 @@
                 <a:ea typeface="Calibri" pitchFamily="34" charset="-122"/>
                 <a:cs typeface="Calibri" pitchFamily="34" charset="-120"/>
               </a:rPr>
-              <a:t>electors struck off the pre-revision rolls</a:t>
+              <a:t>electors struck off the rolls before the revision</a:t>
             </a:r>
             <a:endParaRPr lang="en-US" sz="1250" dirty="0"/>
           </a:p>
@@ -9475,7 +9475,7 @@
                 <a:ea typeface="Calibri" pitchFamily="34" charset="-122"/>
                 <a:cs typeface="Calibri" pitchFamily="34" charset="-120"/>
               </a:rPr>
-              <a:t>Polling parts with at least 100 electors, by the share struck off; Malakpet has no part numbers</a:t>
+              <a:t>Polling parts with at least 100 electors, by the share struck off. Malakpet has no part numbers</a:t>
             </a:r>
             <a:endParaRPr lang="en-US" sz="1400" dirty="0"/>
           </a:p>
@@ -10557,7 +10557,7 @@
                           <a:ea typeface="Calibri" pitchFamily="34" charset="-122"/>
                           <a:cs typeface="Calibri" pitchFamily="34" charset="-120"/>
                         </a:rPr>
-                        <a:t>Median</a:t>
+                        <a:t>Middle</a:t>
                       </a:r>
                       <a:endParaRPr lang="en-US" sz="1300" dirty="0">
                         <a:latin typeface="Calibri" charset="0"/>
@@ -14203,7 +14203,7 @@
       </p:graphicFrame>
       <p:sp>
         <p:nvSpPr>
-          <p:cNvPr id="48" name="Text 45"/>
+          <p:cNvPr id="49" name="Text 45"/>
           <p:cNvSpPr txBox="1"/>
           <p:nvPr/>
         </p:nvSpPr>
@@ -22981,7 +22981,7 @@
                 <a:ea typeface="Calibri" pitchFamily="34" charset="-122"/>
                 <a:cs typeface="Calibri" pitchFamily="34" charset="-120"/>
               </a:rPr>
-              <a:t>31.6% of flags were for not being traced to the last intensive revision, in 2002; mismatched names came next.</a:t>
+              <a:t>31.6% of flags were for not being traced to the last intensive revision, in 2002. Mismatched names came next.</a:t>
             </a:r>
             <a:endParaRPr lang="en-US" sz="1400" dirty="0"/>
           </a:p>
@@ -23128,7 +23128,7 @@
                 <a:ea typeface="Cambria" pitchFamily="34" charset="-122"/>
                 <a:cs typeface="Cambria" pitchFamily="34" charset="-120"/>
               </a:rPr>
-              <a:t>The busiest hearing slot listed 459 cases; the median slot in Charminar listed 38</a:t>
+              <a:t>The busiest hearing slot listed 459 cases, and the typical slot in Charminar listed 38</a:t>
             </a:r>
             <a:endParaRPr lang="en-US" sz="2700" dirty="0"/>
           </a:p>
@@ -25126,7 +25126,7 @@
                 <a:ea typeface="Calibri" pitchFamily="34" charset="-122"/>
                 <a:cs typeface="Calibri" pitchFamily="34" charset="-120"/>
               </a:rPr>
-              <a:t>Were most of those struck off not people who had moved away?</a:t>
+              <a:t>Were most of those struck off people who had moved away?</a:t>
             </a:r>
             <a:endParaRPr lang="en-US" sz="1400" dirty="0"/>
           </a:p>
@@ -26473,7 +26473,7 @@
                 <a:ea typeface="Calibri" pitchFamily="34" charset="-122"/>
                 <a:cs typeface="Calibri" pitchFamily="34" charset="-120"/>
               </a:rPr>
-              <a:t>3,69,972 electors kept on the draft roll were summoned. The busiest single slot listed 459 cases, in Charminar, where the median slot listed 38. The lists do not record how long a slot was.</a:t>
+              <a:t>3,69,972 electors kept on the draft roll were summoned. The busiest single slot listed 459 cases, in Charminar, where the typical slot listed 38. The lists do not record how long a slot was.</a:t>
             </a:r>
             <a:endParaRPr lang="en-US" sz="1400" dirty="0"/>
           </a:p>
@@ -26645,7 +26645,7 @@
                 <a:ea typeface="Calibri" pitchFamily="34" charset="-122"/>
                 <a:cs typeface="Calibri" pitchFamily="34" charset="-120"/>
               </a:rPr>
-              <a:t>For four constituencies the counts agree exactly with an independent count of the same lists, as do the recorded reasons and women's share. The Malakpet list used here is incomplete: 1,42,688 names against 1,47,799 in the published list, with no part numbers or 2002 link.</a:t>
+              <a:t>For four constituencies the counts agree exactly with an independent count of the same lists, as do the recorded reasons and women's share. The Malakpet list used here is incomplete, with 1,42,688 names against 1,47,799 in the published list and no part numbers or 2002 link.</a:t>
             </a:r>
             <a:endParaRPr lang="en-US" sz="1400" dirty="0"/>
           </a:p>
@@ -31180,7 +31180,7 @@
                 <a:ea typeface="Calibri" pitchFamily="34" charset="-122"/>
                 <a:cs typeface="Calibri" pitchFamily="34" charset="-120"/>
               </a:rPr>
-              <a:t>Part correlations: Spearman rank correlations across parts with at least 100 electors, within each constituency.</a:t>
+              <a:t>Part correlations are Spearman rank correlations, which compare orderings only, across parts with at least 100 electors within each constituency.</a:t>
             </a:r>
             <a:endParaRPr lang="en-US" sz="1500" dirty="0"/>
           </a:p>
@@ -32278,7 +32278,7 @@
                 <a:ea typeface="Calibri" pitchFamily="34" charset="-122"/>
                 <a:cs typeface="Calibri" pitchFamily="34" charset="-120"/>
               </a:rPr>
-              <a:t>What happened to each elector on the five pre-revision rolls, % of the roll</a:t>
+              <a:t>What happened to each elector on the five rolls before the revision, as a % of the roll</a:t>
             </a:r>
             <a:endParaRPr lang="en-US" sz="1400" dirty="0"/>
           </a:p>
@@ -39680,7 +39680,7 @@
                 <a:ea typeface="Calibri" pitchFamily="34" charset="-122"/>
                 <a:cs typeface="Calibri" pitchFamily="34" charset="-120"/>
               </a:rPr>
-              <a:t>Hyderabad district: 41.0%. The rest of Telangana: 18.6%.</a:t>
+              <a:t>Hyderabad district lost 41.0% of its roll, and the rest of Telangana 18.6%.</a:t>
             </a:r>
             <a:endParaRPr lang="en-US" sz="1350" dirty="0"/>
           </a:p>
@@ -40805,7 +40805,7 @@
                 <a:ea typeface="Calibri" pitchFamily="34" charset="-122"/>
                 <a:cs typeface="Calibri" pitchFamily="34" charset="-120"/>
               </a:rPr>
-              <a:t>The pattern holds in every constituency: 70.1% to 76.6% of those aged 80 and over, 19.3% to 25.6% of those aged 18 to 24.</a:t>
+              <a:t>The pattern holds in every constituency, from 70.1% to 76.6% of those aged 80 and over and 19.3% to 25.6% of those aged 18 to 24.</a:t>
             </a:r>
             <a:endParaRPr lang="en-US" sz="1400" dirty="0"/>
           </a:p>
@@ -40991,7 +40991,7 @@
                 <a:ea typeface="Calibri" pitchFamily="34" charset="-122"/>
                 <a:cs typeface="Calibri" pitchFamily="34" charset="-120"/>
               </a:rPr>
-              <a:t>Share struck off, by whether the elector maps to the 2002 intensive revision roll. Malakpet's list carries no link.</a:t>
+              <a:t>Share struck off, by whether the elector can be traced to the roll of the 2002 intensive revision. Malakpet's list carries no link.</a:t>
             </a:r>
             <a:endParaRPr lang="en-US" sz="1400" dirty="0"/>
           </a:p>
@@ -41930,7 +41930,7 @@
                 <a:ea typeface="Calibri" pitchFamily="34" charset="-122"/>
                 <a:cs typeface="Calibri" pitchFamily="34" charset="-120"/>
               </a:rPr>
-              <a:t>Linked electors: 25.3% struck off. No link: 51.6%.</a:t>
+              <a:t>25.3% of linked electors were struck off, and 51.6% of those with no link.</a:t>
             </a:r>
             <a:endParaRPr lang="en-US" sz="1400" dirty="0"/>
           </a:p>
@@ -41972,7 +41972,7 @@
                 <a:ea typeface="Calibri" pitchFamily="34" charset="-122"/>
                 <a:cs typeface="Calibri" pitchFamily="34" charset="-120"/>
               </a:rPr>
-              <a:t>The 2002 link is the revision's own test. Anyone who moved to the city after 2002, or whose family name is spelt differently on the old roll, starts behind.</a:t>
+              <a:t>The revision asks every elector to show a link to the 2002 roll. Anyone who moved to the city after 2002, or whose family name is spelt differently on the old roll, starts behind.</a:t>
             </a:r>
             <a:endParaRPr lang="en-US" sz="1400" dirty="0"/>
           </a:p>

--- a/reports/hyderabad-old-city-sir-2026-deck.pptx
+++ b/reports/hyderabad-old-city-sir-2026-deck.pptx
@@ -217,19 +217,19 @@
                 <c:formatCode>General</c:formatCode>
                 <c:ptCount val="5"/>
                 <c:pt idx="0">
-                  <c:v>39.66</c:v>
+                  <c:v>39.655</c:v>
                 </c:pt>
                 <c:pt idx="1">
-                  <c:v>41.33</c:v>
+                  <c:v>41.3343</c:v>
                 </c:pt>
                 <c:pt idx="2">
-                  <c:v>45.09</c:v>
+                  <c:v>45.0896</c:v>
                 </c:pt>
                 <c:pt idx="3">
-                  <c:v>39.46</c:v>
+                  <c:v>39.4565</c:v>
                 </c:pt>
                 <c:pt idx="4">
-                  <c:v>34.57</c:v>
+                  <c:v>34.5704</c:v>
                 </c:pt>
               </c:numCache>
             </c:numRef>
@@ -313,19 +313,19 @@
                 <c:formatCode>General</c:formatCode>
                 <c:ptCount val="5"/>
                 <c:pt idx="0">
-                  <c:v>21.12</c:v>
+                  <c:v>21.1249</c:v>
                 </c:pt>
                 <c:pt idx="1">
-                  <c:v>23.3</c:v>
+                  <c:v>23.3011</c:v>
                 </c:pt>
                 <c:pt idx="2">
-                  <c:v>21.55</c:v>
+                  <c:v>21.5475</c:v>
                 </c:pt>
                 <c:pt idx="3">
-                  <c:v>21.27</c:v>
+                  <c:v>21.2685</c:v>
                 </c:pt>
                 <c:pt idx="4">
-                  <c:v>23.93</c:v>
+                  <c:v>23.9309</c:v>
                 </c:pt>
               </c:numCache>
             </c:numRef>
@@ -1429,49 +1429,49 @@
                 <c:formatCode>General</c:formatCode>
                 <c:ptCount val="15"/>
                 <c:pt idx="0">
-                  <c:v>34.57</c:v>
+                  <c:v>34.5704</c:v>
                 </c:pt>
                 <c:pt idx="1">
-                  <c:v>37</c:v>
+                  <c:v>36.9963</c:v>
                 </c:pt>
                 <c:pt idx="2">
-                  <c:v>38.19</c:v>
+                  <c:v>38.1891</c:v>
                 </c:pt>
                 <c:pt idx="3">
-                  <c:v>39.46</c:v>
+                  <c:v>39.4564</c:v>
                 </c:pt>
                 <c:pt idx="4">
-                  <c:v>39.64</c:v>
+                  <c:v>39.6387</c:v>
                 </c:pt>
                 <c:pt idx="5">
-                  <c:v>39.66</c:v>
+                  <c:v>39.655</c:v>
                 </c:pt>
                 <c:pt idx="6">
-                  <c:v>40.02</c:v>
+                  <c:v>40.0235</c:v>
                 </c:pt>
                 <c:pt idx="7">
-                  <c:v>41.33</c:v>
+                  <c:v>41.3343</c:v>
                 </c:pt>
                 <c:pt idx="8">
-                  <c:v>42.04</c:v>
+                  <c:v>42.0449</c:v>
                 </c:pt>
                 <c:pt idx="9">
-                  <c:v>42.61</c:v>
+                  <c:v>42.6132</c:v>
                 </c:pt>
                 <c:pt idx="10">
-                  <c:v>42.77</c:v>
+                  <c:v>42.7699</c:v>
                 </c:pt>
                 <c:pt idx="11">
-                  <c:v>44.14</c:v>
+                  <c:v>44.135</c:v>
                 </c:pt>
                 <c:pt idx="12">
-                  <c:v>44.76</c:v>
+                  <c:v>44.7617</c:v>
                 </c:pt>
                 <c:pt idx="13">
-                  <c:v>44.93</c:v>
+                  <c:v>44.9282</c:v>
                 </c:pt>
                 <c:pt idx="14">
-                  <c:v>45.17</c:v>
+                  <c:v>45.167</c:v>
                 </c:pt>
               </c:numCache>
             </c:numRef>
@@ -1978,16 +1978,16 @@
                 <c:formatCode>General</c:formatCode>
                 <c:ptCount val="4"/>
                 <c:pt idx="0">
-                  <c:v>26.16</c:v>
+                  <c:v>26.1588</c:v>
                 </c:pt>
                 <c:pt idx="1">
-                  <c:v>29.2</c:v>
+                  <c:v>29.1997</c:v>
                 </c:pt>
                 <c:pt idx="2">
-                  <c:v>24.75</c:v>
+                  <c:v>24.7509</c:v>
                 </c:pt>
                 <c:pt idx="3">
-                  <c:v>21.68</c:v>
+                  <c:v>21.6839</c:v>
                 </c:pt>
               </c:numCache>
             </c:numRef>
@@ -2067,16 +2067,16 @@
                 <c:formatCode>General</c:formatCode>
                 <c:ptCount val="4"/>
                 <c:pt idx="0">
-                  <c:v>53.08</c:v>
+                  <c:v>53.0824</c:v>
                 </c:pt>
                 <c:pt idx="1">
-                  <c:v>52.23</c:v>
+                  <c:v>52.2272</c:v>
                 </c:pt>
                 <c:pt idx="2">
-                  <c:v>51.73</c:v>
+                  <c:v>51.7309</c:v>
                 </c:pt>
                 <c:pt idx="3">
-                  <c:v>49.56</c:v>
+                  <c:v>49.5576</c:v>
                 </c:pt>
               </c:numCache>
             </c:numRef>
@@ -2333,19 +2333,19 @@
                 <c:formatCode>General</c:formatCode>
                 <c:ptCount val="5"/>
                 <c:pt idx="0">
-                  <c:v>46.62</c:v>
+                  <c:v>46.6186</c:v>
                 </c:pt>
                 <c:pt idx="1">
-                  <c:v>55.79</c:v>
+                  <c:v>55.7877</c:v>
                 </c:pt>
                 <c:pt idx="2">
-                  <c:v>53.64</c:v>
+                  <c:v>53.6427</c:v>
                 </c:pt>
                 <c:pt idx="3">
-                  <c:v>51.74</c:v>
+                  <c:v>51.743</c:v>
                 </c:pt>
                 <c:pt idx="4">
-                  <c:v>44.18</c:v>
+                  <c:v>44.1767</c:v>
                 </c:pt>
               </c:numCache>
             </c:numRef>
@@ -2428,19 +2428,19 @@
                 <c:formatCode>General</c:formatCode>
                 <c:ptCount val="5"/>
                 <c:pt idx="0">
-                  <c:v>36.1</c:v>
+                  <c:v>36.1008</c:v>
                 </c:pt>
                 <c:pt idx="1">
-                  <c:v>34.51</c:v>
+                  <c:v>34.5055</c:v>
                 </c:pt>
                 <c:pt idx="2">
-                  <c:v>38.16</c:v>
+                  <c:v>38.1568</c:v>
                 </c:pt>
                 <c:pt idx="3">
-                  <c:v>36.07</c:v>
+                  <c:v>36.0709</c:v>
                 </c:pt>
                 <c:pt idx="4">
-                  <c:v>33.36</c:v>
+                  <c:v>33.3587</c:v>
                 </c:pt>
               </c:numCache>
             </c:numRef>
@@ -2697,19 +2697,19 @@
                 <c:formatCode>General</c:formatCode>
                 <c:ptCount val="5"/>
                 <c:pt idx="0">
-                  <c:v>38.14</c:v>
+                  <c:v>38.1442</c:v>
                 </c:pt>
                 <c:pt idx="1">
-                  <c:v>40.31</c:v>
+                  <c:v>40.3108</c:v>
                 </c:pt>
                 <c:pt idx="2">
-                  <c:v>45.08</c:v>
+                  <c:v>45.0789</c:v>
                 </c:pt>
                 <c:pt idx="3">
-                  <c:v>40.01</c:v>
+                  <c:v>40.0076</c:v>
                 </c:pt>
                 <c:pt idx="4">
-                  <c:v>35.79</c:v>
+                  <c:v>35.7895</c:v>
                 </c:pt>
               </c:numCache>
             </c:numRef>
@@ -2792,19 +2792,19 @@
                 <c:formatCode>General</c:formatCode>
                 <c:ptCount val="5"/>
                 <c:pt idx="0">
-                  <c:v>41.11</c:v>
+                  <c:v>41.113</c:v>
                 </c:pt>
                 <c:pt idx="1">
-                  <c:v>42.42</c:v>
+                  <c:v>42.4157</c:v>
                 </c:pt>
                 <c:pt idx="2">
-                  <c:v>47.43</c:v>
+                  <c:v>47.4301</c:v>
                 </c:pt>
                 <c:pt idx="3">
-                  <c:v>38.97</c:v>
+                  <c:v>38.9719</c:v>
                 </c:pt>
                 <c:pt idx="4">
-                  <c:v>33.41</c:v>
+                  <c:v>33.413</c:v>
                 </c:pt>
               </c:numCache>
             </c:numRef>
@@ -21848,7 +21848,7 @@
                           <a:ea typeface="Calibri" pitchFamily="34" charset="-122"/>
                           <a:cs typeface="Calibri" pitchFamily="34" charset="-120"/>
                         </a:rPr>
-                        <a:t>64.3%</a:t>
+                        <a:t>64.2%</a:t>
                       </a:r>
                       <a:endParaRPr lang="en-US" sz="1150" dirty="0">
                         <a:latin typeface="Calibri" charset="0"/>
@@ -40805,7 +40805,7 @@
                 <a:ea typeface="Calibri" pitchFamily="34" charset="-122"/>
                 <a:cs typeface="Calibri" pitchFamily="34" charset="-120"/>
               </a:rPr>
-              <a:t>The pattern holds in every constituency, from 70.1% to 76.6% of those aged 80 and over and 19.3% to 25.6% of those aged 18 to 24.</a:t>
+              <a:t>The pattern holds in every constituency, from 70.1% to 76.6% of those aged 80 and over and 19.3% to 25.7% of those aged 18 to 24.</a:t>
             </a:r>
             <a:endParaRPr lang="en-US" sz="1400" dirty="0"/>
           </a:p>

--- a/reports/hyderabad-old-city-sir-2026-deck.pptx
+++ b/reports/hyderabad-old-city-sir-2026-deck.pptx
@@ -7448,7 +7448,7 @@
                 <a:ea typeface="Calibri" pitchFamily="34" charset="-122"/>
                 <a:cs typeface="Calibri" pitchFamily="34" charset="-120"/>
               </a:rPr>
-              <a:t>PinPoint Ventures</a:t>
+              <a:t>ImpactMojo</a:t>
             </a:r>
             <a:endParaRPr lang="en-US" sz="1300" dirty="0"/>
           </a:p>
@@ -8431,7 +8431,7 @@
                 <a:ea typeface="Calibri" pitchFamily="34" charset="-122"/>
                 <a:cs typeface="Calibri" pitchFamily="34" charset="-120"/>
               </a:rPr>
-              <a:t>Hyderabad Old City SIR 2026 · PinPoint Ventures · totals only, never names or EPIC numbers</a:t>
+              <a:t>Hyderabad Old City SIR 2026 · ImpactMojo · totals only, never names or EPIC numbers</a:t>
             </a:r>
             <a:endParaRPr lang="en-US" sz="900" dirty="0"/>
           </a:p>
@@ -9514,7 +9514,7 @@
                 <a:ea typeface="Calibri" pitchFamily="34" charset="-122"/>
                 <a:cs typeface="Calibri" pitchFamily="34" charset="-120"/>
               </a:rPr>
-              <a:t>Hyderabad Old City SIR 2026 · PinPoint Ventures · totals only, never names or EPIC numbers</a:t>
+              <a:t>Hyderabad Old City SIR 2026 · ImpactMojo · totals only, never names or EPIC numbers</a:t>
             </a:r>
             <a:endParaRPr lang="en-US" sz="900" dirty="0"/>
           </a:p>
@@ -11954,7 +11954,7 @@
                 <a:ea typeface="Calibri" pitchFamily="34" charset="-122"/>
                 <a:cs typeface="Calibri" pitchFamily="34" charset="-120"/>
               </a:rPr>
-              <a:t>Hyderabad Old City SIR 2026 · PinPoint Ventures · totals only, never names or EPIC numbers</a:t>
+              <a:t>Hyderabad Old City SIR 2026 · ImpactMojo · totals only, never names or EPIC numbers</a:t>
             </a:r>
             <a:endParaRPr lang="en-US" sz="900" dirty="0"/>
           </a:p>
@@ -14465,7 +14465,7 @@
                 <a:ea typeface="Calibri" pitchFamily="34" charset="-122"/>
                 <a:cs typeface="Calibri" pitchFamily="34" charset="-120"/>
               </a:rPr>
-              <a:t>Hyderabad Old City SIR 2026 · PinPoint Ventures · totals only, never names or EPIC numbers</a:t>
+              <a:t>Hyderabad Old City SIR 2026 · ImpactMojo · totals only, never names or EPIC numbers</a:t>
             </a:r>
             <a:endParaRPr lang="en-US" sz="900" dirty="0"/>
           </a:p>
@@ -22081,7 +22081,7 @@
                 <a:ea typeface="Calibri" pitchFamily="34" charset="-122"/>
                 <a:cs typeface="Calibri" pitchFamily="34" charset="-120"/>
               </a:rPr>
-              <a:t>Hyderabad Old City SIR 2026 · PinPoint Ventures · totals only, never names or EPIC numbers</a:t>
+              <a:t>Hyderabad Old City SIR 2026 · ImpactMojo · totals only, never names or EPIC numbers</a:t>
             </a:r>
             <a:endParaRPr lang="en-US" sz="900" dirty="0"/>
           </a:p>
@@ -23206,7 +23206,7 @@
                 <a:ea typeface="Calibri" pitchFamily="34" charset="-122"/>
                 <a:cs typeface="Calibri" pitchFamily="34" charset="-120"/>
               </a:rPr>
-              <a:t>Hyderabad Old City SIR 2026 · PinPoint Ventures · totals only, never names or EPIC numbers</a:t>
+              <a:t>Hyderabad Old City SIR 2026 · ImpactMojo · totals only, never names or EPIC numbers</a:t>
             </a:r>
             <a:endParaRPr lang="en-US" sz="900" dirty="0"/>
           </a:p>
@@ -24221,7 +24221,7 @@
                 <a:ea typeface="Calibri" pitchFamily="34" charset="-122"/>
                 <a:cs typeface="Calibri" pitchFamily="34" charset="-120"/>
               </a:rPr>
-              <a:t>Hyderabad Old City SIR 2026 · PinPoint Ventures · totals only, never names or EPIC numbers</a:t>
+              <a:t>Hyderabad Old City SIR 2026 · ImpactMojo · totals only, never names or EPIC numbers</a:t>
             </a:r>
             <a:endParaRPr lang="en-US" sz="900" dirty="0"/>
           </a:p>
@@ -25548,7 +25548,7 @@
                 <a:ea typeface="Calibri" pitchFamily="34" charset="-122"/>
                 <a:cs typeface="Calibri" pitchFamily="34" charset="-120"/>
               </a:rPr>
-              <a:t>Hyderabad Old City SIR 2026 · PinPoint Ventures · totals only, never names or EPIC numbers</a:t>
+              <a:t>Hyderabad Old City SIR 2026 · ImpactMojo · totals only, never names or EPIC numbers</a:t>
             </a:r>
             <a:endParaRPr lang="en-US" sz="900" dirty="0"/>
           </a:p>
@@ -26875,7 +26875,7 @@
                 <a:ea typeface="Calibri" pitchFamily="34" charset="-122"/>
                 <a:cs typeface="Calibri" pitchFamily="34" charset="-120"/>
               </a:rPr>
-              <a:t>Hyderabad Old City SIR 2026 · PinPoint Ventures · totals only, never names or EPIC numbers</a:t>
+              <a:t>Hyderabad Old City SIR 2026 · ImpactMojo · totals only, never names or EPIC numbers</a:t>
             </a:r>
             <a:endParaRPr lang="en-US" sz="900" dirty="0"/>
           </a:p>
@@ -28028,7 +28028,7 @@
                 <a:ea typeface="Calibri" pitchFamily="34" charset="-122"/>
                 <a:cs typeface="Calibri" pitchFamily="34" charset="-120"/>
               </a:rPr>
-              <a:t>Hyderabad Old City SIR 2026 · PinPoint Ventures · totals only, never names or EPIC numbers</a:t>
+              <a:t>Hyderabad Old City SIR 2026 · ImpactMojo · totals only, never names or EPIC numbers</a:t>
             </a:r>
             <a:endParaRPr lang="en-US" sz="900" dirty="0"/>
           </a:p>
@@ -30233,7 +30233,7 @@
                 <a:ea typeface="Calibri" pitchFamily="34" charset="-122"/>
                 <a:cs typeface="Calibri" pitchFamily="34" charset="-120"/>
               </a:rPr>
-              <a:t>Hyderabad Old City SIR 2026 · PinPoint Ventures · totals only, never names or EPIC numbers</a:t>
+              <a:t>Hyderabad Old City SIR 2026 · ImpactMojo · totals only, never names or EPIC numbers</a:t>
             </a:r>
             <a:endParaRPr lang="en-US" sz="900" dirty="0"/>
           </a:p>
@@ -31334,7 +31334,7 @@
                 <a:ea typeface="Calibri" pitchFamily="34" charset="-122"/>
                 <a:cs typeface="Calibri" pitchFamily="34" charset="-120"/>
               </a:rPr>
-              <a:t>PinPoint Ventures</a:t>
+              <a:t>ImpactMojo</a:t>
             </a:r>
             <a:endParaRPr lang="en-US" sz="1700" dirty="0"/>
           </a:p>
@@ -32317,7 +32317,7 @@
                 <a:ea typeface="Calibri" pitchFamily="34" charset="-122"/>
                 <a:cs typeface="Calibri" pitchFamily="34" charset="-120"/>
               </a:rPr>
-              <a:t>Hyderabad Old City SIR 2026 · PinPoint Ventures · totals only, never names or EPIC numbers</a:t>
+              <a:t>Hyderabad Old City SIR 2026 · ImpactMojo · totals only, never names or EPIC numbers</a:t>
             </a:r>
             <a:endParaRPr lang="en-US" sz="900" dirty="0"/>
           </a:p>
@@ -33667,7 +33667,7 @@
                 <a:ea typeface="Calibri" pitchFamily="34" charset="-122"/>
                 <a:cs typeface="Calibri" pitchFamily="34" charset="-120"/>
               </a:rPr>
-              <a:t>Hyderabad Old City SIR 2026 · PinPoint Ventures · totals only, never names or EPIC numbers</a:t>
+              <a:t>Hyderabad Old City SIR 2026 · ImpactMojo · totals only, never names or EPIC numbers</a:t>
             </a:r>
             <a:endParaRPr lang="en-US" sz="900" dirty="0"/>
           </a:p>
@@ -37655,7 +37655,7 @@
                 <a:ea typeface="Calibri" pitchFamily="34" charset="-122"/>
                 <a:cs typeface="Calibri" pitchFamily="34" charset="-120"/>
               </a:rPr>
-              <a:t>Hyderabad Old City SIR 2026 · PinPoint Ventures · totals only, never names or EPIC numbers</a:t>
+              <a:t>Hyderabad Old City SIR 2026 · ImpactMojo · totals only, never names or EPIC numbers</a:t>
             </a:r>
             <a:endParaRPr lang="en-US" sz="900" dirty="0"/>
           </a:p>
@@ -38780,7 +38780,7 @@
                 <a:ea typeface="Calibri" pitchFamily="34" charset="-122"/>
                 <a:cs typeface="Calibri" pitchFamily="34" charset="-120"/>
               </a:rPr>
-              <a:t>Hyderabad Old City SIR 2026 · PinPoint Ventures · totals only, never names or EPIC numbers</a:t>
+              <a:t>Hyderabad Old City SIR 2026 · ImpactMojo · totals only, never names or EPIC numbers</a:t>
             </a:r>
             <a:endParaRPr lang="en-US" sz="900" dirty="0"/>
           </a:p>
@@ -39905,7 +39905,7 @@
                 <a:ea typeface="Calibri" pitchFamily="34" charset="-122"/>
                 <a:cs typeface="Calibri" pitchFamily="34" charset="-120"/>
               </a:rPr>
-              <a:t>Hyderabad Old City SIR 2026 · PinPoint Ventures · totals only, never names or EPIC numbers</a:t>
+              <a:t>Hyderabad Old City SIR 2026 · ImpactMojo · totals only, never names or EPIC numbers</a:t>
             </a:r>
             <a:endParaRPr lang="en-US" sz="900" dirty="0"/>
           </a:p>
@@ -41030,7 +41030,7 @@
                 <a:ea typeface="Calibri" pitchFamily="34" charset="-122"/>
                 <a:cs typeface="Calibri" pitchFamily="34" charset="-120"/>
               </a:rPr>
-              <a:t>Hyderabad Old City SIR 2026 · PinPoint Ventures · totals only, never names or EPIC numbers</a:t>
+              <a:t>Hyderabad Old City SIR 2026 · ImpactMojo · totals only, never names or EPIC numbers</a:t>
             </a:r>
             <a:endParaRPr lang="en-US" sz="900" dirty="0"/>
           </a:p>
@@ -42155,7 +42155,7 @@
                 <a:ea typeface="Calibri" pitchFamily="34" charset="-122"/>
                 <a:cs typeface="Calibri" pitchFamily="34" charset="-120"/>
               </a:rPr>
-              <a:t>Hyderabad Old City SIR 2026 · PinPoint Ventures · totals only, never names or EPIC numbers</a:t>
+              <a:t>Hyderabad Old City SIR 2026 · ImpactMojo · totals only, never names or EPIC numbers</a:t>
             </a:r>
             <a:endParaRPr lang="en-US" sz="900" dirty="0"/>
           </a:p>

--- a/reports/hyderabad-old-city-sir-2026-deck.pptx
+++ b/reports/hyderabad-old-city-sir-2026-deck.pptx
@@ -148,7 +148,7 @@
               <c:strCache>
                 <c:ptCount val="1"/>
                 <c:pt idx="0">
-                  <c:v>Struck off</c:v>
+                  <c:v>Left off</c:v>
                 </c:pt>
               </c:strCache>
             </c:strRef>
@@ -1643,7 +1643,7 @@
               <c:strCache>
                 <c:ptCount val="1"/>
                 <c:pt idx="0">
-                  <c:v>% struck off</c:v>
+                  <c:v>% left off</c:v>
                 </c:pt>
               </c:strCache>
             </c:strRef>
@@ -4747,7 +4747,7 @@
           <a:p>
             <a:r>
               <a:rPr lang="en-US" dirty="0"/>
-              <a:t>The Special Intensive Revision (SIR) is the Election Commission's house-to-house recheck of the electoral roll. The lists cover every elector on the rolls of the five constituencies before the revision, so each group has a true removal rate, the share of its own members struck off. These are the September 2026 lists. The final roll is due on 9 November, so names put back after hearings are not in them.</a:t>
+              <a:t>The Special Intensive Revision (SIR) is the Election Commission's house-to-house recheck of the electoral roll. The lists cover every elector on the rolls of the five constituencies before the revision, so each group has a true exclusion rate, the share of its own members left off. These are the September 2026 lists. The final roll is due on 9 November, so names put back after hearings are not in them.</a:t>
             </a:r>
             <a:endParaRPr lang="en-US" dirty="0"/>
           </a:p>
@@ -6954,7 +6954,7 @@
                 <a:ea typeface="Cambria" pitchFamily="34" charset="-122"/>
                 <a:cs typeface="Cambria" pitchFamily="34" charset="-120"/>
               </a:rPr>
-              <a:t>The 2026 revision struck 6.6 lakh electors off five Old City rolls</a:t>
+              <a:t>The 2026 revision left 6.6 lakh electors in five Old City seats off the draft roll</a:t>
             </a:r>
             <a:endParaRPr lang="en-US" sz="3800" dirty="0"/>
           </a:p>
@@ -7097,7 +7097,7 @@
                 <a:ea typeface="Calibri" pitchFamily="34" charset="-122"/>
                 <a:cs typeface="Calibri" pitchFamily="34" charset="-120"/>
               </a:rPr>
-              <a:t>electors struck off the rolls before the revision</a:t>
+              <a:t>electors on the rolls before the revision left off the draft</a:t>
             </a:r>
             <a:endParaRPr lang="en-US" sz="1250" dirty="0"/>
           </a:p>
@@ -8353,7 +8353,7 @@
                 <a:ea typeface="Cambria" pitchFamily="34" charset="-122"/>
                 <a:cs typeface="Cambria" pitchFamily="34" charset="-120"/>
               </a:rPr>
-              <a:t>Women and men were struck off at similar rates, 39.9% and 40.5%</a:t>
+              <a:t>Women and men were left off the draft at similar rates, 39.9% and 40.5%</a:t>
             </a:r>
             <a:endParaRPr lang="en-US" sz="2700" dirty="0"/>
           </a:p>
@@ -8392,7 +8392,7 @@
                 <a:ea typeface="Calibri" pitchFamily="34" charset="-122"/>
                 <a:cs typeface="Calibri" pitchFamily="34" charset="-120"/>
               </a:rPr>
-              <a:t>Share struck off by sex, constituency by constituency</a:t>
+              <a:t>Share left off by sex, constituency by constituency</a:t>
             </a:r>
             <a:endParaRPr lang="en-US" sz="1400" dirty="0"/>
           </a:p>
@@ -9436,7 +9436,7 @@
                 <a:ea typeface="Cambria" pitchFamily="34" charset="-122"/>
                 <a:cs typeface="Cambria" pitchFamily="34" charset="-120"/>
               </a:rPr>
-              <a:t>Part removal rates ran from 13% to 80%</a:t>
+              <a:t>Part exclusion rates ran from 13% to 80%</a:t>
             </a:r>
             <a:endParaRPr lang="en-US" sz="2700" dirty="0"/>
           </a:p>
@@ -9475,7 +9475,7 @@
                 <a:ea typeface="Calibri" pitchFamily="34" charset="-122"/>
                 <a:cs typeface="Calibri" pitchFamily="34" charset="-120"/>
               </a:rPr>
-              <a:t>Polling parts with at least 100 electors, by the share struck off. Malakpet has no part numbers</a:t>
+              <a:t>Polling parts with at least 100 electors, by the share left off. Malakpet has no part numbers</a:t>
             </a:r>
             <a:endParaRPr lang="en-US" sz="1400" dirty="0"/>
           </a:p>
@@ -11915,7 +11915,7 @@
                 <a:ea typeface="Calibri" pitchFamily="34" charset="-122"/>
                 <a:cs typeface="Calibri" pitchFamily="34" charset="-120"/>
               </a:rPr>
-              <a:t>Rank correlation across parts within each constituency, with the part's removal rate</a:t>
+              <a:t>Rank correlation across parts within each constituency, with the part's exclusion rate</a:t>
             </a:r>
             <a:endParaRPr lang="en-US" sz="1400" dirty="0"/>
           </a:p>
@@ -14282,7 +14282,7 @@
                 <a:ea typeface="Calibri" pitchFamily="34" charset="-122"/>
                 <a:cs typeface="Calibri" pitchFamily="34" charset="-120"/>
               </a:rPr>
-              <a:t>Parts with at least 100 electors, and for the untraceable share, parts with at least 20 removals.</a:t>
+              <a:t>Parts with at least 100 electors, and for the untraceable share, parts with at least 20 exclusions.</a:t>
             </a:r>
             <a:endParaRPr lang="en-US" sz="1350" dirty="0"/>
           </a:p>
@@ -15630,7 +15630,7 @@
                           <a:ea typeface="Calibri" pitchFamily="34" charset="-122"/>
                           <a:cs typeface="Calibri" pitchFamily="34" charset="-120"/>
                         </a:rPr>
-                        <a:t>Struck off</a:t>
+                        <a:t>Left off</a:t>
                       </a:r>
                       <a:endParaRPr lang="en-US" sz="1150" dirty="0">
                         <a:latin typeface="Calibri" charset="0"/>
@@ -15698,7 +15698,7 @@
                           <a:ea typeface="Calibri" pitchFamily="34" charset="-122"/>
                           <a:cs typeface="Calibri" pitchFamily="34" charset="-120"/>
                         </a:rPr>
-                        <a:t>% struck off</a:t>
+                        <a:t>% left off</a:t>
                       </a:r>
                       <a:endParaRPr lang="en-US" sz="1150" dirty="0">
                         <a:latin typeface="Calibri" charset="0"/>
@@ -25126,7 +25126,7 @@
                 <a:ea typeface="Calibri" pitchFamily="34" charset="-122"/>
                 <a:cs typeface="Calibri" pitchFamily="34" charset="-120"/>
               </a:rPr>
-              <a:t>Were most of those struck off people who had moved away?</a:t>
+              <a:t>Were most of those left off the draft people who had moved away?</a:t>
             </a:r>
             <a:endParaRPr lang="en-US" sz="1400" dirty="0"/>
           </a:p>
@@ -25146,7 +25146,7 @@
                 <a:ea typeface="Calibri" pitchFamily="34" charset="-122"/>
                 <a:cs typeface="Calibri" pitchFamily="34" charset="-120"/>
               </a:rPr>
-              <a:t>The largest recorded reason is "permanently shifted", 64.2% of removals, and the Old City has a large moving population. But 20.8% were entered as untraceable or absent, 8.7% as dead and 6.0% as enrolled elsewhere. Each is what the officer wrote down, and nobody checked it.</a:t>
+              <a:t>The largest recorded reason is "permanently shifted", 64.2% of exclusions, and the Old City has a large moving population. But 20.8% were entered as untraceable or absent, 8.7% as dead and 6.0% as enrolled elsewhere. Each is what the officer wrote down, and nobody checked it.</a:t>
             </a:r>
             <a:endParaRPr lang="en-US" sz="1400" dirty="0"/>
           </a:p>
@@ -25232,7 +25232,7 @@
                 <a:ea typeface="Calibri" pitchFamily="34" charset="-122"/>
                 <a:cs typeface="Calibri" pitchFamily="34" charset="-120"/>
               </a:rPr>
-              <a:t>The lists do not show that. Inside the same polling part, Hindu-name electors were struck off more often than Muslim-name electors. The lists do show who bore the removals, the old and those who could not be traced to the 2002 roll.</a:t>
+              <a:t>The lists do not show that. Inside the same polling part, Hindu-name electors were left off the draft more often than Muslim-name electors. The lists do show who bore the exclusions, the old and those who could not be traced to the 2002 roll.</a:t>
             </a:r>
             <a:endParaRPr lang="en-US" sz="1400" dirty="0"/>
           </a:p>
@@ -25318,7 +25318,7 @@
                 <a:ea typeface="Calibri" pitchFamily="34" charset="-122"/>
                 <a:cs typeface="Calibri" pitchFamily="34" charset="-120"/>
               </a:rPr>
-              <a:t>The revision asks each elector to show a link to the 2002 intensive revision, through their own name or a parent's. Where the lists record it, electors with no link were struck off 21 to 28 points more often than linked electors in the same part.</a:t>
+              <a:t>The revision asks each elector to show a link to the 2002 intensive revision, through their own name or a parent's. Where the lists record it, electors with no link were left off the draft 21 to 28 points more often than linked electors in the same part.</a:t>
             </a:r>
             <a:endParaRPr lang="en-US" sz="1400" dirty="0"/>
           </a:p>
@@ -25384,7 +25384,7 @@
                 <a:ea typeface="Calibri" pitchFamily="34" charset="-122"/>
                 <a:cs typeface="Calibri" pitchFamily="34" charset="-120"/>
               </a:rPr>
-              <a:t>Why are the old struck off so often?</a:t>
+              <a:t>Why are the old left off so often?</a:t>
             </a:r>
             <a:endParaRPr lang="en-US" sz="1400" dirty="0"/>
           </a:p>
@@ -25404,7 +25404,7 @@
                 <a:ea typeface="Calibri" pitchFamily="34" charset="-122"/>
                 <a:cs typeface="Calibri" pitchFamily="34" charset="-120"/>
               </a:rPr>
-              <a:t>74.0% of electors aged 80 and over were struck off, against 20.9% of those aged 18 to 24. Some of that is death. The rest falls on electors least able to answer a visit, attend a hearing or produce papers.</a:t>
+              <a:t>74.0% of electors aged 80 and over were left off the draft, against 20.9% of those aged 18 to 24. Some of that is death. The rest falls on electors least able to answer a visit, attend a hearing or produce papers.</a:t>
             </a:r>
             <a:endParaRPr lang="en-US" sz="1400" dirty="0"/>
           </a:p>
@@ -26559,7 +26559,7 @@
                 <a:ea typeface="Calibri" pitchFamily="34" charset="-122"/>
                 <a:cs typeface="Calibri" pitchFamily="34" charset="-120"/>
               </a:rPr>
-              <a:t>No election has been held on the revised roll. Every one of the five constituencies lost more names than its 2023 winning margin, and in Yakutpura and Malakpet the names struck off outnumber every valid vote cast in 2023. Only Yakutpura is close. Its runner-up would need 50.8% of the removed who would vote to overturn the 2023 margin.</a:t>
+              <a:t>No election has been held on the revised roll. Every one of the five constituencies lost more names than its 2023 winning margin, and in Yakutpura and Malakpet the names left off the draft outnumber every valid vote cast in 2023. Only Yakutpura is close. Its runner-up would need 50.8% of those left off who would vote to overturn the 2023 margin.</a:t>
             </a:r>
             <a:endParaRPr lang="en-US" sz="1400" dirty="0"/>
           </a:p>
@@ -27777,7 +27777,7 @@
                 <a:ea typeface="Calibri" pitchFamily="34" charset="-122"/>
                 <a:cs typeface="Calibri" pitchFamily="34" charset="-120"/>
               </a:rPr>
-              <a:t>How many electors were struck off, from which parts, and who they were by age, sex, religion guessed from names, and link to the 2002 roll. Because the lists hold every elector, each group has a true removal rate.</a:t>
+              <a:t>How many electors were left off the draft, from which parts, and who they were by age, sex, religion guessed from names, and link to the 2002 roll. Because the lists hold every elector, each group has a true exclusion rate.</a:t>
             </a:r>
             <a:endParaRPr lang="en-US" sz="1500" dirty="0"/>
           </a:p>
@@ -27840,7 +27840,7 @@
                 <a:ea typeface="Calibri" pitchFamily="34" charset="-122"/>
                 <a:cs typeface="Calibri" pitchFamily="34" charset="-120"/>
               </a:rPr>
-              <a:t>Whether any single removal was right. A household that moved out is rightly marked "shifted", and the files cannot tell it apart from an elector who was at home when the officer missed them. Religion and age are given separately and never together.</a:t>
+              <a:t>Whether any single exclusion was right. A household that moved out is rightly marked "shifted", and the lists cannot tell it apart from an elector who was at home when the officer missed them. Religion and age are given separately and never together.</a:t>
             </a:r>
             <a:endParaRPr lang="en-US" sz="1500" dirty="0"/>
           </a:p>
@@ -28913,7 +28913,7 @@
                 <a:ea typeface="Calibri" pitchFamily="34" charset="-122"/>
                 <a:cs typeface="Calibri" pitchFamily="34" charset="-120"/>
               </a:rPr>
-              <a:t>Record and publish the basis for every removal entered as "untraceable or absent", 1,37,825 names in all, including the visits made and the notice given.</a:t>
+              <a:t>Record and publish the basis for every exclusion entered as "untraceable or absent", 1,37,825 names in all, including the visits made and the notice given.</a:t>
             </a:r>
             <a:endParaRPr lang="en-US" sz="1700" dirty="0"/>
           </a:p>
@@ -28935,7 +28935,7 @@
                 <a:ea typeface="Calibri" pitchFamily="34" charset="-122"/>
                 <a:cs typeface="Calibri" pitchFamily="34" charset="-120"/>
               </a:rPr>
-              <a:t>Publish how removals of electors with no link to the 2002 roll were decided.</a:t>
+              <a:t>Publish how exclusions of electors with no link to the 2002 roll were decided.</a:t>
             </a:r>
             <a:endParaRPr lang="en-US" sz="1700" dirty="0"/>
           </a:p>
@@ -28957,7 +28957,7 @@
                 <a:ea typeface="Calibri" pitchFamily="34" charset="-122"/>
                 <a:cs typeface="Calibri" pitchFamily="34" charset="-120"/>
               </a:rPr>
-              <a:t>Schedule hearings so that each case can be heard, rather than listing hundreds of cases in one slot.</a:t>
+              <a:t>Schedule hearings so that each case can be heard, and do not list hundreds of cases in one slot.</a:t>
             </a:r>
             <a:endParaRPr lang="en-US" sz="1700" dirty="0"/>
           </a:p>
@@ -28979,7 +28979,7 @@
                 <a:ea typeface="Calibri" pitchFamily="34" charset="-122"/>
                 <a:cs typeface="Calibri" pitchFamily="34" charset="-120"/>
               </a:rPr>
-              <a:t>Explain the removals in the 30 parts that lost more than 60% of their roll.</a:t>
+              <a:t>Explain the exclusions in the 30 parts that lost more than 60% of their roll.</a:t>
             </a:r>
             <a:endParaRPr lang="en-US" sz="1700" dirty="0"/>
           </a:p>
@@ -31117,7 +31117,7 @@
                 <a:ea typeface="Calibri" pitchFamily="34" charset="-122"/>
                 <a:cs typeface="Calibri" pitchFamily="34" charset="-120"/>
               </a:rPr>
-              <a:t>The source is the September 2026 SIR lists for the five constituencies, compiled for these five seats only. They record the outcome for every elector on the roll before the revision, whether struck off (with the officer's reason), kept but summoned to a hearing (with the rule), or kept.</a:t>
+              <a:t>The source is the September 2026 SIR lists for the five constituencies, compiled for these five seats only. They record the outcome for every elector on the roll before the revision, whether left off (with the officer's reason), kept but summoned to a hearing (with the rule), or kept.</a:t>
             </a:r>
             <a:endParaRPr lang="en-US" sz="1500" dirty="0"/>
           </a:p>
@@ -31138,7 +31138,7 @@
                 <a:ea typeface="Calibri" pitchFamily="34" charset="-122"/>
                 <a:cs typeface="Calibri" pitchFamily="34" charset="-120"/>
               </a:rPr>
-              <a:t>The removal rate is the electors on the absent-shifted-dead list divided by the electors on the roll before the revision, for each group.</a:t>
+              <a:t>The exclusion rate is the electors on the absent-shifted-dead list divided by the electors on the roll before the revision, for each group.</a:t>
             </a:r>
             <a:endParaRPr lang="en-US" sz="1500" dirty="0"/>
           </a:p>
@@ -32239,7 +32239,7 @@
                 <a:ea typeface="Cambria" pitchFamily="34" charset="-122"/>
                 <a:cs typeface="Cambria" pitchFamily="34" charset="-120"/>
               </a:rPr>
-              <a:t>40.0% of electors were struck off, and 22.3% more summoned to hearings</a:t>
+              <a:t>40.0% of electors were left off the draft, and 22.3% more summoned to hearings</a:t>
             </a:r>
             <a:endParaRPr lang="en-US" sz="2700" dirty="0"/>
           </a:p>
@@ -33276,7 +33276,7 @@
                 <a:ea typeface="Calibri" pitchFamily="34" charset="-122"/>
                 <a:cs typeface="Calibri" pitchFamily="34" charset="-120"/>
               </a:rPr>
-              <a:t>struck off, out of 16,57,207</a:t>
+              <a:t>left off, out of 16,57,207</a:t>
             </a:r>
             <a:endParaRPr lang="en-US" sz="1200" dirty="0"/>
           </a:p>
@@ -33589,7 +33589,7 @@
                 <a:ea typeface="Cambria" pitchFamily="34" charset="-122"/>
                 <a:cs typeface="Cambria" pitchFamily="34" charset="-120"/>
               </a:rPr>
-              <a:t>In all five seats, more names were struck off than the 2023 winner received</a:t>
+              <a:t>In all five seats, more names were left off the draft than the 2023 winner received</a:t>
             </a:r>
             <a:endParaRPr lang="en-US" sz="2700" dirty="0"/>
           </a:p>
@@ -33628,7 +33628,7 @@
                 <a:ea typeface="Calibri" pitchFamily="34" charset="-122"/>
                 <a:cs typeface="Calibri" pitchFamily="34" charset="-120"/>
               </a:rPr>
-              <a:t>Names struck off against the 2023 result</a:t>
+              <a:t>Names left off against the 2023 result</a:t>
             </a:r>
             <a:endParaRPr lang="en-US" sz="1400" dirty="0"/>
           </a:p>
@@ -34833,7 +34833,7 @@
                           <a:ea typeface="Calibri" pitchFamily="34" charset="-122"/>
                           <a:cs typeface="Calibri" pitchFamily="34" charset="-120"/>
                         </a:rPr>
-                        <a:t>Struck off</a:t>
+                        <a:t>Left off</a:t>
                       </a:r>
                       <a:endParaRPr lang="en-US" sz="1300" dirty="0">
                         <a:latin typeface="Calibri" charset="0"/>
@@ -37472,7 +37472,7 @@
                 <a:ea typeface="Calibri" pitchFamily="34" charset="-122"/>
                 <a:cs typeface="Calibri" pitchFamily="34" charset="-120"/>
               </a:rPr>
-              <a:t>In Yakutpura and Malakpet the names struck off exceed every valid vote cast in 2023. Yakutpura was won by 878 votes and lost 1,54,982 names. Across the five, the names struck off equal 99.0% of the 2023 vote.</a:t>
+              <a:t>In Yakutpura and Malakpet the names left off the draft exceed every valid vote cast in 2023. Yakutpura was won by 878 votes and lost 1,54,982 names. Across the five, the names left off the draft equal 99.0% of the 2023 vote.</a:t>
             </a:r>
             <a:endParaRPr lang="en-US" sz="1500" dirty="0"/>
           </a:p>
@@ -37577,7 +37577,7 @@
                 <a:ea typeface="Cambria" pitchFamily="34" charset="-122"/>
                 <a:cs typeface="Cambria" pitchFamily="34" charset="-120"/>
               </a:rPr>
-              <a:t>64% of removals were entered as "permanently shifted" and 21% as untraceable</a:t>
+              <a:t>64% of exclusions were entered as "permanently shifted" and 21% as untraceable</a:t>
             </a:r>
             <a:endParaRPr lang="en-US" sz="2700" dirty="0"/>
           </a:p>
@@ -37616,7 +37616,7 @@
                 <a:ea typeface="Calibri" pitchFamily="34" charset="-122"/>
                 <a:cs typeface="Calibri" pitchFamily="34" charset="-120"/>
               </a:rPr>
-              <a:t>Share of names struck off, by the reason the officer recorded</a:t>
+              <a:t>Share of names left off the draft, by the reason the officer recorded</a:t>
             </a:r>
             <a:endParaRPr lang="en-US" sz="1400" dirty="0"/>
           </a:p>
@@ -39701,7 +39701,7 @@
                 <a:ea typeface="Calibri" pitchFamily="34" charset="-122"/>
                 <a:cs typeface="Calibri" pitchFamily="34" charset="-120"/>
               </a:rPr>
-              <a:t>The removals are heavy across the whole capital region.</a:t>
+              <a:t>The exclusions are heavy across the whole capital region.</a:t>
             </a:r>
             <a:endParaRPr lang="en-US" sz="1350" dirty="0"/>
           </a:p>
@@ -39827,7 +39827,7 @@
                 <a:ea typeface="Cambria" pitchFamily="34" charset="-122"/>
                 <a:cs typeface="Cambria" pitchFamily="34" charset="-120"/>
               </a:rPr>
-              <a:t>74% of electors aged 80 and over were struck off, against 21% of those aged 18 to 24</a:t>
+              <a:t>74% of electors aged 80 and over were left off the draft, against 21% of those aged 18 to 24</a:t>
             </a:r>
             <a:endParaRPr lang="en-US" sz="2700" dirty="0"/>
           </a:p>
@@ -39866,7 +39866,7 @@
                 <a:ea typeface="Calibri" pitchFamily="34" charset="-122"/>
                 <a:cs typeface="Calibri" pitchFamily="34" charset="-120"/>
               </a:rPr>
-              <a:t>Share of each age band struck off, all five constituencies</a:t>
+              <a:t>Share of each age band left off, all five constituencies</a:t>
             </a:r>
             <a:endParaRPr lang="en-US" sz="1400" dirty="0"/>
           </a:p>
@@ -40952,7 +40952,7 @@
                 <a:ea typeface="Cambria" pitchFamily="34" charset="-122"/>
                 <a:cs typeface="Cambria" pitchFamily="34" charset="-120"/>
               </a:rPr>
-              <a:t>Electors with no link to the 2002 roll were struck off 2.0 times as often</a:t>
+              <a:t>Electors with no link to the 2002 roll were left off the draft 2.0 times as often</a:t>
             </a:r>
             <a:endParaRPr lang="en-US" sz="2700" dirty="0"/>
           </a:p>
@@ -40991,7 +40991,7 @@
                 <a:ea typeface="Calibri" pitchFamily="34" charset="-122"/>
                 <a:cs typeface="Calibri" pitchFamily="34" charset="-120"/>
               </a:rPr>
-              <a:t>Share struck off, by whether the elector can be traced to the roll of the 2002 intensive revision. Malakpet's list carries no link.</a:t>
+              <a:t>Share left off, by whether the elector can be traced to the roll of the 2002 intensive revision. Malakpet's list carries no link.</a:t>
             </a:r>
             <a:endParaRPr lang="en-US" sz="1400" dirty="0"/>
           </a:p>
@@ -41930,7 +41930,7 @@
                 <a:ea typeface="Calibri" pitchFamily="34" charset="-122"/>
                 <a:cs typeface="Calibri" pitchFamily="34" charset="-120"/>
               </a:rPr>
-              <a:t>25.3% of linked electors were struck off, and 51.6% of those with no link.</a:t>
+              <a:t>25.3% of linked electors were left off the draft, and 51.6% of those with no link.</a:t>
             </a:r>
             <a:endParaRPr lang="en-US" sz="1400" dirty="0"/>
           </a:p>
@@ -42077,7 +42077,7 @@
                 <a:ea typeface="Cambria" pitchFamily="34" charset="-122"/>
                 <a:cs typeface="Cambria" pitchFamily="34" charset="-120"/>
               </a:rPr>
-              <a:t>52.0% of Hindu-name electors were struck off, and 35.3% of Muslim-name electors</a:t>
+              <a:t>52.0% of Hindu-name electors were left off the draft, and 35.3% of Muslim-name electors</a:t>
             </a:r>
             <a:endParaRPr lang="en-US" sz="2700" dirty="0"/>
           </a:p>
@@ -42116,7 +42116,7 @@
                 <a:ea typeface="Calibri" pitchFamily="34" charset="-122"/>
                 <a:cs typeface="Calibri" pitchFamily="34" charset="-120"/>
               </a:rPr>
-              <a:t>Share struck off by religion guessed from names, constituency by constituency</a:t>
+              <a:t>Share left off by religion guessed from names, constituency by constituency</a:t>
             </a:r>
             <a:endParaRPr lang="en-US" sz="1400" dirty="0"/>
           </a:p>
@@ -43055,7 +43055,7 @@
                 <a:ea typeface="Calibri" pitchFamily="34" charset="-122"/>
                 <a:cs typeface="Calibri" pitchFamily="34" charset="-120"/>
               </a:rPr>
-              <a:t>Inside the same polling part, Hindu-name electors were struck off 9.6 to 24.5 points more often, in 728 of 823 parts large enough to compare.</a:t>
+              <a:t>Inside the same polling part, Hindu-name electors were left off the draft 9.6 to 24.5 points more often, in 728 of 823 parts large enough to compare.</a:t>
             </a:r>
             <a:endParaRPr lang="en-US" sz="1400" dirty="0"/>
           </a:p>

--- a/reports/hyderabad-old-city-sir-2026-deck.pptx
+++ b/reports/hyderabad-old-city-sir-2026-deck.pptx
@@ -4747,7 +4747,7 @@
           <a:p>
             <a:r>
               <a:rPr lang="en-US" dirty="0"/>
-              <a:t>The Special Intensive Revision (SIR) is the Election Commission's house-to-house recheck of the electoral roll. The lists cover every elector on the rolls of the five constituencies before the revision, so each group has a true exclusion rate, the share of its own members left off. These are the September 2026 lists. The final roll is due on 9 November, so names put back after hearings are not in them.</a:t>
+              <a:t>The Special Intensive Revision (SIR) is the Election Commission's house-to-house recheck of the electoral roll. The lists cover every elector on the rolls of the five constituencies before the revision, so each group has a true exclusion rate, the share of its own members left off. These are the September 2026 lists. The final roll is due on 30 November, so names put back after hearings are not in them.</a:t>
             </a:r>
             <a:endParaRPr lang="en-US" dirty="0"/>
           </a:p>
@@ -5275,7 +5275,7 @@
           <a:p>
             <a:r>
               <a:rPr lang="en-US" dirty="0"/>
-              <a:t>On 7 September the Commission extended the calendar, with claims to 7 October, hearings to 5 November and the final roll on 9 November. The schedules here are those in the September lists. The length of a slot is not recorded.</a:t>
+              <a:t>On 7 September the Commission extended the calendar, with claims to 7 October, and on 29 October it moved hearings to 26 November and the final roll to 30 November. The schedules here are those in the September lists. The length of a slot is not recorded.</a:t>
             </a:r>
             <a:endParaRPr lang="en-US" dirty="0"/>
           </a:p>
@@ -27884,7 +27884,7 @@
                 <a:ea typeface="Calibri" pitchFamily="34" charset="-122"/>
                 <a:cs typeface="Calibri" pitchFamily="34" charset="-120"/>
               </a:rPr>
-              <a:t>These are the September lists. The final roll is due on 9 November, so restorations after hearings are not in these counts. Malakpet's list is read by polling-station name (60 stations) and 7,891 electors on its roll appear in none of the three outcomes.</a:t>
+              <a:t>These are the September lists. The final roll is due on 30 November, so restorations after hearings are not in these counts. Malakpet's list is read by polling-station name (60 stations) and 7,891 electors on its roll appear in none of the three outcomes.</a:t>
             </a:r>
             <a:endParaRPr lang="en-US" sz="1600" dirty="0"/>
           </a:p>
